--- a/assets/figures-editable/c1-c2/c1-e18.pptx
+++ b/assets/figures-editable/c1-c2/c1-e18.pptx
@@ -7,7 +7,7 @@
   <p:sldIdLst>
     <p:sldId id="256" r:id="rId7"/>
   </p:sldIdLst>
-  <p:sldSz cx="11948160" cy="7924799" type="screen4x3"/>
+  <p:sldSz cx="12191695" cy="6858000" type="screen4x3"/>
   <p:notesSz cx="6858000" cy="9144000"/>
   <p:defaultTextStyle>
     <a:defPPr>
@@ -3098,14 +3098,14 @@
       <p:grpSpPr/>
       <p:sp>
         <p:nvSpPr>
-          <p:cNvPr id="2" name="text1" descr="sci-ppt:C1-E18-001"/>
+          <p:cNvPr id="2" name="C1-E18 text 0" descr="sci-ppt:o000"/>
           <p:cNvSpPr txBox="1"/>
           <p:nvPr/>
         </p:nvSpPr>
         <p:spPr>
           <a:xfrm>
-            <a:off x="316992" y="268224"/>
-            <a:ext cx="11277600" cy="359054"/>
+            <a:off x="274320" y="118872"/>
+            <a:ext cx="11612880" cy="340105"/>
           </a:xfrm>
           <a:prstGeom prst="rect">
             <a:avLst/>
@@ -3114,7 +3114,7 @@
           <a:effectLst/>
         </p:spPr>
         <p:txBody>
-          <a:bodyPr wrap="none" lIns="27432" rIns="27432" tIns="18288" bIns="18288" anchor="ctr">
+          <a:bodyPr wrap="none" lIns="18288" rIns="18288" tIns="18288" bIns="18288" anchor="t">
             <a:spAutoFit/>
           </a:bodyPr>
           <a:lstStyle/>
@@ -3125,34 +3125,31 @@
               </a:spcAft>
             </a:pPr>
             <a:r>
-              <a:rPr sz="1823" b="0" i="0">
+              <a:rPr sz="1900" b="1" i="0">
                 <a:solidFill>
                   <a:srgbClr val="8EDBD4"/>
                 </a:solidFill>
                 <a:latin typeface="Arial"/>
               </a:rPr>
-              <a:t>C1-E18 | Physical-variable diagram</a:t>
-            </a:r>
-          </a:p>
-        </p:txBody>
-      </p:sp>
-      <p:sp>
-        <p:nvSpPr>
-          <p:cNvPr id="3" name="rect2" descr="sci-ppt:C1-E18-002"/>
-          <p:cNvSpPr/>
-          <p:nvPr/>
-        </p:nvSpPr>
-        <p:spPr>
-          <a:xfrm>
-            <a:off x="609600" y="2011680"/>
-            <a:ext cx="3048000" cy="1280160"/>
-          </a:xfrm>
-          <a:prstGeom prst="rect">
-            <a:avLst/>
-          </a:prstGeom>
-          <a:solidFill>
-            <a:srgbClr val="213E4B"/>
-          </a:solidFill>
+              <a:t>C1-E18 · Independent pressure-work conservation check</a:t>
+            </a:r>
+          </a:p>
+        </p:txBody>
+      </p:sp>
+      <p:cxnSp>
+        <p:nvCxnSpPr>
+          <p:cNvPr id="3" name="C1-E18 line 1" descr="sci-ppt:o001"/>
+          <p:cNvCxnSpPr/>
+          <p:nvPr/>
+        </p:nvCxnSpPr>
+        <p:spPr>
+          <a:xfrm>
+            <a:off x="914400" y="5029200"/>
+            <a:ext cx="5943600" cy="0"/>
+          </a:xfrm>
+          <a:prstGeom prst="line">
+            <a:avLst/>
+          </a:prstGeom>
           <a:ln w="19050">
             <a:solidFill>
               <a:srgbClr val="B4C7D2"/>
@@ -3160,24 +3157,83 @@
           </a:ln>
           <a:effectLst/>
         </p:spPr>
-        <p:txBody>
-          <a:bodyPr rtlCol="0" anchor="ctr"/>
-          <a:lstStyle/>
-          <a:p>
-            <a:pPr algn="ctr"/>
-          </a:p>
-        </p:txBody>
-      </p:sp>
-      <p:sp>
-        <p:nvSpPr>
-          <p:cNvPr id="4" name="text3" descr="sci-ppt:C1-E18-003"/>
+      </p:cxnSp>
+      <p:cxnSp>
+        <p:nvCxnSpPr>
+          <p:cNvPr id="4" name="C1-E18 line 2" descr="sci-ppt:o002"/>
+          <p:cNvCxnSpPr/>
+          <p:nvPr/>
+        </p:nvCxnSpPr>
+        <p:spPr>
+          <a:xfrm>
+            <a:off x="914400" y="1371600"/>
+            <a:ext cx="0" cy="3657600"/>
+          </a:xfrm>
+          <a:prstGeom prst="line">
+            <a:avLst/>
+          </a:prstGeom>
+          <a:ln w="19050">
+            <a:solidFill>
+              <a:srgbClr val="B4C7D2"/>
+            </a:solidFill>
+          </a:ln>
+          <a:effectLst/>
+        </p:spPr>
+      </p:cxnSp>
+      <p:cxnSp>
+        <p:nvCxnSpPr>
+          <p:cNvPr id="5" name="C1-E18 line 3" descr="sci-ppt:o003"/>
+          <p:cNvCxnSpPr/>
+          <p:nvPr/>
+        </p:nvCxnSpPr>
+        <p:spPr>
+          <a:xfrm>
+            <a:off x="914400" y="5029200"/>
+            <a:ext cx="0" cy="64008"/>
+          </a:xfrm>
+          <a:prstGeom prst="line">
+            <a:avLst/>
+          </a:prstGeom>
+          <a:ln w="12700">
+            <a:solidFill>
+              <a:srgbClr val="B4C7D2"/>
+            </a:solidFill>
+          </a:ln>
+          <a:effectLst/>
+        </p:spPr>
+      </p:cxnSp>
+      <p:cxnSp>
+        <p:nvCxnSpPr>
+          <p:cNvPr id="6" name="C1-E18 line 4" descr="sci-ppt:o004"/>
+          <p:cNvCxnSpPr/>
+          <p:nvPr/>
+        </p:nvCxnSpPr>
+        <p:spPr>
+          <a:xfrm>
+            <a:off x="914400" y="1371600"/>
+            <a:ext cx="0" cy="3657600"/>
+          </a:xfrm>
+          <a:prstGeom prst="line">
+            <a:avLst/>
+          </a:prstGeom>
+          <a:ln w="7620">
+            <a:solidFill>
+              <a:srgbClr val="2E4756"/>
+            </a:solidFill>
+          </a:ln>
+          <a:effectLst/>
+        </p:spPr>
+      </p:cxnSp>
+      <p:sp>
+        <p:nvSpPr>
+          <p:cNvPr id="7" name="C1-E18 text 5" descr="sci-ppt:o005"/>
           <p:cNvSpPr txBox="1"/>
           <p:nvPr/>
         </p:nvSpPr>
         <p:spPr>
           <a:xfrm>
-            <a:off x="731520" y="2133600"/>
-            <a:ext cx="2865120" cy="340156"/>
+            <a:off x="457200" y="5111496"/>
+            <a:ext cx="914400" cy="208407"/>
           </a:xfrm>
           <a:prstGeom prst="rect">
             <a:avLst/>
@@ -3186,7 +3242,781 @@
           <a:effectLst/>
         </p:spPr>
         <p:txBody>
-          <a:bodyPr wrap="none" lIns="27432" rIns="27432" tIns="18288" bIns="18288" anchor="ctr">
+          <a:bodyPr wrap="none" lIns="18288" rIns="18288" tIns="18288" bIns="18288" anchor="t">
+            <a:spAutoFit/>
+          </a:bodyPr>
+          <a:lstStyle/>
+          <a:p>
+            <a:pPr algn="ctr">
+              <a:spcAft>
+                <a:spcPts val="0"/>
+              </a:spcAft>
+            </a:pPr>
+            <a:r>
+              <a:rPr sz="1050" b="0" i="0">
+                <a:solidFill>
+                  <a:srgbClr val="B4C7D2"/>
+                </a:solidFill>
+                <a:latin typeface="Arial"/>
+              </a:rPr>
+              <a:t>0.00</a:t>
+            </a:r>
+          </a:p>
+        </p:txBody>
+      </p:sp>
+      <p:cxnSp>
+        <p:nvCxnSpPr>
+          <p:cNvPr id="8" name="C1-E18 line 6" descr="sci-ppt:o006"/>
+          <p:cNvCxnSpPr/>
+          <p:nvPr/>
+        </p:nvCxnSpPr>
+        <p:spPr>
+          <a:xfrm>
+            <a:off x="2400300" y="5029200"/>
+            <a:ext cx="0" cy="64008"/>
+          </a:xfrm>
+          <a:prstGeom prst="line">
+            <a:avLst/>
+          </a:prstGeom>
+          <a:ln w="12700">
+            <a:solidFill>
+              <a:srgbClr val="B4C7D2"/>
+            </a:solidFill>
+          </a:ln>
+          <a:effectLst/>
+        </p:spPr>
+      </p:cxnSp>
+      <p:cxnSp>
+        <p:nvCxnSpPr>
+          <p:cNvPr id="9" name="C1-E18 line 7" descr="sci-ppt:o007"/>
+          <p:cNvCxnSpPr/>
+          <p:nvPr/>
+        </p:nvCxnSpPr>
+        <p:spPr>
+          <a:xfrm>
+            <a:off x="2400300" y="1371600"/>
+            <a:ext cx="0" cy="3657600"/>
+          </a:xfrm>
+          <a:prstGeom prst="line">
+            <a:avLst/>
+          </a:prstGeom>
+          <a:ln w="7620">
+            <a:solidFill>
+              <a:srgbClr val="2E4756"/>
+            </a:solidFill>
+          </a:ln>
+          <a:effectLst/>
+        </p:spPr>
+      </p:cxnSp>
+      <p:sp>
+        <p:nvSpPr>
+          <p:cNvPr id="10" name="C1-E18 text 8" descr="sci-ppt:o008"/>
+          <p:cNvSpPr txBox="1"/>
+          <p:nvPr/>
+        </p:nvSpPr>
+        <p:spPr>
+          <a:xfrm>
+            <a:off x="1943100" y="5111496"/>
+            <a:ext cx="914400" cy="208407"/>
+          </a:xfrm>
+          <a:prstGeom prst="rect">
+            <a:avLst/>
+          </a:prstGeom>
+          <a:noFill/>
+          <a:effectLst/>
+        </p:spPr>
+        <p:txBody>
+          <a:bodyPr wrap="none" lIns="18288" rIns="18288" tIns="18288" bIns="18288" anchor="t">
+            <a:spAutoFit/>
+          </a:bodyPr>
+          <a:lstStyle/>
+          <a:p>
+            <a:pPr algn="ctr">
+              <a:spcAft>
+                <a:spcPts val="0"/>
+              </a:spcAft>
+            </a:pPr>
+            <a:r>
+              <a:rPr sz="1050" b="0" i="0">
+                <a:solidFill>
+                  <a:srgbClr val="B4C7D2"/>
+                </a:solidFill>
+                <a:latin typeface="Arial"/>
+              </a:rPr>
+              <a:t>0.25</a:t>
+            </a:r>
+          </a:p>
+        </p:txBody>
+      </p:sp>
+      <p:cxnSp>
+        <p:nvCxnSpPr>
+          <p:cNvPr id="11" name="C1-E18 line 9" descr="sci-ppt:o009"/>
+          <p:cNvCxnSpPr/>
+          <p:nvPr/>
+        </p:nvCxnSpPr>
+        <p:spPr>
+          <a:xfrm>
+            <a:off x="3886200" y="5029200"/>
+            <a:ext cx="0" cy="64008"/>
+          </a:xfrm>
+          <a:prstGeom prst="line">
+            <a:avLst/>
+          </a:prstGeom>
+          <a:ln w="12700">
+            <a:solidFill>
+              <a:srgbClr val="B4C7D2"/>
+            </a:solidFill>
+          </a:ln>
+          <a:effectLst/>
+        </p:spPr>
+      </p:cxnSp>
+      <p:cxnSp>
+        <p:nvCxnSpPr>
+          <p:cNvPr id="12" name="C1-E18 line 10" descr="sci-ppt:o010"/>
+          <p:cNvCxnSpPr/>
+          <p:nvPr/>
+        </p:nvCxnSpPr>
+        <p:spPr>
+          <a:xfrm>
+            <a:off x="3886200" y="1371600"/>
+            <a:ext cx="0" cy="3657600"/>
+          </a:xfrm>
+          <a:prstGeom prst="line">
+            <a:avLst/>
+          </a:prstGeom>
+          <a:ln w="7620">
+            <a:solidFill>
+              <a:srgbClr val="2E4756"/>
+            </a:solidFill>
+          </a:ln>
+          <a:effectLst/>
+        </p:spPr>
+      </p:cxnSp>
+      <p:sp>
+        <p:nvSpPr>
+          <p:cNvPr id="13" name="C1-E18 text 11" descr="sci-ppt:o011"/>
+          <p:cNvSpPr txBox="1"/>
+          <p:nvPr/>
+        </p:nvSpPr>
+        <p:spPr>
+          <a:xfrm>
+            <a:off x="3429000" y="5111496"/>
+            <a:ext cx="914400" cy="208407"/>
+          </a:xfrm>
+          <a:prstGeom prst="rect">
+            <a:avLst/>
+          </a:prstGeom>
+          <a:noFill/>
+          <a:effectLst/>
+        </p:spPr>
+        <p:txBody>
+          <a:bodyPr wrap="none" lIns="18288" rIns="18288" tIns="18288" bIns="18288" anchor="t">
+            <a:spAutoFit/>
+          </a:bodyPr>
+          <a:lstStyle/>
+          <a:p>
+            <a:pPr algn="ctr">
+              <a:spcAft>
+                <a:spcPts val="0"/>
+              </a:spcAft>
+            </a:pPr>
+            <a:r>
+              <a:rPr sz="1050" b="0" i="0">
+                <a:solidFill>
+                  <a:srgbClr val="B4C7D2"/>
+                </a:solidFill>
+                <a:latin typeface="Arial"/>
+              </a:rPr>
+              <a:t>0.50</a:t>
+            </a:r>
+          </a:p>
+        </p:txBody>
+      </p:sp>
+      <p:cxnSp>
+        <p:nvCxnSpPr>
+          <p:cNvPr id="14" name="C1-E18 line 12" descr="sci-ppt:o012"/>
+          <p:cNvCxnSpPr/>
+          <p:nvPr/>
+        </p:nvCxnSpPr>
+        <p:spPr>
+          <a:xfrm>
+            <a:off x="5372100" y="5029200"/>
+            <a:ext cx="0" cy="64008"/>
+          </a:xfrm>
+          <a:prstGeom prst="line">
+            <a:avLst/>
+          </a:prstGeom>
+          <a:ln w="12700">
+            <a:solidFill>
+              <a:srgbClr val="B4C7D2"/>
+            </a:solidFill>
+          </a:ln>
+          <a:effectLst/>
+        </p:spPr>
+      </p:cxnSp>
+      <p:cxnSp>
+        <p:nvCxnSpPr>
+          <p:cNvPr id="15" name="C1-E18 line 13" descr="sci-ppt:o013"/>
+          <p:cNvCxnSpPr/>
+          <p:nvPr/>
+        </p:nvCxnSpPr>
+        <p:spPr>
+          <a:xfrm>
+            <a:off x="5372100" y="1371600"/>
+            <a:ext cx="0" cy="3657600"/>
+          </a:xfrm>
+          <a:prstGeom prst="line">
+            <a:avLst/>
+          </a:prstGeom>
+          <a:ln w="7620">
+            <a:solidFill>
+              <a:srgbClr val="2E4756"/>
+            </a:solidFill>
+          </a:ln>
+          <a:effectLst/>
+        </p:spPr>
+      </p:cxnSp>
+      <p:sp>
+        <p:nvSpPr>
+          <p:cNvPr id="16" name="C1-E18 text 14" descr="sci-ppt:o014"/>
+          <p:cNvSpPr txBox="1"/>
+          <p:nvPr/>
+        </p:nvSpPr>
+        <p:spPr>
+          <a:xfrm>
+            <a:off x="4914900" y="5111496"/>
+            <a:ext cx="914400" cy="208407"/>
+          </a:xfrm>
+          <a:prstGeom prst="rect">
+            <a:avLst/>
+          </a:prstGeom>
+          <a:noFill/>
+          <a:effectLst/>
+        </p:spPr>
+        <p:txBody>
+          <a:bodyPr wrap="none" lIns="18288" rIns="18288" tIns="18288" bIns="18288" anchor="t">
+            <a:spAutoFit/>
+          </a:bodyPr>
+          <a:lstStyle/>
+          <a:p>
+            <a:pPr algn="ctr">
+              <a:spcAft>
+                <a:spcPts val="0"/>
+              </a:spcAft>
+            </a:pPr>
+            <a:r>
+              <a:rPr sz="1050" b="0" i="0">
+                <a:solidFill>
+                  <a:srgbClr val="B4C7D2"/>
+                </a:solidFill>
+                <a:latin typeface="Arial"/>
+              </a:rPr>
+              <a:t>0.75</a:t>
+            </a:r>
+          </a:p>
+        </p:txBody>
+      </p:sp>
+      <p:cxnSp>
+        <p:nvCxnSpPr>
+          <p:cNvPr id="17" name="C1-E18 line 15" descr="sci-ppt:o015"/>
+          <p:cNvCxnSpPr/>
+          <p:nvPr/>
+        </p:nvCxnSpPr>
+        <p:spPr>
+          <a:xfrm>
+            <a:off x="6858000" y="5029200"/>
+            <a:ext cx="0" cy="64008"/>
+          </a:xfrm>
+          <a:prstGeom prst="line">
+            <a:avLst/>
+          </a:prstGeom>
+          <a:ln w="12700">
+            <a:solidFill>
+              <a:srgbClr val="B4C7D2"/>
+            </a:solidFill>
+          </a:ln>
+          <a:effectLst/>
+        </p:spPr>
+      </p:cxnSp>
+      <p:cxnSp>
+        <p:nvCxnSpPr>
+          <p:cNvPr id="18" name="C1-E18 line 16" descr="sci-ppt:o016"/>
+          <p:cNvCxnSpPr/>
+          <p:nvPr/>
+        </p:nvCxnSpPr>
+        <p:spPr>
+          <a:xfrm>
+            <a:off x="6858000" y="1371600"/>
+            <a:ext cx="0" cy="3657600"/>
+          </a:xfrm>
+          <a:prstGeom prst="line">
+            <a:avLst/>
+          </a:prstGeom>
+          <a:ln w="7620">
+            <a:solidFill>
+              <a:srgbClr val="2E4756"/>
+            </a:solidFill>
+          </a:ln>
+          <a:effectLst/>
+        </p:spPr>
+      </p:cxnSp>
+      <p:sp>
+        <p:nvSpPr>
+          <p:cNvPr id="19" name="C1-E18 text 17" descr="sci-ppt:o017"/>
+          <p:cNvSpPr txBox="1"/>
+          <p:nvPr/>
+        </p:nvSpPr>
+        <p:spPr>
+          <a:xfrm>
+            <a:off x="6400800" y="5111496"/>
+            <a:ext cx="914400" cy="208407"/>
+          </a:xfrm>
+          <a:prstGeom prst="rect">
+            <a:avLst/>
+          </a:prstGeom>
+          <a:noFill/>
+          <a:effectLst/>
+        </p:spPr>
+        <p:txBody>
+          <a:bodyPr wrap="none" lIns="18288" rIns="18288" tIns="18288" bIns="18288" anchor="t">
+            <a:spAutoFit/>
+          </a:bodyPr>
+          <a:lstStyle/>
+          <a:p>
+            <a:pPr algn="ctr">
+              <a:spcAft>
+                <a:spcPts val="0"/>
+              </a:spcAft>
+            </a:pPr>
+            <a:r>
+              <a:rPr sz="1050" b="0" i="0">
+                <a:solidFill>
+                  <a:srgbClr val="B4C7D2"/>
+                </a:solidFill>
+                <a:latin typeface="Arial"/>
+              </a:rPr>
+              <a:t>1.00</a:t>
+            </a:r>
+          </a:p>
+        </p:txBody>
+      </p:sp>
+      <p:cxnSp>
+        <p:nvCxnSpPr>
+          <p:cNvPr id="20" name="C1-E18 line 18" descr="sci-ppt:o018"/>
+          <p:cNvCxnSpPr/>
+          <p:nvPr/>
+        </p:nvCxnSpPr>
+        <p:spPr>
+          <a:xfrm>
+            <a:off x="850392" y="5029200"/>
+            <a:ext cx="64008" cy="0"/>
+          </a:xfrm>
+          <a:prstGeom prst="line">
+            <a:avLst/>
+          </a:prstGeom>
+          <a:ln w="12700">
+            <a:solidFill>
+              <a:srgbClr val="B4C7D2"/>
+            </a:solidFill>
+          </a:ln>
+          <a:effectLst/>
+        </p:spPr>
+      </p:cxnSp>
+      <p:cxnSp>
+        <p:nvCxnSpPr>
+          <p:cNvPr id="21" name="C1-E18 line 19" descr="sci-ppt:o019"/>
+          <p:cNvCxnSpPr/>
+          <p:nvPr/>
+        </p:nvCxnSpPr>
+        <p:spPr>
+          <a:xfrm>
+            <a:off x="850392" y="4158342"/>
+            <a:ext cx="64008" cy="0"/>
+          </a:xfrm>
+          <a:prstGeom prst="line">
+            <a:avLst/>
+          </a:prstGeom>
+          <a:ln w="12700">
+            <a:solidFill>
+              <a:srgbClr val="B4C7D2"/>
+            </a:solidFill>
+          </a:ln>
+          <a:effectLst/>
+        </p:spPr>
+      </p:cxnSp>
+      <p:cxnSp>
+        <p:nvCxnSpPr>
+          <p:cNvPr id="22" name="C1-E18 line 20" descr="sci-ppt:o020"/>
+          <p:cNvCxnSpPr/>
+          <p:nvPr/>
+        </p:nvCxnSpPr>
+        <p:spPr>
+          <a:xfrm>
+            <a:off x="914400" y="4158342"/>
+            <a:ext cx="5943600" cy="0"/>
+          </a:xfrm>
+          <a:prstGeom prst="line">
+            <a:avLst/>
+          </a:prstGeom>
+          <a:ln w="7620">
+            <a:solidFill>
+              <a:srgbClr val="2E4756"/>
+            </a:solidFill>
+          </a:ln>
+          <a:effectLst/>
+        </p:spPr>
+      </p:cxnSp>
+      <p:sp>
+        <p:nvSpPr>
+          <p:cNvPr id="23" name="C1-E18 text 21" descr="sci-ppt:o021"/>
+          <p:cNvSpPr txBox="1"/>
+          <p:nvPr/>
+        </p:nvSpPr>
+        <p:spPr>
+          <a:xfrm>
+            <a:off x="45720" y="4076046"/>
+            <a:ext cx="777240" cy="208407"/>
+          </a:xfrm>
+          <a:prstGeom prst="rect">
+            <a:avLst/>
+          </a:prstGeom>
+          <a:noFill/>
+          <a:effectLst/>
+        </p:spPr>
+        <p:txBody>
+          <a:bodyPr wrap="none" lIns="18288" rIns="18288" tIns="18288" bIns="18288" anchor="t">
+            <a:spAutoFit/>
+          </a:bodyPr>
+          <a:lstStyle/>
+          <a:p>
+            <a:pPr algn="r">
+              <a:spcAft>
+                <a:spcPts val="0"/>
+              </a:spcAft>
+            </a:pPr>
+            <a:r>
+              <a:rPr sz="1050" b="0" i="0">
+                <a:solidFill>
+                  <a:srgbClr val="B4C7D2"/>
+                </a:solidFill>
+                <a:latin typeface="Arial"/>
+              </a:rPr>
+              <a:t>0.25</a:t>
+            </a:r>
+          </a:p>
+        </p:txBody>
+      </p:sp>
+      <p:cxnSp>
+        <p:nvCxnSpPr>
+          <p:cNvPr id="24" name="C1-E18 line 22" descr="sci-ppt:o022"/>
+          <p:cNvCxnSpPr/>
+          <p:nvPr/>
+        </p:nvCxnSpPr>
+        <p:spPr>
+          <a:xfrm>
+            <a:off x="850392" y="3287485"/>
+            <a:ext cx="64008" cy="0"/>
+          </a:xfrm>
+          <a:prstGeom prst="line">
+            <a:avLst/>
+          </a:prstGeom>
+          <a:ln w="12700">
+            <a:solidFill>
+              <a:srgbClr val="B4C7D2"/>
+            </a:solidFill>
+          </a:ln>
+          <a:effectLst/>
+        </p:spPr>
+      </p:cxnSp>
+      <p:cxnSp>
+        <p:nvCxnSpPr>
+          <p:cNvPr id="25" name="C1-E18 line 23" descr="sci-ppt:o023"/>
+          <p:cNvCxnSpPr/>
+          <p:nvPr/>
+        </p:nvCxnSpPr>
+        <p:spPr>
+          <a:xfrm>
+            <a:off x="914400" y="3287485"/>
+            <a:ext cx="5943600" cy="0"/>
+          </a:xfrm>
+          <a:prstGeom prst="line">
+            <a:avLst/>
+          </a:prstGeom>
+          <a:ln w="7620">
+            <a:solidFill>
+              <a:srgbClr val="2E4756"/>
+            </a:solidFill>
+          </a:ln>
+          <a:effectLst/>
+        </p:spPr>
+      </p:cxnSp>
+      <p:sp>
+        <p:nvSpPr>
+          <p:cNvPr id="26" name="C1-E18 text 24" descr="sci-ppt:o024"/>
+          <p:cNvSpPr txBox="1"/>
+          <p:nvPr/>
+        </p:nvSpPr>
+        <p:spPr>
+          <a:xfrm>
+            <a:off x="45720" y="3205189"/>
+            <a:ext cx="777240" cy="208407"/>
+          </a:xfrm>
+          <a:prstGeom prst="rect">
+            <a:avLst/>
+          </a:prstGeom>
+          <a:noFill/>
+          <a:effectLst/>
+        </p:spPr>
+        <p:txBody>
+          <a:bodyPr wrap="none" lIns="18288" rIns="18288" tIns="18288" bIns="18288" anchor="t">
+            <a:spAutoFit/>
+          </a:bodyPr>
+          <a:lstStyle/>
+          <a:p>
+            <a:pPr algn="r">
+              <a:spcAft>
+                <a:spcPts val="0"/>
+              </a:spcAft>
+            </a:pPr>
+            <a:r>
+              <a:rPr sz="1050" b="0" i="0">
+                <a:solidFill>
+                  <a:srgbClr val="B4C7D2"/>
+                </a:solidFill>
+                <a:latin typeface="Arial"/>
+              </a:rPr>
+              <a:t>0.50</a:t>
+            </a:r>
+          </a:p>
+        </p:txBody>
+      </p:sp>
+      <p:cxnSp>
+        <p:nvCxnSpPr>
+          <p:cNvPr id="27" name="C1-E18 line 25" descr="sci-ppt:o025"/>
+          <p:cNvCxnSpPr/>
+          <p:nvPr/>
+        </p:nvCxnSpPr>
+        <p:spPr>
+          <a:xfrm>
+            <a:off x="850392" y="2416628"/>
+            <a:ext cx="64008" cy="0"/>
+          </a:xfrm>
+          <a:prstGeom prst="line">
+            <a:avLst/>
+          </a:prstGeom>
+          <a:ln w="12700">
+            <a:solidFill>
+              <a:srgbClr val="B4C7D2"/>
+            </a:solidFill>
+          </a:ln>
+          <a:effectLst/>
+        </p:spPr>
+      </p:cxnSp>
+      <p:cxnSp>
+        <p:nvCxnSpPr>
+          <p:cNvPr id="28" name="C1-E18 line 26" descr="sci-ppt:o026"/>
+          <p:cNvCxnSpPr/>
+          <p:nvPr/>
+        </p:nvCxnSpPr>
+        <p:spPr>
+          <a:xfrm>
+            <a:off x="914400" y="2416628"/>
+            <a:ext cx="5943600" cy="0"/>
+          </a:xfrm>
+          <a:prstGeom prst="line">
+            <a:avLst/>
+          </a:prstGeom>
+          <a:ln w="7620">
+            <a:solidFill>
+              <a:srgbClr val="2E4756"/>
+            </a:solidFill>
+          </a:ln>
+          <a:effectLst/>
+        </p:spPr>
+      </p:cxnSp>
+      <p:sp>
+        <p:nvSpPr>
+          <p:cNvPr id="29" name="C1-E18 text 27" descr="sci-ppt:o027"/>
+          <p:cNvSpPr txBox="1"/>
+          <p:nvPr/>
+        </p:nvSpPr>
+        <p:spPr>
+          <a:xfrm>
+            <a:off x="45720" y="2334332"/>
+            <a:ext cx="777240" cy="208407"/>
+          </a:xfrm>
+          <a:prstGeom prst="rect">
+            <a:avLst/>
+          </a:prstGeom>
+          <a:noFill/>
+          <a:effectLst/>
+        </p:spPr>
+        <p:txBody>
+          <a:bodyPr wrap="none" lIns="18288" rIns="18288" tIns="18288" bIns="18288" anchor="t">
+            <a:spAutoFit/>
+          </a:bodyPr>
+          <a:lstStyle/>
+          <a:p>
+            <a:pPr algn="r">
+              <a:spcAft>
+                <a:spcPts val="0"/>
+              </a:spcAft>
+            </a:pPr>
+            <a:r>
+              <a:rPr sz="1050" b="0" i="0">
+                <a:solidFill>
+                  <a:srgbClr val="B4C7D2"/>
+                </a:solidFill>
+                <a:latin typeface="Arial"/>
+              </a:rPr>
+              <a:t>0.75</a:t>
+            </a:r>
+          </a:p>
+        </p:txBody>
+      </p:sp>
+      <p:cxnSp>
+        <p:nvCxnSpPr>
+          <p:cNvPr id="30" name="C1-E18 line 28" descr="sci-ppt:o028"/>
+          <p:cNvCxnSpPr/>
+          <p:nvPr/>
+        </p:nvCxnSpPr>
+        <p:spPr>
+          <a:xfrm>
+            <a:off x="850392" y="1545771"/>
+            <a:ext cx="64008" cy="0"/>
+          </a:xfrm>
+          <a:prstGeom prst="line">
+            <a:avLst/>
+          </a:prstGeom>
+          <a:ln w="12700">
+            <a:solidFill>
+              <a:srgbClr val="B4C7D2"/>
+            </a:solidFill>
+          </a:ln>
+          <a:effectLst/>
+        </p:spPr>
+      </p:cxnSp>
+      <p:cxnSp>
+        <p:nvCxnSpPr>
+          <p:cNvPr id="31" name="C1-E18 line 29" descr="sci-ppt:o029"/>
+          <p:cNvCxnSpPr/>
+          <p:nvPr/>
+        </p:nvCxnSpPr>
+        <p:spPr>
+          <a:xfrm>
+            <a:off x="914400" y="1545771"/>
+            <a:ext cx="5943600" cy="0"/>
+          </a:xfrm>
+          <a:prstGeom prst="line">
+            <a:avLst/>
+          </a:prstGeom>
+          <a:ln w="7620">
+            <a:solidFill>
+              <a:srgbClr val="2E4756"/>
+            </a:solidFill>
+          </a:ln>
+          <a:effectLst/>
+        </p:spPr>
+      </p:cxnSp>
+      <p:sp>
+        <p:nvSpPr>
+          <p:cNvPr id="32" name="C1-E18 text 30" descr="sci-ppt:o030"/>
+          <p:cNvSpPr txBox="1"/>
+          <p:nvPr/>
+        </p:nvSpPr>
+        <p:spPr>
+          <a:xfrm>
+            <a:off x="45720" y="1463475"/>
+            <a:ext cx="777240" cy="208407"/>
+          </a:xfrm>
+          <a:prstGeom prst="rect">
+            <a:avLst/>
+          </a:prstGeom>
+          <a:noFill/>
+          <a:effectLst/>
+        </p:spPr>
+        <p:txBody>
+          <a:bodyPr wrap="none" lIns="18288" rIns="18288" tIns="18288" bIns="18288" anchor="t">
+            <a:spAutoFit/>
+          </a:bodyPr>
+          <a:lstStyle/>
+          <a:p>
+            <a:pPr algn="r">
+              <a:spcAft>
+                <a:spcPts val="0"/>
+              </a:spcAft>
+            </a:pPr>
+            <a:r>
+              <a:rPr sz="1050" b="0" i="0">
+                <a:solidFill>
+                  <a:srgbClr val="B4C7D2"/>
+                </a:solidFill>
+                <a:latin typeface="Arial"/>
+              </a:rPr>
+              <a:t>1.00</a:t>
+            </a:r>
+          </a:p>
+        </p:txBody>
+      </p:sp>
+      <p:sp>
+        <p:nvSpPr>
+          <p:cNvPr id="33" name="C1-E18 text 31" descr="sci-ppt:o031"/>
+          <p:cNvSpPr txBox="1"/>
+          <p:nvPr/>
+        </p:nvSpPr>
+        <p:spPr>
+          <a:xfrm>
+            <a:off x="914400" y="5312664"/>
+            <a:ext cx="5943600" cy="231648"/>
+          </a:xfrm>
+          <a:prstGeom prst="rect">
+            <a:avLst/>
+          </a:prstGeom>
+          <a:noFill/>
+          <a:effectLst/>
+        </p:spPr>
+        <p:txBody>
+          <a:bodyPr wrap="none" lIns="18288" rIns="18288" tIns="18288" bIns="18288" anchor="t">
+            <a:spAutoFit/>
+          </a:bodyPr>
+          <a:lstStyle/>
+          <a:p>
+            <a:pPr algn="ctr">
+              <a:spcAft>
+                <a:spcPts val="0"/>
+              </a:spcAft>
+            </a:pPr>
+            <a:r>
+              <a:rPr sz="1200" b="0" i="0">
+                <a:solidFill>
+                  <a:srgbClr val="E7F0F3"/>
+                </a:solidFill>
+                <a:latin typeface="Arial"/>
+              </a:rPr>
+              <a:t>R / Rₘₐₓ</a:t>
+            </a:r>
+          </a:p>
+        </p:txBody>
+      </p:sp>
+      <p:sp>
+        <p:nvSpPr>
+          <p:cNvPr id="34" name="C1-E18 text 32" descr="sci-ppt:o032"/>
+          <p:cNvSpPr txBox="1"/>
+          <p:nvPr/>
+        </p:nvSpPr>
+        <p:spPr>
+          <a:xfrm>
+            <a:off x="365760" y="1024128"/>
+            <a:ext cx="5943600" cy="231648"/>
+          </a:xfrm>
+          <a:prstGeom prst="rect">
+            <a:avLst/>
+          </a:prstGeom>
+          <a:noFill/>
+          <a:effectLst/>
+        </p:spPr>
+        <p:txBody>
+          <a:bodyPr wrap="none" lIns="18288" rIns="18288" tIns="18288" bIns="18288" anchor="t">
             <a:spAutoFit/>
           </a:bodyPr>
           <a:lstStyle/>
@@ -3197,37 +4027,643 @@
               </a:spcAft>
             </a:pPr>
             <a:r>
-              <a:rPr sz="1728" b="0" i="0">
+              <a:rPr sz="1200" b="0" i="0">
                 <a:solidFill>
                   <a:srgbClr val="E7F0F3"/>
                 </a:solidFill>
                 <a:latin typeface="Arial"/>
               </a:rPr>
-              <a:t>Pressure-work budget E_B</a:t>
-            </a:r>
-          </a:p>
-        </p:txBody>
-      </p:sp>
-      <p:sp>
-        <p:nvSpPr>
-          <p:cNvPr id="5" name="rect4" descr="sci-ppt:C1-E18-004"/>
+              <a:t>Kₗ / E_B</a:t>
+            </a:r>
+          </a:p>
+        </p:txBody>
+      </p:sp>
+      <p:sp>
+        <p:nvSpPr>
+          <p:cNvPr id="35" name="C1-E18 polygon 33" descr="sci-ppt:o033"/>
           <p:cNvSpPr/>
           <p:nvPr/>
         </p:nvSpPr>
         <p:spPr>
           <a:xfrm>
-            <a:off x="4511040" y="2011680"/>
-            <a:ext cx="3048000" cy="1280160"/>
-          </a:xfrm>
-          <a:prstGeom prst="rect">
-            <a:avLst/>
-          </a:prstGeom>
-          <a:solidFill>
-            <a:srgbClr val="213E4B"/>
-          </a:solidFill>
-          <a:ln w="19050">
+            <a:off x="1033271" y="1545799"/>
+            <a:ext cx="5824729" cy="3483401"/>
+          </a:xfrm>
+          <a:custGeom>
+            <a:avLst/>
+            <a:gdLst/>
+            <a:ahLst/>
+            <a:cxnLst/>
+            <a:rect l="l" t="t" r="r" b="b"/>
+            <a:pathLst>
+              <a:path w="5824729" h="3483401">
+                <a:moveTo>
+                  <a:pt x="0" y="0"/>
+                </a:moveTo>
+                <a:lnTo>
+                  <a:pt x="29270" y="26"/>
+                </a:lnTo>
+                <a:lnTo>
+                  <a:pt x="58540" y="65"/>
+                </a:lnTo>
+                <a:lnTo>
+                  <a:pt x="87810" y="118"/>
+                </a:lnTo>
+                <a:lnTo>
+                  <a:pt x="117080" y="190"/>
+                </a:lnTo>
+                <a:lnTo>
+                  <a:pt x="146350" y="281"/>
+                </a:lnTo>
+                <a:lnTo>
+                  <a:pt x="175620" y="396"/>
+                </a:lnTo>
+                <a:lnTo>
+                  <a:pt x="204890" y="535"/>
+                </a:lnTo>
+                <a:lnTo>
+                  <a:pt x="234160" y="702"/>
+                </a:lnTo>
+                <a:lnTo>
+                  <a:pt x="263430" y="899"/>
+                </a:lnTo>
+                <a:lnTo>
+                  <a:pt x="292700" y="1129"/>
+                </a:lnTo>
+                <a:lnTo>
+                  <a:pt x="321970" y="1393"/>
+                </a:lnTo>
+                <a:lnTo>
+                  <a:pt x="351240" y="1696"/>
+                </a:lnTo>
+                <a:lnTo>
+                  <a:pt x="380510" y="2038"/>
+                </a:lnTo>
+                <a:lnTo>
+                  <a:pt x="409780" y="2423"/>
+                </a:lnTo>
+                <a:lnTo>
+                  <a:pt x="439050" y="2853"/>
+                </a:lnTo>
+                <a:lnTo>
+                  <a:pt x="468320" y="3331"/>
+                </a:lnTo>
+                <a:lnTo>
+                  <a:pt x="497590" y="3859"/>
+                </a:lnTo>
+                <a:lnTo>
+                  <a:pt x="526860" y="4439"/>
+                </a:lnTo>
+                <a:lnTo>
+                  <a:pt x="556130" y="5074"/>
+                </a:lnTo>
+                <a:lnTo>
+                  <a:pt x="585400" y="5767"/>
+                </a:lnTo>
+                <a:lnTo>
+                  <a:pt x="614670" y="6520"/>
+                </a:lnTo>
+                <a:lnTo>
+                  <a:pt x="643940" y="7336"/>
+                </a:lnTo>
+                <a:lnTo>
+                  <a:pt x="673210" y="8217"/>
+                </a:lnTo>
+                <a:lnTo>
+                  <a:pt x="702480" y="9165"/>
+                </a:lnTo>
+                <a:lnTo>
+                  <a:pt x="731750" y="10183"/>
+                </a:lnTo>
+                <a:lnTo>
+                  <a:pt x="761020" y="11274"/>
+                </a:lnTo>
+                <a:lnTo>
+                  <a:pt x="790290" y="12439"/>
+                </a:lnTo>
+                <a:lnTo>
+                  <a:pt x="819560" y="13683"/>
+                </a:lnTo>
+                <a:lnTo>
+                  <a:pt x="848830" y="15006"/>
+                </a:lnTo>
+                <a:lnTo>
+                  <a:pt x="878100" y="16412"/>
+                </a:lnTo>
+                <a:lnTo>
+                  <a:pt x="907370" y="17903"/>
+                </a:lnTo>
+                <a:lnTo>
+                  <a:pt x="936640" y="19481"/>
+                </a:lnTo>
+                <a:lnTo>
+                  <a:pt x="965910" y="21150"/>
+                </a:lnTo>
+                <a:lnTo>
+                  <a:pt x="995180" y="22911"/>
+                </a:lnTo>
+                <a:lnTo>
+                  <a:pt x="1024450" y="24767"/>
+                </a:lnTo>
+                <a:lnTo>
+                  <a:pt x="1053720" y="26720"/>
+                </a:lnTo>
+                <a:lnTo>
+                  <a:pt x="1082990" y="28774"/>
+                </a:lnTo>
+                <a:lnTo>
+                  <a:pt x="1112260" y="30930"/>
+                </a:lnTo>
+                <a:lnTo>
+                  <a:pt x="1141530" y="33191"/>
+                </a:lnTo>
+                <a:lnTo>
+                  <a:pt x="1170800" y="35559"/>
+                </a:lnTo>
+                <a:lnTo>
+                  <a:pt x="1200070" y="38038"/>
+                </a:lnTo>
+                <a:lnTo>
+                  <a:pt x="1229340" y="40629"/>
+                </a:lnTo>
+                <a:lnTo>
+                  <a:pt x="1258610" y="43335"/>
+                </a:lnTo>
+                <a:lnTo>
+                  <a:pt x="1287880" y="46158"/>
+                </a:lnTo>
+                <a:lnTo>
+                  <a:pt x="1317150" y="49101"/>
+                </a:lnTo>
+                <a:lnTo>
+                  <a:pt x="1346420" y="52167"/>
+                </a:lnTo>
+                <a:lnTo>
+                  <a:pt x="1375690" y="55358"/>
+                </a:lnTo>
+                <a:lnTo>
+                  <a:pt x="1404960" y="58676"/>
+                </a:lnTo>
+                <a:lnTo>
+                  <a:pt x="1434230" y="62124"/>
+                </a:lnTo>
+                <a:lnTo>
+                  <a:pt x="1463500" y="65705"/>
+                </a:lnTo>
+                <a:lnTo>
+                  <a:pt x="1492770" y="69421"/>
+                </a:lnTo>
+                <a:lnTo>
+                  <a:pt x="1522040" y="73274"/>
+                </a:lnTo>
+                <a:lnTo>
+                  <a:pt x="1551310" y="77267"/>
+                </a:lnTo>
+                <a:lnTo>
+                  <a:pt x="1580580" y="81402"/>
+                </a:lnTo>
+                <a:lnTo>
+                  <a:pt x="1609850" y="85682"/>
+                </a:lnTo>
+                <a:lnTo>
+                  <a:pt x="1639120" y="90110"/>
+                </a:lnTo>
+                <a:lnTo>
+                  <a:pt x="1668390" y="94688"/>
+                </a:lnTo>
+                <a:lnTo>
+                  <a:pt x="1697660" y="99418"/>
+                </a:lnTo>
+                <a:lnTo>
+                  <a:pt x="1726930" y="104303"/>
+                </a:lnTo>
+                <a:lnTo>
+                  <a:pt x="1756200" y="109345"/>
+                </a:lnTo>
+                <a:lnTo>
+                  <a:pt x="1785470" y="114548"/>
+                </a:lnTo>
+                <a:lnTo>
+                  <a:pt x="1814740" y="119912"/>
+                </a:lnTo>
+                <a:lnTo>
+                  <a:pt x="1844010" y="125442"/>
+                </a:lnTo>
+                <a:lnTo>
+                  <a:pt x="1873280" y="131139"/>
+                </a:lnTo>
+                <a:lnTo>
+                  <a:pt x="1902550" y="137006"/>
+                </a:lnTo>
+                <a:lnTo>
+                  <a:pt x="1931820" y="143045"/>
+                </a:lnTo>
+                <a:lnTo>
+                  <a:pt x="1961090" y="149260"/>
+                </a:lnTo>
+                <a:lnTo>
+                  <a:pt x="1990360" y="155651"/>
+                </a:lnTo>
+                <a:lnTo>
+                  <a:pt x="2019630" y="162223"/>
+                </a:lnTo>
+                <a:lnTo>
+                  <a:pt x="2048900" y="168977"/>
+                </a:lnTo>
+                <a:lnTo>
+                  <a:pt x="2078170" y="175915"/>
+                </a:lnTo>
+                <a:lnTo>
+                  <a:pt x="2107440" y="183041"/>
+                </a:lnTo>
+                <a:lnTo>
+                  <a:pt x="2136710" y="190357"/>
+                </a:lnTo>
+                <a:lnTo>
+                  <a:pt x="2165980" y="197866"/>
+                </a:lnTo>
+                <a:lnTo>
+                  <a:pt x="2195250" y="205569"/>
+                </a:lnTo>
+                <a:lnTo>
+                  <a:pt x="2224520" y="213469"/>
+                </a:lnTo>
+                <a:lnTo>
+                  <a:pt x="2253790" y="221570"/>
+                </a:lnTo>
+                <a:lnTo>
+                  <a:pt x="2283060" y="229872"/>
+                </a:lnTo>
+                <a:lnTo>
+                  <a:pt x="2312330" y="238380"/>
+                </a:lnTo>
+                <a:lnTo>
+                  <a:pt x="2341600" y="247095"/>
+                </a:lnTo>
+                <a:lnTo>
+                  <a:pt x="2370870" y="256020"/>
+                </a:lnTo>
+                <a:lnTo>
+                  <a:pt x="2400140" y="265157"/>
+                </a:lnTo>
+                <a:lnTo>
+                  <a:pt x="2429410" y="274509"/>
+                </a:lnTo>
+                <a:lnTo>
+                  <a:pt x="2458680" y="284078"/>
+                </a:lnTo>
+                <a:lnTo>
+                  <a:pt x="2487950" y="293867"/>
+                </a:lnTo>
+                <a:lnTo>
+                  <a:pt x="2517220" y="303878"/>
+                </a:lnTo>
+                <a:lnTo>
+                  <a:pt x="2546490" y="314114"/>
+                </a:lnTo>
+                <a:lnTo>
+                  <a:pt x="2575760" y="324578"/>
+                </a:lnTo>
+                <a:lnTo>
+                  <a:pt x="2605030" y="335271"/>
+                </a:lnTo>
+                <a:lnTo>
+                  <a:pt x="2634300" y="346196"/>
+                </a:lnTo>
+                <a:lnTo>
+                  <a:pt x="2663570" y="357357"/>
+                </a:lnTo>
+                <a:lnTo>
+                  <a:pt x="2692840" y="368754"/>
+                </a:lnTo>
+                <a:lnTo>
+                  <a:pt x="2722110" y="380392"/>
+                </a:lnTo>
+                <a:lnTo>
+                  <a:pt x="2751380" y="392272"/>
+                </a:lnTo>
+                <a:lnTo>
+                  <a:pt x="2780650" y="404396"/>
+                </a:lnTo>
+                <a:lnTo>
+                  <a:pt x="2809920" y="416768"/>
+                </a:lnTo>
+                <a:lnTo>
+                  <a:pt x="2839190" y="429389"/>
+                </a:lnTo>
+                <a:lnTo>
+                  <a:pt x="2868460" y="442263"/>
+                </a:lnTo>
+                <a:lnTo>
+                  <a:pt x="2897730" y="455392"/>
+                </a:lnTo>
+                <a:lnTo>
+                  <a:pt x="2926999" y="468777"/>
+                </a:lnTo>
+                <a:lnTo>
+                  <a:pt x="2956269" y="482423"/>
+                </a:lnTo>
+                <a:lnTo>
+                  <a:pt x="2985539" y="496331"/>
+                </a:lnTo>
+                <a:lnTo>
+                  <a:pt x="3014809" y="510503"/>
+                </a:lnTo>
+                <a:lnTo>
+                  <a:pt x="3044079" y="524943"/>
+                </a:lnTo>
+                <a:lnTo>
+                  <a:pt x="3073349" y="539653"/>
+                </a:lnTo>
+                <a:lnTo>
+                  <a:pt x="3102619" y="554635"/>
+                </a:lnTo>
+                <a:lnTo>
+                  <a:pt x="3131889" y="569891"/>
+                </a:lnTo>
+                <a:lnTo>
+                  <a:pt x="3161159" y="585425"/>
+                </a:lnTo>
+                <a:lnTo>
+                  <a:pt x="3190429" y="601238"/>
+                </a:lnTo>
+                <a:lnTo>
+                  <a:pt x="3219699" y="617334"/>
+                </a:lnTo>
+                <a:lnTo>
+                  <a:pt x="3248969" y="633715"/>
+                </a:lnTo>
+                <a:lnTo>
+                  <a:pt x="3278239" y="650382"/>
+                </a:lnTo>
+                <a:lnTo>
+                  <a:pt x="3307509" y="667339"/>
+                </a:lnTo>
+                <a:lnTo>
+                  <a:pt x="3336779" y="684589"/>
+                </a:lnTo>
+                <a:lnTo>
+                  <a:pt x="3366049" y="702133"/>
+                </a:lnTo>
+                <a:lnTo>
+                  <a:pt x="3395319" y="719975"/>
+                </a:lnTo>
+                <a:lnTo>
+                  <a:pt x="3424589" y="738116"/>
+                </a:lnTo>
+                <a:lnTo>
+                  <a:pt x="3453859" y="756559"/>
+                </a:lnTo>
+                <a:lnTo>
+                  <a:pt x="3483129" y="775307"/>
+                </a:lnTo>
+                <a:lnTo>
+                  <a:pt x="3512399" y="794363"/>
+                </a:lnTo>
+                <a:lnTo>
+                  <a:pt x="3541669" y="813727"/>
+                </a:lnTo>
+                <a:lnTo>
+                  <a:pt x="3570939" y="833405"/>
+                </a:lnTo>
+                <a:lnTo>
+                  <a:pt x="3600209" y="853396"/>
+                </a:lnTo>
+                <a:lnTo>
+                  <a:pt x="3629479" y="873705"/>
+                </a:lnTo>
+                <a:lnTo>
+                  <a:pt x="3658749" y="894334"/>
+                </a:lnTo>
+                <a:lnTo>
+                  <a:pt x="3688019" y="915284"/>
+                </a:lnTo>
+                <a:lnTo>
+                  <a:pt x="3717289" y="936560"/>
+                </a:lnTo>
+                <a:lnTo>
+                  <a:pt x="3746559" y="958162"/>
+                </a:lnTo>
+                <a:lnTo>
+                  <a:pt x="3775829" y="980095"/>
+                </a:lnTo>
+                <a:lnTo>
+                  <a:pt x="3805099" y="1002359"/>
+                </a:lnTo>
+                <a:lnTo>
+                  <a:pt x="3834369" y="1024958"/>
+                </a:lnTo>
+                <a:lnTo>
+                  <a:pt x="3863639" y="1047894"/>
+                </a:lnTo>
+                <a:lnTo>
+                  <a:pt x="3892909" y="1071170"/>
+                </a:lnTo>
+                <a:lnTo>
+                  <a:pt x="3922179" y="1094788"/>
+                </a:lnTo>
+                <a:lnTo>
+                  <a:pt x="3951449" y="1118750"/>
+                </a:lnTo>
+                <a:lnTo>
+                  <a:pt x="3980719" y="1143060"/>
+                </a:lnTo>
+                <a:lnTo>
+                  <a:pt x="4009989" y="1167719"/>
+                </a:lnTo>
+                <a:lnTo>
+                  <a:pt x="4039259" y="1192731"/>
+                </a:lnTo>
+                <a:lnTo>
+                  <a:pt x="4068529" y="1218097"/>
+                </a:lnTo>
+                <a:lnTo>
+                  <a:pt x="4097799" y="1243820"/>
+                </a:lnTo>
+                <a:lnTo>
+                  <a:pt x="4127069" y="1269902"/>
+                </a:lnTo>
+                <a:lnTo>
+                  <a:pt x="4156339" y="1296347"/>
+                </a:lnTo>
+                <a:lnTo>
+                  <a:pt x="4185609" y="1323157"/>
+                </a:lnTo>
+                <a:lnTo>
+                  <a:pt x="4214879" y="1350333"/>
+                </a:lnTo>
+                <a:lnTo>
+                  <a:pt x="4244149" y="1377879"/>
+                </a:lnTo>
+                <a:lnTo>
+                  <a:pt x="4273419" y="1405797"/>
+                </a:lnTo>
+                <a:lnTo>
+                  <a:pt x="4302689" y="1434090"/>
+                </a:lnTo>
+                <a:lnTo>
+                  <a:pt x="4331959" y="1462760"/>
+                </a:lnTo>
+                <a:lnTo>
+                  <a:pt x="4361229" y="1491809"/>
+                </a:lnTo>
+                <a:lnTo>
+                  <a:pt x="4390499" y="1521241"/>
+                </a:lnTo>
+                <a:lnTo>
+                  <a:pt x="4419769" y="1551057"/>
+                </a:lnTo>
+                <a:lnTo>
+                  <a:pt x="4449039" y="1581260"/>
+                </a:lnTo>
+                <a:lnTo>
+                  <a:pt x="4478309" y="1611852"/>
+                </a:lnTo>
+                <a:lnTo>
+                  <a:pt x="4507579" y="1642837"/>
+                </a:lnTo>
+                <a:lnTo>
+                  <a:pt x="4536849" y="1674216"/>
+                </a:lnTo>
+                <a:lnTo>
+                  <a:pt x="4566119" y="1705993"/>
+                </a:lnTo>
+                <a:lnTo>
+                  <a:pt x="4595389" y="1738169"/>
+                </a:lnTo>
+                <a:lnTo>
+                  <a:pt x="4624659" y="1770746"/>
+                </a:lnTo>
+                <a:lnTo>
+                  <a:pt x="4653929" y="1803729"/>
+                </a:lnTo>
+                <a:lnTo>
+                  <a:pt x="4683199" y="1837118"/>
+                </a:lnTo>
+                <a:lnTo>
+                  <a:pt x="4712469" y="1870917"/>
+                </a:lnTo>
+                <a:lnTo>
+                  <a:pt x="4741739" y="1905128"/>
+                </a:lnTo>
+                <a:lnTo>
+                  <a:pt x="4771009" y="1939754"/>
+                </a:lnTo>
+                <a:lnTo>
+                  <a:pt x="4800279" y="1974796"/>
+                </a:lnTo>
+                <a:lnTo>
+                  <a:pt x="4829549" y="2010258"/>
+                </a:lnTo>
+                <a:lnTo>
+                  <a:pt x="4858819" y="2046142"/>
+                </a:lnTo>
+                <a:lnTo>
+                  <a:pt x="4888089" y="2082451"/>
+                </a:lnTo>
+                <a:lnTo>
+                  <a:pt x="4917359" y="2119187"/>
+                </a:lnTo>
+                <a:lnTo>
+                  <a:pt x="4946629" y="2156352"/>
+                </a:lnTo>
+                <a:lnTo>
+                  <a:pt x="4975899" y="2193949"/>
+                </a:lnTo>
+                <a:lnTo>
+                  <a:pt x="5005169" y="2231980"/>
+                </a:lnTo>
+                <a:lnTo>
+                  <a:pt x="5034439" y="2270449"/>
+                </a:lnTo>
+                <a:lnTo>
+                  <a:pt x="5063709" y="2309357"/>
+                </a:lnTo>
+                <a:lnTo>
+                  <a:pt x="5092979" y="2348707"/>
+                </a:lnTo>
+                <a:lnTo>
+                  <a:pt x="5122249" y="2388501"/>
+                </a:lnTo>
+                <a:lnTo>
+                  <a:pt x="5151519" y="2428743"/>
+                </a:lnTo>
+                <a:lnTo>
+                  <a:pt x="5180789" y="2469433"/>
+                </a:lnTo>
+                <a:lnTo>
+                  <a:pt x="5210059" y="2510576"/>
+                </a:lnTo>
+                <a:lnTo>
+                  <a:pt x="5239329" y="2552174"/>
+                </a:lnTo>
+                <a:lnTo>
+                  <a:pt x="5268599" y="2594228"/>
+                </a:lnTo>
+                <a:lnTo>
+                  <a:pt x="5297869" y="2636742"/>
+                </a:lnTo>
+                <a:lnTo>
+                  <a:pt x="5327139" y="2679717"/>
+                </a:lnTo>
+                <a:lnTo>
+                  <a:pt x="5356409" y="2723157"/>
+                </a:lnTo>
+                <a:lnTo>
+                  <a:pt x="5385679" y="2767064"/>
+                </a:lnTo>
+                <a:lnTo>
+                  <a:pt x="5414949" y="2811441"/>
+                </a:lnTo>
+                <a:lnTo>
+                  <a:pt x="5444219" y="2856289"/>
+                </a:lnTo>
+                <a:lnTo>
+                  <a:pt x="5473489" y="2901612"/>
+                </a:lnTo>
+                <a:lnTo>
+                  <a:pt x="5502759" y="2947412"/>
+                </a:lnTo>
+                <a:lnTo>
+                  <a:pt x="5532029" y="2993691"/>
+                </a:lnTo>
+                <a:lnTo>
+                  <a:pt x="5561299" y="3040452"/>
+                </a:lnTo>
+                <a:lnTo>
+                  <a:pt x="5590569" y="3087698"/>
+                </a:lnTo>
+                <a:lnTo>
+                  <a:pt x="5619839" y="3135430"/>
+                </a:lnTo>
+                <a:lnTo>
+                  <a:pt x="5649109" y="3183652"/>
+                </a:lnTo>
+                <a:lnTo>
+                  <a:pt x="5678379" y="3232366"/>
+                </a:lnTo>
+                <a:lnTo>
+                  <a:pt x="5707649" y="3281574"/>
+                </a:lnTo>
+                <a:lnTo>
+                  <a:pt x="5736919" y="3331279"/>
+                </a:lnTo>
+                <a:lnTo>
+                  <a:pt x="5766189" y="3381483"/>
+                </a:lnTo>
+                <a:lnTo>
+                  <a:pt x="5795459" y="3432190"/>
+                </a:lnTo>
+                <a:lnTo>
+                  <a:pt x="5824729" y="3483401"/>
+                </a:lnTo>
+              </a:path>
+            </a:pathLst>
+          </a:custGeom>
+          <a:noFill/>
+          <a:ln w="38100">
             <a:solidFill>
-              <a:srgbClr val="B4C7D2"/>
+              <a:srgbClr val="8EDBD4"/>
             </a:solidFill>
           </a:ln>
           <a:effectLst/>
@@ -3242,14 +4678,782 @@
       </p:sp>
       <p:sp>
         <p:nvSpPr>
-          <p:cNvPr id="6" name="text5" descr="sci-ppt:C1-E18-005"/>
+          <p:cNvPr id="36" name="C1-E18 ellipse 34" descr="sci-ppt:o034"/>
+          <p:cNvSpPr/>
+          <p:nvPr/>
+        </p:nvSpPr>
+        <p:spPr>
+          <a:xfrm>
+            <a:off x="6803133" y="4974330"/>
+            <a:ext cx="109728" cy="109728"/>
+          </a:xfrm>
+          <a:prstGeom prst="ellipse">
+            <a:avLst/>
+          </a:prstGeom>
+          <a:solidFill>
+            <a:srgbClr val="F2B880"/>
+          </a:solidFill>
+          <a:ln w="12700">
+            <a:solidFill>
+              <a:srgbClr val="F2B880"/>
+            </a:solidFill>
+          </a:ln>
+          <a:effectLst/>
+        </p:spPr>
+        <p:txBody>
+          <a:bodyPr rtlCol="0" anchor="ctr"/>
+          <a:lstStyle/>
+          <a:p>
+            <a:pPr algn="ctr"/>
+          </a:p>
+        </p:txBody>
+      </p:sp>
+      <p:sp>
+        <p:nvSpPr>
+          <p:cNvPr id="37" name="C1-E18 ellipse 35" descr="sci-ppt:o035"/>
+          <p:cNvSpPr/>
+          <p:nvPr/>
+        </p:nvSpPr>
+        <p:spPr>
+          <a:xfrm>
+            <a:off x="6798253" y="4965759"/>
+            <a:ext cx="109728" cy="109728"/>
+          </a:xfrm>
+          <a:prstGeom prst="ellipse">
+            <a:avLst/>
+          </a:prstGeom>
+          <a:solidFill>
+            <a:srgbClr val="F2B880"/>
+          </a:solidFill>
+          <a:ln w="12700">
+            <a:solidFill>
+              <a:srgbClr val="F2B880"/>
+            </a:solidFill>
+          </a:ln>
+          <a:effectLst/>
+        </p:spPr>
+        <p:txBody>
+          <a:bodyPr rtlCol="0" anchor="ctr"/>
+          <a:lstStyle/>
+          <a:p>
+            <a:pPr algn="ctr"/>
+          </a:p>
+        </p:txBody>
+      </p:sp>
+      <p:sp>
+        <p:nvSpPr>
+          <p:cNvPr id="38" name="C1-E18 ellipse 36" descr="sci-ppt:o036"/>
+          <p:cNvSpPr/>
+          <p:nvPr/>
+        </p:nvSpPr>
+        <p:spPr>
+          <a:xfrm>
+            <a:off x="6784056" y="4940897"/>
+            <a:ext cx="109728" cy="109728"/>
+          </a:xfrm>
+          <a:prstGeom prst="ellipse">
+            <a:avLst/>
+          </a:prstGeom>
+          <a:solidFill>
+            <a:srgbClr val="F2B880"/>
+          </a:solidFill>
+          <a:ln w="12700">
+            <a:solidFill>
+              <a:srgbClr val="F2B880"/>
+            </a:solidFill>
+          </a:ln>
+          <a:effectLst/>
+        </p:spPr>
+        <p:txBody>
+          <a:bodyPr rtlCol="0" anchor="ctr"/>
+          <a:lstStyle/>
+          <a:p>
+            <a:pPr algn="ctr"/>
+          </a:p>
+        </p:txBody>
+      </p:sp>
+      <p:sp>
+        <p:nvSpPr>
+          <p:cNvPr id="39" name="C1-E18 ellipse 37" descr="sci-ppt:o037"/>
+          <p:cNvSpPr/>
+          <p:nvPr/>
+        </p:nvSpPr>
+        <p:spPr>
+          <a:xfrm>
+            <a:off x="6760451" y="4899823"/>
+            <a:ext cx="109728" cy="109728"/>
+          </a:xfrm>
+          <a:prstGeom prst="ellipse">
+            <a:avLst/>
+          </a:prstGeom>
+          <a:solidFill>
+            <a:srgbClr val="F2B880"/>
+          </a:solidFill>
+          <a:ln w="12700">
+            <a:solidFill>
+              <a:srgbClr val="F2B880"/>
+            </a:solidFill>
+          </a:ln>
+          <a:effectLst/>
+        </p:spPr>
+        <p:txBody>
+          <a:bodyPr rtlCol="0" anchor="ctr"/>
+          <a:lstStyle/>
+          <a:p>
+            <a:pPr algn="ctr"/>
+          </a:p>
+        </p:txBody>
+      </p:sp>
+      <p:sp>
+        <p:nvSpPr>
+          <p:cNvPr id="40" name="C1-E18 ellipse 38" descr="sci-ppt:o038"/>
+          <p:cNvSpPr/>
+          <p:nvPr/>
+        </p:nvSpPr>
+        <p:spPr>
+          <a:xfrm>
+            <a:off x="6726804" y="4841842"/>
+            <a:ext cx="109728" cy="109728"/>
+          </a:xfrm>
+          <a:prstGeom prst="ellipse">
+            <a:avLst/>
+          </a:prstGeom>
+          <a:solidFill>
+            <a:srgbClr val="F2B880"/>
+          </a:solidFill>
+          <a:ln w="12700">
+            <a:solidFill>
+              <a:srgbClr val="F2B880"/>
+            </a:solidFill>
+          </a:ln>
+          <a:effectLst/>
+        </p:spPr>
+        <p:txBody>
+          <a:bodyPr rtlCol="0" anchor="ctr"/>
+          <a:lstStyle/>
+          <a:p>
+            <a:pPr algn="ctr"/>
+          </a:p>
+        </p:txBody>
+      </p:sp>
+      <p:sp>
+        <p:nvSpPr>
+          <p:cNvPr id="41" name="C1-E18 ellipse 39" descr="sci-ppt:o039"/>
+          <p:cNvSpPr/>
+          <p:nvPr/>
+        </p:nvSpPr>
+        <p:spPr>
+          <a:xfrm>
+            <a:off x="6683735" y="4768589"/>
+            <a:ext cx="109728" cy="109728"/>
+          </a:xfrm>
+          <a:prstGeom prst="ellipse">
+            <a:avLst/>
+          </a:prstGeom>
+          <a:solidFill>
+            <a:srgbClr val="F2B880"/>
+          </a:solidFill>
+          <a:ln w="12700">
+            <a:solidFill>
+              <a:srgbClr val="F2B880"/>
+            </a:solidFill>
+          </a:ln>
+          <a:effectLst/>
+        </p:spPr>
+        <p:txBody>
+          <a:bodyPr rtlCol="0" anchor="ctr"/>
+          <a:lstStyle/>
+          <a:p>
+            <a:pPr algn="ctr"/>
+          </a:p>
+        </p:txBody>
+      </p:sp>
+      <p:sp>
+        <p:nvSpPr>
+          <p:cNvPr id="42" name="C1-E18 ellipse 40" descr="sci-ppt:o040"/>
+          <p:cNvSpPr/>
+          <p:nvPr/>
+        </p:nvSpPr>
+        <p:spPr>
+          <a:xfrm>
+            <a:off x="6630591" y="4679682"/>
+            <a:ext cx="109728" cy="109728"/>
+          </a:xfrm>
+          <a:prstGeom prst="ellipse">
+            <a:avLst/>
+          </a:prstGeom>
+          <a:solidFill>
+            <a:srgbClr val="F2B880"/>
+          </a:solidFill>
+          <a:ln w="12700">
+            <a:solidFill>
+              <a:srgbClr val="F2B880"/>
+            </a:solidFill>
+          </a:ln>
+          <a:effectLst/>
+        </p:spPr>
+        <p:txBody>
+          <a:bodyPr rtlCol="0" anchor="ctr"/>
+          <a:lstStyle/>
+          <a:p>
+            <a:pPr algn="ctr"/>
+          </a:p>
+        </p:txBody>
+      </p:sp>
+      <p:sp>
+        <p:nvSpPr>
+          <p:cNvPr id="43" name="C1-E18 ellipse 41" descr="sci-ppt:o041"/>
+          <p:cNvSpPr/>
+          <p:nvPr/>
+        </p:nvSpPr>
+        <p:spPr>
+          <a:xfrm>
+            <a:off x="6566121" y="4574005"/>
+            <a:ext cx="109728" cy="109728"/>
+          </a:xfrm>
+          <a:prstGeom prst="ellipse">
+            <a:avLst/>
+          </a:prstGeom>
+          <a:solidFill>
+            <a:srgbClr val="F2B880"/>
+          </a:solidFill>
+          <a:ln w="12700">
+            <a:solidFill>
+              <a:srgbClr val="F2B880"/>
+            </a:solidFill>
+          </a:ln>
+          <a:effectLst/>
+        </p:spPr>
+        <p:txBody>
+          <a:bodyPr rtlCol="0" anchor="ctr"/>
+          <a:lstStyle/>
+          <a:p>
+            <a:pPr algn="ctr"/>
+          </a:p>
+        </p:txBody>
+      </p:sp>
+      <p:sp>
+        <p:nvSpPr>
+          <p:cNvPr id="44" name="C1-E18 ellipse 42" descr="sci-ppt:o042"/>
+          <p:cNvSpPr/>
+          <p:nvPr/>
+        </p:nvSpPr>
+        <p:spPr>
+          <a:xfrm>
+            <a:off x="6491457" y="4454565"/>
+            <a:ext cx="109728" cy="109728"/>
+          </a:xfrm>
+          <a:prstGeom prst="ellipse">
+            <a:avLst/>
+          </a:prstGeom>
+          <a:solidFill>
+            <a:srgbClr val="F2B880"/>
+          </a:solidFill>
+          <a:ln w="12700">
+            <a:solidFill>
+              <a:srgbClr val="F2B880"/>
+            </a:solidFill>
+          </a:ln>
+          <a:effectLst/>
+        </p:spPr>
+        <p:txBody>
+          <a:bodyPr rtlCol="0" anchor="ctr"/>
+          <a:lstStyle/>
+          <a:p>
+            <a:pPr algn="ctr"/>
+          </a:p>
+        </p:txBody>
+      </p:sp>
+      <p:sp>
+        <p:nvSpPr>
+          <p:cNvPr id="45" name="C1-E18 ellipse 43" descr="sci-ppt:o043"/>
+          <p:cNvSpPr/>
+          <p:nvPr/>
+        </p:nvSpPr>
+        <p:spPr>
+          <a:xfrm>
+            <a:off x="6405267" y="4320570"/>
+            <a:ext cx="109728" cy="109728"/>
+          </a:xfrm>
+          <a:prstGeom prst="ellipse">
+            <a:avLst/>
+          </a:prstGeom>
+          <a:solidFill>
+            <a:srgbClr val="F2B880"/>
+          </a:solidFill>
+          <a:ln w="12700">
+            <a:solidFill>
+              <a:srgbClr val="F2B880"/>
+            </a:solidFill>
+          </a:ln>
+          <a:effectLst/>
+        </p:spPr>
+        <p:txBody>
+          <a:bodyPr rtlCol="0" anchor="ctr"/>
+          <a:lstStyle/>
+          <a:p>
+            <a:pPr algn="ctr"/>
+          </a:p>
+        </p:txBody>
+      </p:sp>
+      <p:sp>
+        <p:nvSpPr>
+          <p:cNvPr id="46" name="C1-E18 ellipse 44" descr="sci-ppt:o044"/>
+          <p:cNvSpPr/>
+          <p:nvPr/>
+        </p:nvSpPr>
+        <p:spPr>
+          <a:xfrm>
+            <a:off x="6305486" y="4170564"/>
+            <a:ext cx="109728" cy="109728"/>
+          </a:xfrm>
+          <a:prstGeom prst="ellipse">
+            <a:avLst/>
+          </a:prstGeom>
+          <a:solidFill>
+            <a:srgbClr val="F2B880"/>
+          </a:solidFill>
+          <a:ln w="12700">
+            <a:solidFill>
+              <a:srgbClr val="F2B880"/>
+            </a:solidFill>
+          </a:ln>
+          <a:effectLst/>
+        </p:spPr>
+        <p:txBody>
+          <a:bodyPr rtlCol="0" anchor="ctr"/>
+          <a:lstStyle/>
+          <a:p>
+            <a:pPr algn="ctr"/>
+          </a:p>
+        </p:txBody>
+      </p:sp>
+      <p:sp>
+        <p:nvSpPr>
+          <p:cNvPr id="47" name="C1-E18 ellipse 45" descr="sci-ppt:o045"/>
+          <p:cNvSpPr/>
+          <p:nvPr/>
+        </p:nvSpPr>
+        <p:spPr>
+          <a:xfrm>
+            <a:off x="6193684" y="4008894"/>
+            <a:ext cx="109728" cy="109728"/>
+          </a:xfrm>
+          <a:prstGeom prst="ellipse">
+            <a:avLst/>
+          </a:prstGeom>
+          <a:solidFill>
+            <a:srgbClr val="F2B880"/>
+          </a:solidFill>
+          <a:ln w="12700">
+            <a:solidFill>
+              <a:srgbClr val="F2B880"/>
+            </a:solidFill>
+          </a:ln>
+          <a:effectLst/>
+        </p:spPr>
+        <p:txBody>
+          <a:bodyPr rtlCol="0" anchor="ctr"/>
+          <a:lstStyle/>
+          <a:p>
+            <a:pPr algn="ctr"/>
+          </a:p>
+        </p:txBody>
+      </p:sp>
+      <p:sp>
+        <p:nvSpPr>
+          <p:cNvPr id="48" name="C1-E18 ellipse 46" descr="sci-ppt:o046"/>
+          <p:cNvSpPr/>
+          <p:nvPr/>
+        </p:nvSpPr>
+        <p:spPr>
+          <a:xfrm>
+            <a:off x="6067549" y="3834458"/>
+            <a:ext cx="109728" cy="109728"/>
+          </a:xfrm>
+          <a:prstGeom prst="ellipse">
+            <a:avLst/>
+          </a:prstGeom>
+          <a:solidFill>
+            <a:srgbClr val="F2B880"/>
+          </a:solidFill>
+          <a:ln w="12700">
+            <a:solidFill>
+              <a:srgbClr val="F2B880"/>
+            </a:solidFill>
+          </a:ln>
+          <a:effectLst/>
+        </p:spPr>
+        <p:txBody>
+          <a:bodyPr rtlCol="0" anchor="ctr"/>
+          <a:lstStyle/>
+          <a:p>
+            <a:pPr algn="ctr"/>
+          </a:p>
+        </p:txBody>
+      </p:sp>
+      <p:sp>
+        <p:nvSpPr>
+          <p:cNvPr id="49" name="C1-E18 ellipse 47" descr="sci-ppt:o047"/>
+          <p:cNvSpPr/>
+          <p:nvPr/>
+        </p:nvSpPr>
+        <p:spPr>
+          <a:xfrm>
+            <a:off x="5925633" y="3648049"/>
+            <a:ext cx="109728" cy="109728"/>
+          </a:xfrm>
+          <a:prstGeom prst="ellipse">
+            <a:avLst/>
+          </a:prstGeom>
+          <a:solidFill>
+            <a:srgbClr val="F2B880"/>
+          </a:solidFill>
+          <a:ln w="12700">
+            <a:solidFill>
+              <a:srgbClr val="F2B880"/>
+            </a:solidFill>
+          </a:ln>
+          <a:effectLst/>
+        </p:spPr>
+        <p:txBody>
+          <a:bodyPr rtlCol="0" anchor="ctr"/>
+          <a:lstStyle/>
+          <a:p>
+            <a:pPr algn="ctr"/>
+          </a:p>
+        </p:txBody>
+      </p:sp>
+      <p:sp>
+        <p:nvSpPr>
+          <p:cNvPr id="50" name="C1-E18 ellipse 48" descr="sci-ppt:o048"/>
+          <p:cNvSpPr/>
+          <p:nvPr/>
+        </p:nvSpPr>
+        <p:spPr>
+          <a:xfrm>
+            <a:off x="5763942" y="3448027"/>
+            <a:ext cx="109728" cy="109728"/>
+          </a:xfrm>
+          <a:prstGeom prst="ellipse">
+            <a:avLst/>
+          </a:prstGeom>
+          <a:solidFill>
+            <a:srgbClr val="F2B880"/>
+          </a:solidFill>
+          <a:ln w="12700">
+            <a:solidFill>
+              <a:srgbClr val="F2B880"/>
+            </a:solidFill>
+          </a:ln>
+          <a:effectLst/>
+        </p:spPr>
+        <p:txBody>
+          <a:bodyPr rtlCol="0" anchor="ctr"/>
+          <a:lstStyle/>
+          <a:p>
+            <a:pPr algn="ctr"/>
+          </a:p>
+        </p:txBody>
+      </p:sp>
+      <p:sp>
+        <p:nvSpPr>
+          <p:cNvPr id="51" name="C1-E18 ellipse 49" descr="sci-ppt:o049"/>
+          <p:cNvSpPr/>
+          <p:nvPr/>
+        </p:nvSpPr>
+        <p:spPr>
+          <a:xfrm>
+            <a:off x="5584065" y="3240488"/>
+            <a:ext cx="109728" cy="109728"/>
+          </a:xfrm>
+          <a:prstGeom prst="ellipse">
+            <a:avLst/>
+          </a:prstGeom>
+          <a:solidFill>
+            <a:srgbClr val="F2B880"/>
+          </a:solidFill>
+          <a:ln w="12700">
+            <a:solidFill>
+              <a:srgbClr val="F2B880"/>
+            </a:solidFill>
+          </a:ln>
+          <a:effectLst/>
+        </p:spPr>
+        <p:txBody>
+          <a:bodyPr rtlCol="0" anchor="ctr"/>
+          <a:lstStyle/>
+          <a:p>
+            <a:pPr algn="ctr"/>
+          </a:p>
+        </p:txBody>
+      </p:sp>
+      <p:sp>
+        <p:nvSpPr>
+          <p:cNvPr id="52" name="C1-E18 ellipse 50" descr="sci-ppt:o050"/>
+          <p:cNvSpPr/>
+          <p:nvPr/>
+        </p:nvSpPr>
+        <p:spPr>
+          <a:xfrm>
+            <a:off x="5380835" y="3024281"/>
+            <a:ext cx="109728" cy="109728"/>
+          </a:xfrm>
+          <a:prstGeom prst="ellipse">
+            <a:avLst/>
+          </a:prstGeom>
+          <a:solidFill>
+            <a:srgbClr val="F2B880"/>
+          </a:solidFill>
+          <a:ln w="12700">
+            <a:solidFill>
+              <a:srgbClr val="F2B880"/>
+            </a:solidFill>
+          </a:ln>
+          <a:effectLst/>
+        </p:spPr>
+        <p:txBody>
+          <a:bodyPr rtlCol="0" anchor="ctr"/>
+          <a:lstStyle/>
+          <a:p>
+            <a:pPr algn="ctr"/>
+          </a:p>
+        </p:txBody>
+      </p:sp>
+      <p:sp>
+        <p:nvSpPr>
+          <p:cNvPr id="53" name="C1-E18 ellipse 51" descr="sci-ppt:o051"/>
+          <p:cNvSpPr/>
+          <p:nvPr/>
+        </p:nvSpPr>
+        <p:spPr>
+          <a:xfrm>
+            <a:off x="5146590" y="2798086"/>
+            <a:ext cx="109728" cy="109728"/>
+          </a:xfrm>
+          <a:prstGeom prst="ellipse">
+            <a:avLst/>
+          </a:prstGeom>
+          <a:solidFill>
+            <a:srgbClr val="F2B880"/>
+          </a:solidFill>
+          <a:ln w="12700">
+            <a:solidFill>
+              <a:srgbClr val="F2B880"/>
+            </a:solidFill>
+          </a:ln>
+          <a:effectLst/>
+        </p:spPr>
+        <p:txBody>
+          <a:bodyPr rtlCol="0" anchor="ctr"/>
+          <a:lstStyle/>
+          <a:p>
+            <a:pPr algn="ctr"/>
+          </a:p>
+        </p:txBody>
+      </p:sp>
+      <p:sp>
+        <p:nvSpPr>
+          <p:cNvPr id="54" name="C1-E18 ellipse 52" descr="sci-ppt:o052"/>
+          <p:cNvSpPr/>
+          <p:nvPr/>
+        </p:nvSpPr>
+        <p:spPr>
+          <a:xfrm>
+            <a:off x="4880502" y="2569480"/>
+            <a:ext cx="109728" cy="109728"/>
+          </a:xfrm>
+          <a:prstGeom prst="ellipse">
+            <a:avLst/>
+          </a:prstGeom>
+          <a:solidFill>
+            <a:srgbClr val="F2B880"/>
+          </a:solidFill>
+          <a:ln w="12700">
+            <a:solidFill>
+              <a:srgbClr val="F2B880"/>
+            </a:solidFill>
+          </a:ln>
+          <a:effectLst/>
+        </p:spPr>
+        <p:txBody>
+          <a:bodyPr rtlCol="0" anchor="ctr"/>
+          <a:lstStyle/>
+          <a:p>
+            <a:pPr algn="ctr"/>
+          </a:p>
+        </p:txBody>
+      </p:sp>
+      <p:sp>
+        <p:nvSpPr>
+          <p:cNvPr id="55" name="C1-E18 ellipse 53" descr="sci-ppt:o053"/>
+          <p:cNvSpPr/>
+          <p:nvPr/>
+        </p:nvSpPr>
+        <p:spPr>
+          <a:xfrm>
+            <a:off x="4569550" y="2338105"/>
+            <a:ext cx="109728" cy="109728"/>
+          </a:xfrm>
+          <a:prstGeom prst="ellipse">
+            <a:avLst/>
+          </a:prstGeom>
+          <a:solidFill>
+            <a:srgbClr val="F2B880"/>
+          </a:solidFill>
+          <a:ln w="12700">
+            <a:solidFill>
+              <a:srgbClr val="F2B880"/>
+            </a:solidFill>
+          </a:ln>
+          <a:effectLst/>
+        </p:spPr>
+        <p:txBody>
+          <a:bodyPr rtlCol="0" anchor="ctr"/>
+          <a:lstStyle/>
+          <a:p>
+            <a:pPr algn="ctr"/>
+          </a:p>
+        </p:txBody>
+      </p:sp>
+      <p:sp>
+        <p:nvSpPr>
+          <p:cNvPr id="56" name="C1-E18 ellipse 54" descr="sci-ppt:o054"/>
+          <p:cNvSpPr/>
+          <p:nvPr/>
+        </p:nvSpPr>
+        <p:spPr>
+          <a:xfrm>
+            <a:off x="4190983" y="2104326"/>
+            <a:ext cx="109728" cy="109728"/>
+          </a:xfrm>
+          <a:prstGeom prst="ellipse">
+            <a:avLst/>
+          </a:prstGeom>
+          <a:solidFill>
+            <a:srgbClr val="F2B880"/>
+          </a:solidFill>
+          <a:ln w="12700">
+            <a:solidFill>
+              <a:srgbClr val="F2B880"/>
+            </a:solidFill>
+          </a:ln>
+          <a:effectLst/>
+        </p:spPr>
+        <p:txBody>
+          <a:bodyPr rtlCol="0" anchor="ctr"/>
+          <a:lstStyle/>
+          <a:p>
+            <a:pPr algn="ctr"/>
+          </a:p>
+        </p:txBody>
+      </p:sp>
+      <p:sp>
+        <p:nvSpPr>
+          <p:cNvPr id="57" name="C1-E18 ellipse 55" descr="sci-ppt:o055"/>
+          <p:cNvSpPr/>
+          <p:nvPr/>
+        </p:nvSpPr>
+        <p:spPr>
+          <a:xfrm>
+            <a:off x="3719128" y="1878853"/>
+            <a:ext cx="109728" cy="109728"/>
+          </a:xfrm>
+          <a:prstGeom prst="ellipse">
+            <a:avLst/>
+          </a:prstGeom>
+          <a:solidFill>
+            <a:srgbClr val="F2B880"/>
+          </a:solidFill>
+          <a:ln w="12700">
+            <a:solidFill>
+              <a:srgbClr val="F2B880"/>
+            </a:solidFill>
+          </a:ln>
+          <a:effectLst/>
+        </p:spPr>
+        <p:txBody>
+          <a:bodyPr rtlCol="0" anchor="ctr"/>
+          <a:lstStyle/>
+          <a:p>
+            <a:pPr algn="ctr"/>
+          </a:p>
+        </p:txBody>
+      </p:sp>
+      <p:sp>
+        <p:nvSpPr>
+          <p:cNvPr id="58" name="C1-E18 ellipse 56" descr="sci-ppt:o056"/>
+          <p:cNvSpPr/>
+          <p:nvPr/>
+        </p:nvSpPr>
+        <p:spPr>
+          <a:xfrm>
+            <a:off x="3057991" y="1667190"/>
+            <a:ext cx="109728" cy="109728"/>
+          </a:xfrm>
+          <a:prstGeom prst="ellipse">
+            <a:avLst/>
+          </a:prstGeom>
+          <a:solidFill>
+            <a:srgbClr val="F2B880"/>
+          </a:solidFill>
+          <a:ln w="12700">
+            <a:solidFill>
+              <a:srgbClr val="F2B880"/>
+            </a:solidFill>
+          </a:ln>
+          <a:effectLst/>
+        </p:spPr>
+        <p:txBody>
+          <a:bodyPr rtlCol="0" anchor="ctr"/>
+          <a:lstStyle/>
+          <a:p>
+            <a:pPr algn="ctr"/>
+          </a:p>
+        </p:txBody>
+      </p:sp>
+      <p:sp>
+        <p:nvSpPr>
+          <p:cNvPr id="59" name="C1-E18 ellipse 57" descr="sci-ppt:o057"/>
+          <p:cNvSpPr/>
+          <p:nvPr/>
+        </p:nvSpPr>
+        <p:spPr>
+          <a:xfrm>
+            <a:off x="1400513" y="1493534"/>
+            <a:ext cx="109728" cy="109728"/>
+          </a:xfrm>
+          <a:prstGeom prst="ellipse">
+            <a:avLst/>
+          </a:prstGeom>
+          <a:solidFill>
+            <a:srgbClr val="F2B880"/>
+          </a:solidFill>
+          <a:ln w="12700">
+            <a:solidFill>
+              <a:srgbClr val="F2B880"/>
+            </a:solidFill>
+          </a:ln>
+          <a:effectLst/>
+        </p:spPr>
+        <p:txBody>
+          <a:bodyPr rtlCol="0" anchor="ctr"/>
+          <a:lstStyle/>
+          <a:p>
+            <a:pPr algn="ctr"/>
+          </a:p>
+        </p:txBody>
+      </p:sp>
+      <p:sp>
+        <p:nvSpPr>
+          <p:cNvPr id="60" name="C1-E18 text 58" descr="sci-ppt:o058"/>
           <p:cNvSpPr txBox="1"/>
           <p:nvPr/>
         </p:nvSpPr>
         <p:spPr>
           <a:xfrm>
-            <a:off x="4632960" y="2133600"/>
-            <a:ext cx="2865120" cy="340156"/>
+            <a:off x="1225296" y="3566160"/>
+            <a:ext cx="3108960" cy="231648"/>
           </a:xfrm>
           <a:prstGeom prst="rect">
             <a:avLst/>
@@ -3258,7 +5462,7 @@
           <a:effectLst/>
         </p:spPr>
         <p:txBody>
-          <a:bodyPr wrap="none" lIns="27432" rIns="27432" tIns="18288" bIns="18288" anchor="ctr">
+          <a:bodyPr wrap="none" lIns="18288" rIns="18288" tIns="18288" bIns="18288" anchor="t">
             <a:spAutoFit/>
           </a:bodyPr>
           <a:lstStyle/>
@@ -3269,71 +5473,183 @@
               </a:spcAft>
             </a:pPr>
             <a:r>
-              <a:rPr sz="1728" b="0" i="0">
+              <a:rPr sz="1200" b="0" i="0">
+                <a:solidFill>
+                  <a:srgbClr val="8EDBD4"/>
+                </a:solidFill>
+                <a:latin typeface="Arial"/>
+              </a:rPr>
+              <a:t>line: 1 − (R/Rₘₐₓ)³ from Eq. C1-E18</a:t>
+            </a:r>
+          </a:p>
+        </p:txBody>
+      </p:sp>
+      <p:sp>
+        <p:nvSpPr>
+          <p:cNvPr id="61" name="C1-E18 text 59" descr="sci-ppt:o059"/>
+          <p:cNvSpPr txBox="1"/>
+          <p:nvPr/>
+        </p:nvSpPr>
+        <p:spPr>
+          <a:xfrm>
+            <a:off x="1225296" y="4053840"/>
+            <a:ext cx="3108960" cy="417576"/>
+          </a:xfrm>
+          <a:prstGeom prst="rect">
+            <a:avLst/>
+          </a:prstGeom>
+          <a:noFill/>
+          <a:effectLst/>
+        </p:spPr>
+        <p:txBody>
+          <a:bodyPr wrap="none" lIns="18288" rIns="18288" tIns="18288" bIns="18288" anchor="t">
+            <a:spAutoFit/>
+          </a:bodyPr>
+          <a:lstStyle/>
+          <a:p>
+            <a:pPr algn="l">
+              <a:spcAft>
+                <a:spcPts val="0"/>
+              </a:spcAft>
+            </a:pPr>
+            <a:r>
+              <a:rPr sz="1200" b="0" i="0">
+                <a:solidFill>
+                  <a:srgbClr val="F2B880"/>
+                </a:solidFill>
+                <a:latin typeface="Arial"/>
+              </a:rPr>
+              <a:t>dots: direct ODE solution; largest</a:t>
+            </a:r>
+          </a:p>
+          <a:p>
+            <a:pPr algn="l">
+              <a:spcAft>
+                <a:spcPts val="0"/>
+              </a:spcAft>
+            </a:pPr>
+            <a:r>
+              <a:rPr sz="1200" b="0" i="0">
+                <a:solidFill>
+                  <a:srgbClr val="F2B880"/>
+                </a:solidFill>
+                <a:latin typeface="Arial"/>
+              </a:rPr>
+              <a:t>difference 9e-11</a:t>
+            </a:r>
+          </a:p>
+        </p:txBody>
+      </p:sp>
+      <p:sp>
+        <p:nvSpPr>
+          <p:cNvPr id="62" name="C1-E18 round_rect 60" descr="sci-ppt:o060"/>
+          <p:cNvSpPr/>
+          <p:nvPr/>
+        </p:nvSpPr>
+        <p:spPr>
+          <a:xfrm>
+            <a:off x="7315200" y="1371600"/>
+            <a:ext cx="4526280" cy="3657600"/>
+          </a:xfrm>
+          <a:prstGeom prst="roundRect">
+            <a:avLst/>
+          </a:prstGeom>
+          <a:solidFill>
+            <a:srgbClr val="213E4B"/>
+          </a:solidFill>
+          <a:ln w="20320">
+            <a:solidFill>
+              <a:srgbClr val="8EDBD4"/>
+            </a:solidFill>
+          </a:ln>
+          <a:effectLst/>
+        </p:spPr>
+        <p:txBody>
+          <a:bodyPr rtlCol="0" anchor="ctr"/>
+          <a:lstStyle/>
+          <a:p>
+            <a:pPr algn="ctr"/>
+          </a:p>
+        </p:txBody>
+      </p:sp>
+      <p:sp>
+        <p:nvSpPr>
+          <p:cNvPr id="63" name="C1-E18 text 61" descr="sci-ppt:o061"/>
+          <p:cNvSpPr txBox="1"/>
+          <p:nvPr/>
+        </p:nvSpPr>
+        <p:spPr>
+          <a:xfrm>
+            <a:off x="7424927" y="1426464"/>
+            <a:ext cx="4306824" cy="254889"/>
+          </a:xfrm>
+          <a:prstGeom prst="rect">
+            <a:avLst/>
+          </a:prstGeom>
+          <a:noFill/>
+          <a:effectLst/>
+        </p:spPr>
+        <p:txBody>
+          <a:bodyPr wrap="none" lIns="18288" rIns="18288" tIns="18288" bIns="18288" anchor="t">
+            <a:spAutoFit/>
+          </a:bodyPr>
+          <a:lstStyle/>
+          <a:p>
+            <a:pPr algn="l">
+              <a:spcAft>
+                <a:spcPts val="0"/>
+              </a:spcAft>
+            </a:pPr>
+            <a:r>
+              <a:rPr sz="1350" b="1" i="0">
+                <a:solidFill>
+                  <a:srgbClr val="8EDBD4"/>
+                </a:solidFill>
+                <a:latin typeface="Arial"/>
+              </a:rPr>
+              <a:t>Two independent routes</a:t>
+            </a:r>
+          </a:p>
+        </p:txBody>
+      </p:sp>
+      <p:sp>
+        <p:nvSpPr>
+          <p:cNvPr id="64" name="C1-E18 text 62" descr="sci-ppt:o062"/>
+          <p:cNvSpPr txBox="1"/>
+          <p:nvPr/>
+        </p:nvSpPr>
+        <p:spPr>
+          <a:xfrm>
+            <a:off x="7452360" y="1828800"/>
+            <a:ext cx="4297680" cy="433070"/>
+          </a:xfrm>
+          <a:prstGeom prst="rect">
+            <a:avLst/>
+          </a:prstGeom>
+          <a:noFill/>
+          <a:effectLst/>
+        </p:spPr>
+        <p:txBody>
+          <a:bodyPr wrap="none" lIns="18288" rIns="18288" tIns="18288" bIns="18288" anchor="t">
+            <a:spAutoFit/>
+          </a:bodyPr>
+          <a:lstStyle/>
+          <a:p>
+            <a:pPr algn="l">
+              <a:spcAft>
+                <a:spcPts val="0"/>
+              </a:spcAft>
+            </a:pPr>
+            <a:r>
+              <a:rPr sz="1250" b="0" i="0">
                 <a:solidFill>
                   <a:srgbClr val="E7F0F3"/>
                 </a:solidFill>
                 <a:latin typeface="Arial"/>
               </a:rPr>
-              <a:t>Liquid kinetic energy K_l</a:t>
-            </a:r>
-          </a:p>
-        </p:txBody>
-      </p:sp>
-      <p:sp>
-        <p:nvSpPr>
-          <p:cNvPr id="7" name="rect6" descr="sci-ppt:C1-E18-006"/>
-          <p:cNvSpPr/>
-          <p:nvPr/>
-        </p:nvSpPr>
-        <p:spPr>
-          <a:xfrm>
-            <a:off x="8412480" y="2011680"/>
-            <a:ext cx="2926080" cy="1280160"/>
-          </a:xfrm>
-          <a:prstGeom prst="rect">
-            <a:avLst/>
-          </a:prstGeom>
-          <a:solidFill>
-            <a:srgbClr val="213E4B"/>
-          </a:solidFill>
-          <a:ln w="19050">
-            <a:solidFill>
-              <a:srgbClr val="B4C7D2"/>
-            </a:solidFill>
-          </a:ln>
-          <a:effectLst/>
-        </p:spPr>
-        <p:txBody>
-          <a:bodyPr rtlCol="0" anchor="ctr"/>
-          <a:lstStyle/>
-          <a:p>
-            <a:pPr algn="ctr"/>
-          </a:p>
-        </p:txBody>
-      </p:sp>
-      <p:sp>
-        <p:nvSpPr>
-          <p:cNvPr id="8" name="text7" descr="sci-ppt:C1-E18-007"/>
-          <p:cNvSpPr txBox="1"/>
-          <p:nvPr/>
-        </p:nvSpPr>
-        <p:spPr>
-          <a:xfrm>
-            <a:off x="8534400" y="2133600"/>
-            <a:ext cx="2743200" cy="340156"/>
-          </a:xfrm>
-          <a:prstGeom prst="rect">
-            <a:avLst/>
-          </a:prstGeom>
-          <a:noFill/>
-          <a:effectLst/>
-        </p:spPr>
-        <p:txBody>
-          <a:bodyPr wrap="none" lIns="27432" rIns="27432" tIns="18288" bIns="18288" anchor="ctr">
-            <a:spAutoFit/>
-          </a:bodyPr>
-          <a:lstStyle/>
+              <a:t>Route 1: speed solution</a:t>
+            </a:r>
+          </a:p>
           <a:p>
             <a:pPr algn="l">
               <a:spcAft>
@@ -3341,51 +5657,27 @@
               </a:spcAft>
             </a:pPr>
             <a:r>
-              <a:rPr sz="1728" b="0" i="0">
+              <a:rPr sz="1250" b="0" i="0">
                 <a:solidFill>
                   <a:srgbClr val="E7F0F3"/>
                 </a:solidFill>
                 <a:latin typeface="Arial"/>
               </a:rPr>
-              <a:t>Remaining volume potential</a:t>
-            </a:r>
-          </a:p>
-        </p:txBody>
-      </p:sp>
-      <p:cxnSp>
-        <p:nvCxnSpPr>
-          <p:cNvPr id="9" name="arrow8" descr="sci-ppt:C1-E18-008"/>
-          <p:cNvCxnSpPr/>
-          <p:nvPr/>
-        </p:nvCxnSpPr>
-        <p:spPr>
-          <a:xfrm>
-            <a:off x="3718560" y="2621280"/>
-            <a:ext cx="670560" cy="0"/>
-          </a:xfrm>
-          <a:prstGeom prst="line">
-            <a:avLst/>
-          </a:prstGeom>
-          <a:ln w="25400">
-            <a:solidFill>
-              <a:srgbClr val="8EDBD4"/>
-            </a:solidFill>
-            <a:headEnd type="none" w="med" len="med"/>
-            <a:tailEnd type="triangle" w="med" len="med"/>
-          </a:ln>
-          <a:effectLst/>
-        </p:spPr>
-      </p:cxnSp>
-      <p:sp>
-        <p:nvSpPr>
-          <p:cNvPr id="10" name="text9" descr="sci-ppt:C1-E18-009"/>
+              <a:t>Kₗ = 2πρR³Ṙ² with Ṙ from Eq. C1-E15</a:t>
+            </a:r>
+          </a:p>
+        </p:txBody>
+      </p:sp>
+      <p:sp>
+        <p:nvSpPr>
+          <p:cNvPr id="65" name="C1-E18 text 63" descr="sci-ppt:o063"/>
           <p:cNvSpPr txBox="1"/>
           <p:nvPr/>
         </p:nvSpPr>
         <p:spPr>
           <a:xfrm>
-            <a:off x="1219200" y="3901440"/>
-            <a:ext cx="10363200" cy="359054"/>
+            <a:off x="7452360" y="2743200"/>
+            <a:ext cx="4297680" cy="433070"/>
           </a:xfrm>
           <a:prstGeom prst="rect">
             <a:avLst/>
@@ -3394,7 +5686,7 @@
           <a:effectLst/>
         </p:spPr>
         <p:txBody>
-          <a:bodyPr wrap="none" lIns="27432" rIns="27432" tIns="18288" bIns="18288" anchor="ctr">
+          <a:bodyPr wrap="none" lIns="18288" rIns="18288" tIns="18288" bIns="18288" anchor="t">
             <a:spAutoFit/>
           </a:bodyPr>
           <a:lstStyle/>
@@ -3405,39 +5697,15 @@
               </a:spcAft>
             </a:pPr>
             <a:r>
-              <a:rPr sz="1823" b="0" i="0">
+              <a:rPr sz="1250" b="0" i="0">
                 <a:solidFill>
                   <a:srgbClr val="E7F0F3"/>
                 </a:solidFill>
                 <a:latin typeface="Arial"/>
               </a:rPr>
-              <a:t>K_l / E_B = 1 - (R/R_max)^3; ideal loss-free control.</a:t>
-            </a:r>
-          </a:p>
-        </p:txBody>
-      </p:sp>
-      <p:sp>
-        <p:nvSpPr>
-          <p:cNvPr id="11" name="text10" descr="sci-ppt:C1-E18-010"/>
-          <p:cNvSpPr txBox="1"/>
-          <p:nvPr/>
-        </p:nvSpPr>
-        <p:spPr>
-          <a:xfrm>
-            <a:off x="365760" y="4974336"/>
-            <a:ext cx="5547360" cy="321259"/>
-          </a:xfrm>
-          <a:prstGeom prst="rect">
-            <a:avLst/>
-          </a:prstGeom>
-          <a:noFill/>
-          <a:effectLst/>
-        </p:spPr>
-        <p:txBody>
-          <a:bodyPr wrap="none" lIns="27432" rIns="27432" tIns="18288" bIns="18288" anchor="ctr">
-            <a:spAutoFit/>
-          </a:bodyPr>
-          <a:lstStyle/>
+              <a:t>Route 2: pressure work</a:t>
+            </a:r>
+          </a:p>
           <a:p>
             <a:pPr algn="l">
               <a:spcAft>
@@ -3445,27 +5713,27 @@
               </a:spcAft>
             </a:pPr>
             <a:r>
-              <a:rPr sz="1632" b="0" i="0">
+              <a:rPr sz="1250" b="0" i="0">
                 <a:solidFill>
                   <a:srgbClr val="E7F0F3"/>
                 </a:solidFill>
                 <a:latin typeface="Arial"/>
               </a:rPr>
-              <a:t>Kl(R)</a:t>
-            </a:r>
-          </a:p>
-        </p:txBody>
-      </p:sp>
-      <p:sp>
-        <p:nvSpPr>
-          <p:cNvPr id="12" name="text11" descr="sci-ppt:C1-E18-011"/>
+              <a:t>E_B = Δp_c Vₘₐₓ = (4π/3) Δp_c Rₘₐₓ³</a:t>
+            </a:r>
+          </a:p>
+        </p:txBody>
+      </p:sp>
+      <p:sp>
+        <p:nvSpPr>
+          <p:cNvPr id="66" name="C1-E18 text 64" descr="sci-ppt:o064"/>
           <p:cNvSpPr txBox="1"/>
           <p:nvPr/>
         </p:nvSpPr>
         <p:spPr>
           <a:xfrm>
-            <a:off x="365760" y="5266944"/>
-            <a:ext cx="5547360" cy="321259"/>
+            <a:off x="7452360" y="3657600"/>
+            <a:ext cx="4297680" cy="433070"/>
           </a:xfrm>
           <a:prstGeom prst="rect">
             <a:avLst/>
@@ -3474,7 +5742,7 @@
           <a:effectLst/>
         </p:spPr>
         <p:txBody>
-          <a:bodyPr wrap="none" lIns="27432" rIns="27432" tIns="18288" bIns="18288" anchor="ctr">
+          <a:bodyPr wrap="none" lIns="18288" rIns="18288" tIns="18288" bIns="18288" anchor="t">
             <a:spAutoFit/>
           </a:bodyPr>
           <a:lstStyle/>
@@ -3485,27 +5753,83 @@
               </a:spcAft>
             </a:pPr>
             <a:r>
-              <a:rPr sz="1632" b="0" i="0">
+              <a:rPr sz="1250" b="1" i="0">
+                <a:solidFill>
+                  <a:srgbClr val="F2B880"/>
+                </a:solidFill>
+                <a:latin typeface="Arial"/>
+              </a:rPr>
+              <a:t>Kₗ/E_B = 1 − (R/Rₘₐₓ)³  holds at every radius, so</a:t>
+            </a:r>
+          </a:p>
+          <a:p>
+            <a:pPr algn="l">
+              <a:spcAft>
+                <a:spcPts val="0"/>
+              </a:spcAft>
+            </a:pPr>
+            <a:r>
+              <a:rPr sz="1250" b="1" i="0">
+                <a:solidFill>
+                  <a:srgbClr val="F2B880"/>
+                </a:solidFill>
+                <a:latin typeface="Arial"/>
+              </a:rPr>
+              <a:t>no energy is created or lost.</a:t>
+            </a:r>
+          </a:p>
+        </p:txBody>
+      </p:sp>
+      <p:sp>
+        <p:nvSpPr>
+          <p:cNvPr id="67" name="C1-E18 text 65" descr="sci-ppt:o065"/>
+          <p:cNvSpPr txBox="1"/>
+          <p:nvPr/>
+        </p:nvSpPr>
+        <p:spPr>
+          <a:xfrm>
+            <a:off x="914400" y="5733288"/>
+            <a:ext cx="10972800" cy="254889"/>
+          </a:xfrm>
+          <a:prstGeom prst="rect">
+            <a:avLst/>
+          </a:prstGeom>
+          <a:noFill/>
+          <a:effectLst/>
+        </p:spPr>
+        <p:txBody>
+          <a:bodyPr wrap="none" lIns="18288" rIns="18288" tIns="18288" bIns="18288" anchor="t">
+            <a:spAutoFit/>
+          </a:bodyPr>
+          <a:lstStyle/>
+          <a:p>
+            <a:pPr algn="l">
+              <a:spcAft>
+                <a:spcPts val="0"/>
+              </a:spcAft>
+            </a:pPr>
+            <a:r>
+              <a:rPr sz="1350" b="0" i="0">
                 <a:solidFill>
                   <a:srgbClr val="E7F0F3"/>
                 </a:solidFill>
                 <a:latin typeface="Arial"/>
               </a:rPr>
-              <a:t>Δpc</a:t>
-            </a:r>
-          </a:p>
-        </p:txBody>
-      </p:sp>
-      <p:sp>
-        <p:nvSpPr>
-          <p:cNvPr id="13" name="text12" descr="sci-ppt:C1-E18-012"/>
+              <a:t>Half the radius has released 7/8 of the stored pressure work as kinetic energy.</a:t>
+            </a:r>
+          </a:p>
+        </p:txBody>
+      </p:sp>
+      <p:sp>
+        <p:nvSpPr>
+          <p:cNvPr id="68" name="C1-E18 text 66" descr="sci-ppt:o066"/>
           <p:cNvSpPr txBox="1"/>
           <p:nvPr/>
         </p:nvSpPr>
         <p:spPr>
           <a:xfrm>
-            <a:off x="365760" y="5559552"/>
-            <a:ext cx="5547360" cy="321259"/>
+            <a:off x="320040" y="6510528"/>
+            <a:ext cx="11521440" cy="200660"/>
           </a:xfrm>
           <a:prstGeom prst="rect">
             <a:avLst/>
@@ -3514,7 +5838,7 @@
           <a:effectLst/>
         </p:spPr>
         <p:txBody>
-          <a:bodyPr wrap="none" lIns="27432" rIns="27432" tIns="18288" bIns="18288" anchor="ctr">
+          <a:bodyPr wrap="none" lIns="18288" rIns="18288" tIns="18288" bIns="18288" anchor="t">
             <a:spAutoFit/>
           </a:bodyPr>
           <a:lstStyle/>
@@ -3525,253 +5849,13 @@
               </a:spcAft>
             </a:pPr>
             <a:r>
-              <a:rPr sz="1632" b="0" i="0">
-                <a:solidFill>
-                  <a:srgbClr val="E7F0F3"/>
-                </a:solidFill>
-                <a:latin typeface="Arial"/>
-              </a:rPr>
-              <a:t>Rmax</a:t>
-            </a:r>
-          </a:p>
-        </p:txBody>
-      </p:sp>
-      <p:sp>
-        <p:nvSpPr>
-          <p:cNvPr id="14" name="text13" descr="sci-ppt:C1-E18-013"/>
-          <p:cNvSpPr txBox="1"/>
-          <p:nvPr/>
-        </p:nvSpPr>
-        <p:spPr>
-          <a:xfrm>
-            <a:off x="365760" y="5852160"/>
-            <a:ext cx="5547360" cy="321259"/>
-          </a:xfrm>
-          <a:prstGeom prst="rect">
-            <a:avLst/>
-          </a:prstGeom>
-          <a:noFill/>
-          <a:effectLst/>
-        </p:spPr>
-        <p:txBody>
-          <a:bodyPr wrap="none" lIns="27432" rIns="27432" tIns="18288" bIns="18288" anchor="ctr">
-            <a:spAutoFit/>
-          </a:bodyPr>
-          <a:lstStyle/>
-          <a:p>
-            <a:pPr algn="l">
-              <a:spcAft>
-                <a:spcPts val="0"/>
-              </a:spcAft>
-            </a:pPr>
-            <a:r>
-              <a:rPr sz="1632" b="0" i="0">
-                <a:solidFill>
-                  <a:srgbClr val="E7F0F3"/>
-                </a:solidFill>
-                <a:latin typeface="Arial"/>
-              </a:rPr>
-              <a:t>ρ</a:t>
-            </a:r>
-          </a:p>
-        </p:txBody>
-      </p:sp>
-      <p:sp>
-        <p:nvSpPr>
-          <p:cNvPr id="15" name="text14" descr="sci-ppt:C1-E18-014"/>
-          <p:cNvSpPr txBox="1"/>
-          <p:nvPr/>
-        </p:nvSpPr>
-        <p:spPr>
-          <a:xfrm>
-            <a:off x="6156960" y="4974336"/>
-            <a:ext cx="5547360" cy="321259"/>
-          </a:xfrm>
-          <a:prstGeom prst="rect">
-            <a:avLst/>
-          </a:prstGeom>
-          <a:noFill/>
-          <a:effectLst/>
-        </p:spPr>
-        <p:txBody>
-          <a:bodyPr wrap="none" lIns="27432" rIns="27432" tIns="18288" bIns="18288" anchor="ctr">
-            <a:spAutoFit/>
-          </a:bodyPr>
-          <a:lstStyle/>
-          <a:p>
-            <a:pPr algn="l">
-              <a:spcAft>
-                <a:spcPts val="0"/>
-              </a:spcAft>
-            </a:pPr>
-            <a:r>
-              <a:rPr sz="1632" b="0" i="0">
-                <a:solidFill>
-                  <a:srgbClr val="E7F0F3"/>
-                </a:solidFill>
-                <a:latin typeface="Arial"/>
-              </a:rPr>
-              <a:t>EB</a:t>
-            </a:r>
-          </a:p>
-        </p:txBody>
-      </p:sp>
-      <p:sp>
-        <p:nvSpPr>
-          <p:cNvPr id="16" name="text15" descr="sci-ppt:C1-E18-015"/>
-          <p:cNvSpPr txBox="1"/>
-          <p:nvPr/>
-        </p:nvSpPr>
-        <p:spPr>
-          <a:xfrm>
-            <a:off x="6156960" y="5266944"/>
-            <a:ext cx="5547360" cy="321259"/>
-          </a:xfrm>
-          <a:prstGeom prst="rect">
-            <a:avLst/>
-          </a:prstGeom>
-          <a:noFill/>
-          <a:effectLst/>
-        </p:spPr>
-        <p:txBody>
-          <a:bodyPr wrap="none" lIns="27432" rIns="27432" tIns="18288" bIns="18288" anchor="ctr">
-            <a:spAutoFit/>
-          </a:bodyPr>
-          <a:lstStyle/>
-          <a:p>
-            <a:pPr algn="l">
-              <a:spcAft>
-                <a:spcPts val="0"/>
-              </a:spcAft>
-            </a:pPr>
-            <a:r>
-              <a:rPr sz="1632" b="0" i="0">
-                <a:solidFill>
-                  <a:srgbClr val="E7F0F3"/>
-                </a:solidFill>
-                <a:latin typeface="Arial"/>
-              </a:rPr>
-              <a:t>Vmax</a:t>
-            </a:r>
-          </a:p>
-        </p:txBody>
-      </p:sp>
-      <p:sp>
-        <p:nvSpPr>
-          <p:cNvPr id="17" name="text16" descr="sci-ppt:C1-E18-016"/>
-          <p:cNvSpPr txBox="1"/>
-          <p:nvPr/>
-        </p:nvSpPr>
-        <p:spPr>
-          <a:xfrm>
-            <a:off x="6156960" y="5559552"/>
-            <a:ext cx="5547360" cy="321259"/>
-          </a:xfrm>
-          <a:prstGeom prst="rect">
-            <a:avLst/>
-          </a:prstGeom>
-          <a:noFill/>
-          <a:effectLst/>
-        </p:spPr>
-        <p:txBody>
-          <a:bodyPr wrap="none" lIns="27432" rIns="27432" tIns="18288" bIns="18288" anchor="ctr">
-            <a:spAutoFit/>
-          </a:bodyPr>
-          <a:lstStyle/>
-          <a:p>
-            <a:pPr algn="l">
-              <a:spcAft>
-                <a:spcPts val="0"/>
-              </a:spcAft>
-            </a:pPr>
-            <a:r>
-              <a:rPr sz="1632" b="0" i="0">
-                <a:solidFill>
-                  <a:srgbClr val="E7F0F3"/>
-                </a:solidFill>
-                <a:latin typeface="Arial"/>
-              </a:rPr>
-              <a:t>R</a:t>
-            </a:r>
-          </a:p>
-        </p:txBody>
-      </p:sp>
-      <p:sp>
-        <p:nvSpPr>
-          <p:cNvPr id="18" name="text17" descr="sci-ppt:C1-E18-017"/>
-          <p:cNvSpPr txBox="1"/>
-          <p:nvPr/>
-        </p:nvSpPr>
-        <p:spPr>
-          <a:xfrm>
-            <a:off x="6156960" y="5852160"/>
-            <a:ext cx="5547360" cy="321259"/>
-          </a:xfrm>
-          <a:prstGeom prst="rect">
-            <a:avLst/>
-          </a:prstGeom>
-          <a:noFill/>
-          <a:effectLst/>
-        </p:spPr>
-        <p:txBody>
-          <a:bodyPr wrap="none" lIns="27432" rIns="27432" tIns="18288" bIns="18288" anchor="ctr">
-            <a:spAutoFit/>
-          </a:bodyPr>
-          <a:lstStyle/>
-          <a:p>
-            <a:pPr algn="l">
-              <a:spcAft>
-                <a:spcPts val="0"/>
-              </a:spcAft>
-            </a:pPr>
-            <a:r>
-              <a:rPr sz="1632" b="0" i="0">
-                <a:solidFill>
-                  <a:srgbClr val="E7F0F3"/>
-                </a:solidFill>
-                <a:latin typeface="Arial"/>
-              </a:rPr>
-              <a:t>Kl/EB = 1 − (R/Rmax)³</a:t>
-            </a:r>
-          </a:p>
-        </p:txBody>
-      </p:sp>
-      <p:sp>
-        <p:nvSpPr>
-          <p:cNvPr id="19" name="text18" descr="sci-ppt:C1-E18-018"/>
-          <p:cNvSpPr txBox="1"/>
-          <p:nvPr/>
-        </p:nvSpPr>
-        <p:spPr>
-          <a:xfrm>
-            <a:off x="365760" y="6339840"/>
-            <a:ext cx="11277600" cy="302361"/>
-          </a:xfrm>
-          <a:prstGeom prst="rect">
-            <a:avLst/>
-          </a:prstGeom>
-          <a:noFill/>
-          <a:effectLst/>
-        </p:spPr>
-        <p:txBody>
-          <a:bodyPr wrap="none" lIns="27432" rIns="27432" tIns="18288" bIns="18288" anchor="ctr">
-            <a:spAutoFit/>
-          </a:bodyPr>
-          <a:lstStyle/>
-          <a:p>
-            <a:pPr algn="l">
-              <a:spcAft>
-                <a:spcPts val="0"/>
-              </a:spcAft>
-            </a:pPr>
-            <a:r>
-              <a:rPr sz="1536" b="0" i="0">
+              <a:rPr sz="1000" b="0" i="0">
                 <a:solidFill>
                   <a:srgbClr val="B4C7D2"/>
                 </a:solidFill>
                 <a:latin typeface="Arial"/>
               </a:rPr>
-              <a:t>Finite energy survives the excluded zero-radius speed singularity</a:t>
+              <a:t>Dots: numerical integration of R R̈ + 3Ṙ²/2 = −Δp_c/ρ (Eq. C1-E13); no viscosity, tension or gas.</a:t>
             </a:r>
           </a:p>
         </p:txBody>

--- a/assets/figures-editable/c1-c2/c1-e18.pptx
+++ b/assets/figures-editable/c1-c2/c1-e18.pptx
@@ -3131,7 +3131,7 @@
                 </a:solidFill>
                 <a:latin typeface="Arial"/>
               </a:rPr>
-              <a:t>C1-E18 · Independent pressure-work conservation check</a:t>
+              <a:t>C1-E18 · Declared teaching calculation</a:t>
             </a:r>
           </a:p>
         </p:txBody>
@@ -3144,8 +3144,8 @@
         </p:nvCxnSpPr>
         <p:spPr>
           <a:xfrm>
-            <a:off x="914400" y="5029200"/>
-            <a:ext cx="5943600" cy="0"/>
+            <a:off x="914400" y="3108960"/>
+            <a:ext cx="5760720" cy="0"/>
           </a:xfrm>
           <a:prstGeom prst="line">
             <a:avLst/>
@@ -3166,8 +3166,8 @@
         </p:nvCxnSpPr>
         <p:spPr>
           <a:xfrm>
-            <a:off x="914400" y="1371600"/>
-            <a:ext cx="0" cy="3657600"/>
+            <a:off x="914400" y="1280160"/>
+            <a:ext cx="0" cy="1828800"/>
           </a:xfrm>
           <a:prstGeom prst="line">
             <a:avLst/>
@@ -3188,7 +3188,7 @@
         </p:nvCxnSpPr>
         <p:spPr>
           <a:xfrm>
-            <a:off x="914400" y="5029200"/>
+            <a:off x="914400" y="3108960"/>
             <a:ext cx="0" cy="64008"/>
           </a:xfrm>
           <a:prstGeom prst="line">
@@ -3210,8 +3210,8 @@
         </p:nvCxnSpPr>
         <p:spPr>
           <a:xfrm>
-            <a:off x="914400" y="1371600"/>
-            <a:ext cx="0" cy="3657600"/>
+            <a:off x="914400" y="1280160"/>
+            <a:ext cx="0" cy="1828800"/>
           </a:xfrm>
           <a:prstGeom prst="line">
             <a:avLst/>
@@ -3232,7 +3232,7 @@
         </p:nvSpPr>
         <p:spPr>
           <a:xfrm>
-            <a:off x="457200" y="5111496"/>
+            <a:off x="457200" y="3191256"/>
             <a:ext cx="914400" cy="208407"/>
           </a:xfrm>
           <a:prstGeom prst="rect">
@@ -3259,7 +3259,7 @@
                 </a:solidFill>
                 <a:latin typeface="Arial"/>
               </a:rPr>
-              <a:t>0.00</a:t>
+              <a:t>0</a:t>
             </a:r>
           </a:p>
         </p:txBody>
@@ -3272,7 +3272,7 @@
         </p:nvCxnSpPr>
         <p:spPr>
           <a:xfrm>
-            <a:off x="2400300" y="5029200"/>
+            <a:off x="2834639" y="3108960"/>
             <a:ext cx="0" cy="64008"/>
           </a:xfrm>
           <a:prstGeom prst="line">
@@ -3294,8 +3294,8 @@
         </p:nvCxnSpPr>
         <p:spPr>
           <a:xfrm>
-            <a:off x="2400300" y="1371600"/>
-            <a:ext cx="0" cy="3657600"/>
+            <a:off x="2834639" y="1280160"/>
+            <a:ext cx="0" cy="1828800"/>
           </a:xfrm>
           <a:prstGeom prst="line">
             <a:avLst/>
@@ -3316,7 +3316,7 @@
         </p:nvSpPr>
         <p:spPr>
           <a:xfrm>
-            <a:off x="1943100" y="5111496"/>
+            <a:off x="2377439" y="3191256"/>
             <a:ext cx="914400" cy="208407"/>
           </a:xfrm>
           <a:prstGeom prst="rect">
@@ -3343,7 +3343,7 @@
                 </a:solidFill>
                 <a:latin typeface="Arial"/>
               </a:rPr>
-              <a:t>0.25</a:t>
+              <a:t>1</a:t>
             </a:r>
           </a:p>
         </p:txBody>
@@ -3356,7 +3356,7 @@
         </p:nvCxnSpPr>
         <p:spPr>
           <a:xfrm>
-            <a:off x="3886200" y="5029200"/>
+            <a:off x="4754879" y="3108960"/>
             <a:ext cx="0" cy="64008"/>
           </a:xfrm>
           <a:prstGeom prst="line">
@@ -3378,8 +3378,8 @@
         </p:nvCxnSpPr>
         <p:spPr>
           <a:xfrm>
-            <a:off x="3886200" y="1371600"/>
-            <a:ext cx="0" cy="3657600"/>
+            <a:off x="4754879" y="1280160"/>
+            <a:ext cx="0" cy="1828800"/>
           </a:xfrm>
           <a:prstGeom prst="line">
             <a:avLst/>
@@ -3400,7 +3400,7 @@
         </p:nvSpPr>
         <p:spPr>
           <a:xfrm>
-            <a:off x="3429000" y="5111496"/>
+            <a:off x="4297679" y="3191256"/>
             <a:ext cx="914400" cy="208407"/>
           </a:xfrm>
           <a:prstGeom prst="rect">
@@ -3427,7 +3427,7 @@
                 </a:solidFill>
                 <a:latin typeface="Arial"/>
               </a:rPr>
-              <a:t>0.50</a:t>
+              <a:t>2</a:t>
             </a:r>
           </a:p>
         </p:txBody>
@@ -3440,7 +3440,7 @@
         </p:nvCxnSpPr>
         <p:spPr>
           <a:xfrm>
-            <a:off x="5372100" y="5029200"/>
+            <a:off x="6675120" y="3108960"/>
             <a:ext cx="0" cy="64008"/>
           </a:xfrm>
           <a:prstGeom prst="line">
@@ -3462,8 +3462,8 @@
         </p:nvCxnSpPr>
         <p:spPr>
           <a:xfrm>
-            <a:off x="5372100" y="1371600"/>
-            <a:ext cx="0" cy="3657600"/>
+            <a:off x="6675120" y="1280160"/>
+            <a:ext cx="0" cy="1828800"/>
           </a:xfrm>
           <a:prstGeom prst="line">
             <a:avLst/>
@@ -3484,7 +3484,7 @@
         </p:nvSpPr>
         <p:spPr>
           <a:xfrm>
-            <a:off x="4914900" y="5111496"/>
+            <a:off x="6217920" y="3191256"/>
             <a:ext cx="914400" cy="208407"/>
           </a:xfrm>
           <a:prstGeom prst="rect">
@@ -3511,7 +3511,7 @@
                 </a:solidFill>
                 <a:latin typeface="Arial"/>
               </a:rPr>
-              <a:t>0.75</a:t>
+              <a:t>3</a:t>
             </a:r>
           </a:p>
         </p:txBody>
@@ -3524,8 +3524,8 @@
         </p:nvCxnSpPr>
         <p:spPr>
           <a:xfrm>
-            <a:off x="6858000" y="5029200"/>
-            <a:ext cx="0" cy="64008"/>
+            <a:off x="850392" y="3108960"/>
+            <a:ext cx="64008" cy="0"/>
           </a:xfrm>
           <a:prstGeom prst="line">
             <a:avLst/>
@@ -3546,8 +3546,30 @@
         </p:nvCxnSpPr>
         <p:spPr>
           <a:xfrm>
-            <a:off x="6858000" y="1371600"/>
-            <a:ext cx="0" cy="3657600"/>
+            <a:off x="850392" y="2537460"/>
+            <a:ext cx="64008" cy="0"/>
+          </a:xfrm>
+          <a:prstGeom prst="line">
+            <a:avLst/>
+          </a:prstGeom>
+          <a:ln w="12700">
+            <a:solidFill>
+              <a:srgbClr val="B4C7D2"/>
+            </a:solidFill>
+          </a:ln>
+          <a:effectLst/>
+        </p:spPr>
+      </p:cxnSp>
+      <p:cxnSp>
+        <p:nvCxnSpPr>
+          <p:cNvPr id="19" name="C1-E18 line 17" descr="sci-ppt:o017"/>
+          <p:cNvCxnSpPr/>
+          <p:nvPr/>
+        </p:nvCxnSpPr>
+        <p:spPr>
+          <a:xfrm>
+            <a:off x="914400" y="2537460"/>
+            <a:ext cx="5760720" cy="0"/>
           </a:xfrm>
           <a:prstGeom prst="line">
             <a:avLst/>
@@ -3562,14 +3584,14 @@
       </p:cxnSp>
       <p:sp>
         <p:nvSpPr>
-          <p:cNvPr id="19" name="C1-E18 text 17" descr="sci-ppt:o017"/>
+          <p:cNvPr id="20" name="C1-E18 text 18" descr="sci-ppt:o018"/>
           <p:cNvSpPr txBox="1"/>
           <p:nvPr/>
         </p:nvSpPr>
         <p:spPr>
           <a:xfrm>
-            <a:off x="6400800" y="5111496"/>
-            <a:ext cx="914400" cy="208407"/>
+            <a:off x="45720" y="2455164"/>
+            <a:ext cx="777240" cy="208407"/>
           </a:xfrm>
           <a:prstGeom prst="rect">
             <a:avLst/>
@@ -3583,7 +3605,7 @@
           </a:bodyPr>
           <a:lstStyle/>
           <a:p>
-            <a:pPr algn="ctr">
+            <a:pPr algn="r">
               <a:spcAft>
                 <a:spcPts val="0"/>
               </a:spcAft>
@@ -3595,20 +3617,20 @@
                 </a:solidFill>
                 <a:latin typeface="Arial"/>
               </a:rPr>
-              <a:t>1.00</a:t>
+              <a:t>10</a:t>
             </a:r>
           </a:p>
         </p:txBody>
       </p:sp>
       <p:cxnSp>
         <p:nvCxnSpPr>
-          <p:cNvPr id="20" name="C1-E18 line 18" descr="sci-ppt:o018"/>
+          <p:cNvPr id="21" name="C1-E18 line 19" descr="sci-ppt:o019"/>
           <p:cNvCxnSpPr/>
           <p:nvPr/>
         </p:nvCxnSpPr>
         <p:spPr>
           <a:xfrm>
-            <a:off x="850392" y="5029200"/>
+            <a:off x="850392" y="1965960"/>
             <a:ext cx="64008" cy="0"/>
           </a:xfrm>
           <a:prstGeom prst="line">
@@ -3624,36 +3646,14 @@
       </p:cxnSp>
       <p:cxnSp>
         <p:nvCxnSpPr>
-          <p:cNvPr id="21" name="C1-E18 line 19" descr="sci-ppt:o019"/>
-          <p:cNvCxnSpPr/>
-          <p:nvPr/>
-        </p:nvCxnSpPr>
-        <p:spPr>
-          <a:xfrm>
-            <a:off x="850392" y="4158342"/>
-            <a:ext cx="64008" cy="0"/>
-          </a:xfrm>
-          <a:prstGeom prst="line">
-            <a:avLst/>
-          </a:prstGeom>
-          <a:ln w="12700">
-            <a:solidFill>
-              <a:srgbClr val="B4C7D2"/>
-            </a:solidFill>
-          </a:ln>
-          <a:effectLst/>
-        </p:spPr>
-      </p:cxnSp>
-      <p:cxnSp>
-        <p:nvCxnSpPr>
           <p:cNvPr id="22" name="C1-E18 line 20" descr="sci-ppt:o020"/>
           <p:cNvCxnSpPr/>
           <p:nvPr/>
         </p:nvCxnSpPr>
         <p:spPr>
           <a:xfrm>
-            <a:off x="914400" y="4158342"/>
-            <a:ext cx="5943600" cy="0"/>
+            <a:off x="914400" y="1965960"/>
+            <a:ext cx="5760720" cy="0"/>
           </a:xfrm>
           <a:prstGeom prst="line">
             <a:avLst/>
@@ -3674,7 +3674,7 @@
         </p:nvSpPr>
         <p:spPr>
           <a:xfrm>
-            <a:off x="45720" y="4076046"/>
+            <a:off x="45720" y="1883664"/>
             <a:ext cx="777240" cy="208407"/>
           </a:xfrm>
           <a:prstGeom prst="rect">
@@ -3701,7 +3701,7 @@
                 </a:solidFill>
                 <a:latin typeface="Arial"/>
               </a:rPr>
-              <a:t>0.25</a:t>
+              <a:t>20</a:t>
             </a:r>
           </a:p>
         </p:txBody>
@@ -3714,7 +3714,7 @@
         </p:nvCxnSpPr>
         <p:spPr>
           <a:xfrm>
-            <a:off x="850392" y="3287485"/>
+            <a:off x="850392" y="1394460"/>
             <a:ext cx="64008" cy="0"/>
           </a:xfrm>
           <a:prstGeom prst="line">
@@ -3736,8 +3736,8 @@
         </p:nvCxnSpPr>
         <p:spPr>
           <a:xfrm>
-            <a:off x="914400" y="3287485"/>
-            <a:ext cx="5943600" cy="0"/>
+            <a:off x="914400" y="1394460"/>
+            <a:ext cx="5760720" cy="0"/>
           </a:xfrm>
           <a:prstGeom prst="line">
             <a:avLst/>
@@ -3758,7 +3758,7 @@
         </p:nvSpPr>
         <p:spPr>
           <a:xfrm>
-            <a:off x="45720" y="3205189"/>
+            <a:off x="45720" y="1312163"/>
             <a:ext cx="777240" cy="208407"/>
           </a:xfrm>
           <a:prstGeom prst="rect">
@@ -3785,65 +3785,21 @@
                 </a:solidFill>
                 <a:latin typeface="Arial"/>
               </a:rPr>
-              <a:t>0.50</a:t>
-            </a:r>
-          </a:p>
-        </p:txBody>
-      </p:sp>
-      <p:cxnSp>
-        <p:nvCxnSpPr>
-          <p:cNvPr id="27" name="C1-E18 line 25" descr="sci-ppt:o025"/>
-          <p:cNvCxnSpPr/>
-          <p:nvPr/>
-        </p:nvCxnSpPr>
-        <p:spPr>
-          <a:xfrm>
-            <a:off x="850392" y="2416628"/>
-            <a:ext cx="64008" cy="0"/>
-          </a:xfrm>
-          <a:prstGeom prst="line">
-            <a:avLst/>
-          </a:prstGeom>
-          <a:ln w="12700">
-            <a:solidFill>
-              <a:srgbClr val="B4C7D2"/>
-            </a:solidFill>
-          </a:ln>
-          <a:effectLst/>
-        </p:spPr>
-      </p:cxnSp>
-      <p:cxnSp>
-        <p:nvCxnSpPr>
-          <p:cNvPr id="28" name="C1-E18 line 26" descr="sci-ppt:o026"/>
-          <p:cNvCxnSpPr/>
-          <p:nvPr/>
-        </p:nvCxnSpPr>
-        <p:spPr>
-          <a:xfrm>
-            <a:off x="914400" y="2416628"/>
-            <a:ext cx="5943600" cy="0"/>
-          </a:xfrm>
-          <a:prstGeom prst="line">
-            <a:avLst/>
-          </a:prstGeom>
-          <a:ln w="7620">
-            <a:solidFill>
-              <a:srgbClr val="2E4756"/>
-            </a:solidFill>
-          </a:ln>
-          <a:effectLst/>
-        </p:spPr>
-      </p:cxnSp>
-      <p:sp>
-        <p:nvSpPr>
-          <p:cNvPr id="29" name="C1-E18 text 27" descr="sci-ppt:o027"/>
+              <a:t>30</a:t>
+            </a:r>
+          </a:p>
+        </p:txBody>
+      </p:sp>
+      <p:sp>
+        <p:nvSpPr>
+          <p:cNvPr id="27" name="C1-E18 text 25" descr="sci-ppt:o025"/>
           <p:cNvSpPr txBox="1"/>
           <p:nvPr/>
         </p:nvSpPr>
         <p:spPr>
           <a:xfrm>
-            <a:off x="45720" y="2334332"/>
-            <a:ext cx="777240" cy="208407"/>
+            <a:off x="365760" y="932688"/>
+            <a:ext cx="5760720" cy="231648"/>
           </a:xfrm>
           <a:prstGeom prst="rect">
             <a:avLst/>
@@ -3857,131 +3813,7 @@
           </a:bodyPr>
           <a:lstStyle/>
           <a:p>
-            <a:pPr algn="r">
-              <a:spcAft>
-                <a:spcPts val="0"/>
-              </a:spcAft>
-            </a:pPr>
-            <a:r>
-              <a:rPr sz="1050" b="0" i="0">
-                <a:solidFill>
-                  <a:srgbClr val="B4C7D2"/>
-                </a:solidFill>
-                <a:latin typeface="Arial"/>
-              </a:rPr>
-              <a:t>0.75</a:t>
-            </a:r>
-          </a:p>
-        </p:txBody>
-      </p:sp>
-      <p:cxnSp>
-        <p:nvCxnSpPr>
-          <p:cNvPr id="30" name="C1-E18 line 28" descr="sci-ppt:o028"/>
-          <p:cNvCxnSpPr/>
-          <p:nvPr/>
-        </p:nvCxnSpPr>
-        <p:spPr>
-          <a:xfrm>
-            <a:off x="850392" y="1545771"/>
-            <a:ext cx="64008" cy="0"/>
-          </a:xfrm>
-          <a:prstGeom prst="line">
-            <a:avLst/>
-          </a:prstGeom>
-          <a:ln w="12700">
-            <a:solidFill>
-              <a:srgbClr val="B4C7D2"/>
-            </a:solidFill>
-          </a:ln>
-          <a:effectLst/>
-        </p:spPr>
-      </p:cxnSp>
-      <p:cxnSp>
-        <p:nvCxnSpPr>
-          <p:cNvPr id="31" name="C1-E18 line 29" descr="sci-ppt:o029"/>
-          <p:cNvCxnSpPr/>
-          <p:nvPr/>
-        </p:nvCxnSpPr>
-        <p:spPr>
-          <a:xfrm>
-            <a:off x="914400" y="1545771"/>
-            <a:ext cx="5943600" cy="0"/>
-          </a:xfrm>
-          <a:prstGeom prst="line">
-            <a:avLst/>
-          </a:prstGeom>
-          <a:ln w="7620">
-            <a:solidFill>
-              <a:srgbClr val="2E4756"/>
-            </a:solidFill>
-          </a:ln>
-          <a:effectLst/>
-        </p:spPr>
-      </p:cxnSp>
-      <p:sp>
-        <p:nvSpPr>
-          <p:cNvPr id="32" name="C1-E18 text 30" descr="sci-ppt:o030"/>
-          <p:cNvSpPr txBox="1"/>
-          <p:nvPr/>
-        </p:nvSpPr>
-        <p:spPr>
-          <a:xfrm>
-            <a:off x="45720" y="1463475"/>
-            <a:ext cx="777240" cy="208407"/>
-          </a:xfrm>
-          <a:prstGeom prst="rect">
-            <a:avLst/>
-          </a:prstGeom>
-          <a:noFill/>
-          <a:effectLst/>
-        </p:spPr>
-        <p:txBody>
-          <a:bodyPr wrap="none" lIns="18288" rIns="18288" tIns="18288" bIns="18288" anchor="t">
-            <a:spAutoFit/>
-          </a:bodyPr>
-          <a:lstStyle/>
-          <a:p>
-            <a:pPr algn="r">
-              <a:spcAft>
-                <a:spcPts val="0"/>
-              </a:spcAft>
-            </a:pPr>
-            <a:r>
-              <a:rPr sz="1050" b="0" i="0">
-                <a:solidFill>
-                  <a:srgbClr val="B4C7D2"/>
-                </a:solidFill>
-                <a:latin typeface="Arial"/>
-              </a:rPr>
-              <a:t>1.00</a:t>
-            </a:r>
-          </a:p>
-        </p:txBody>
-      </p:sp>
-      <p:sp>
-        <p:nvSpPr>
-          <p:cNvPr id="33" name="C1-E18 text 31" descr="sci-ppt:o031"/>
-          <p:cNvSpPr txBox="1"/>
-          <p:nvPr/>
-        </p:nvSpPr>
-        <p:spPr>
-          <a:xfrm>
-            <a:off x="914400" y="5312664"/>
-            <a:ext cx="5943600" cy="231648"/>
-          </a:xfrm>
-          <a:prstGeom prst="rect">
-            <a:avLst/>
-          </a:prstGeom>
-          <a:noFill/>
-          <a:effectLst/>
-        </p:spPr>
-        <p:txBody>
-          <a:bodyPr wrap="none" lIns="18288" rIns="18288" tIns="18288" bIns="18288" anchor="t">
-            <a:spAutoFit/>
-          </a:bodyPr>
-          <a:lstStyle/>
-          <a:p>
-            <a:pPr algn="ctr">
+            <a:pPr algn="l">
               <a:spcAft>
                 <a:spcPts val="0"/>
               </a:spcAft>
@@ -3993,61 +3825,21 @@
                 </a:solidFill>
                 <a:latin typeface="Arial"/>
               </a:rPr>
-              <a:t>R / Rₘₐₓ</a:t>
-            </a:r>
-          </a:p>
-        </p:txBody>
-      </p:sp>
-      <p:sp>
-        <p:nvSpPr>
-          <p:cNvPr id="34" name="C1-E18 text 32" descr="sci-ppt:o032"/>
-          <p:cNvSpPr txBox="1"/>
-          <p:nvPr/>
-        </p:nvSpPr>
-        <p:spPr>
-          <a:xfrm>
-            <a:off x="365760" y="1024128"/>
-            <a:ext cx="5943600" cy="231648"/>
-          </a:xfrm>
-          <a:prstGeom prst="rect">
-            <a:avLst/>
-          </a:prstGeom>
-          <a:noFill/>
-          <a:effectLst/>
-        </p:spPr>
-        <p:txBody>
-          <a:bodyPr wrap="none" lIns="18288" rIns="18288" tIns="18288" bIns="18288" anchor="t">
-            <a:spAutoFit/>
-          </a:bodyPr>
-          <a:lstStyle/>
-          <a:p>
-            <a:pPr algn="l">
-              <a:spcAft>
-                <a:spcPts val="0"/>
-              </a:spcAft>
-            </a:pPr>
-            <a:r>
-              <a:rPr sz="1200" b="0" i="0">
-                <a:solidFill>
-                  <a:srgbClr val="E7F0F3"/>
-                </a:solidFill>
-                <a:latin typeface="Arial"/>
-              </a:rPr>
-              <a:t>Kₗ / E_B</a:t>
-            </a:r>
-          </a:p>
-        </p:txBody>
-      </p:sp>
-      <p:sp>
-        <p:nvSpPr>
-          <p:cNvPr id="35" name="C1-E18 polygon 33" descr="sci-ppt:o033"/>
+              <a:t>R  (µm)</a:t>
+            </a:r>
+          </a:p>
+        </p:txBody>
+      </p:sp>
+      <p:sp>
+        <p:nvSpPr>
+          <p:cNvPr id="28" name="C1-E18 polygon 26" descr="sci-ppt:o026"/>
           <p:cNvSpPr/>
           <p:nvPr/>
         </p:nvSpPr>
         <p:spPr>
           <a:xfrm>
-            <a:off x="1033271" y="1545799"/>
-            <a:ext cx="5824729" cy="3483401"/>
+            <a:off x="914400" y="1394460"/>
+            <a:ext cx="5269223" cy="1714157"/>
           </a:xfrm>
           <a:custGeom>
             <a:avLst/>
@@ -4056,606 +3848,459 @@
             <a:cxnLst/>
             <a:rect l="l" t="t" r="r" b="b"/>
             <a:pathLst>
-              <a:path w="5824729" h="3483401">
+              <a:path w="5269223" h="1714157">
                 <a:moveTo>
                   <a:pt x="0" y="0"/>
                 </a:moveTo>
                 <a:lnTo>
-                  <a:pt x="29270" y="26"/>
-                </a:lnTo>
-                <a:lnTo>
-                  <a:pt x="58540" y="65"/>
-                </a:lnTo>
-                <a:lnTo>
-                  <a:pt x="87810" y="118"/>
-                </a:lnTo>
-                <a:lnTo>
-                  <a:pt x="117080" y="190"/>
-                </a:lnTo>
-                <a:lnTo>
-                  <a:pt x="146350" y="281"/>
-                </a:lnTo>
-                <a:lnTo>
-                  <a:pt x="175620" y="396"/>
-                </a:lnTo>
-                <a:lnTo>
-                  <a:pt x="204890" y="535"/>
-                </a:lnTo>
-                <a:lnTo>
-                  <a:pt x="234160" y="702"/>
-                </a:lnTo>
-                <a:lnTo>
-                  <a:pt x="263430" y="899"/>
-                </a:lnTo>
-                <a:lnTo>
-                  <a:pt x="292700" y="1129"/>
-                </a:lnTo>
-                <a:lnTo>
-                  <a:pt x="321970" y="1393"/>
-                </a:lnTo>
-                <a:lnTo>
-                  <a:pt x="351240" y="1696"/>
-                </a:lnTo>
-                <a:lnTo>
-                  <a:pt x="380510" y="2038"/>
-                </a:lnTo>
-                <a:lnTo>
-                  <a:pt x="409780" y="2423"/>
-                </a:lnTo>
-                <a:lnTo>
-                  <a:pt x="439050" y="2853"/>
-                </a:lnTo>
-                <a:lnTo>
-                  <a:pt x="468320" y="3331"/>
-                </a:lnTo>
-                <a:lnTo>
-                  <a:pt x="497590" y="3859"/>
-                </a:lnTo>
-                <a:lnTo>
-                  <a:pt x="526860" y="4439"/>
-                </a:lnTo>
-                <a:lnTo>
-                  <a:pt x="556130" y="5074"/>
-                </a:lnTo>
-                <a:lnTo>
-                  <a:pt x="585400" y="5767"/>
-                </a:lnTo>
-                <a:lnTo>
-                  <a:pt x="614670" y="6520"/>
-                </a:lnTo>
-                <a:lnTo>
-                  <a:pt x="643940" y="7336"/>
-                </a:lnTo>
-                <a:lnTo>
-                  <a:pt x="673210" y="8217"/>
-                </a:lnTo>
-                <a:lnTo>
-                  <a:pt x="702480" y="9165"/>
-                </a:lnTo>
-                <a:lnTo>
-                  <a:pt x="731750" y="10183"/>
-                </a:lnTo>
-                <a:lnTo>
-                  <a:pt x="761020" y="11274"/>
-                </a:lnTo>
-                <a:lnTo>
-                  <a:pt x="790290" y="12439"/>
-                </a:lnTo>
-                <a:lnTo>
-                  <a:pt x="819560" y="13683"/>
-                </a:lnTo>
-                <a:lnTo>
-                  <a:pt x="848830" y="15006"/>
-                </a:lnTo>
-                <a:lnTo>
-                  <a:pt x="878100" y="16412"/>
-                </a:lnTo>
-                <a:lnTo>
-                  <a:pt x="907370" y="17903"/>
-                </a:lnTo>
-                <a:lnTo>
-                  <a:pt x="936640" y="19481"/>
-                </a:lnTo>
-                <a:lnTo>
-                  <a:pt x="965910" y="21150"/>
-                </a:lnTo>
-                <a:lnTo>
-                  <a:pt x="995180" y="22911"/>
-                </a:lnTo>
-                <a:lnTo>
-                  <a:pt x="1024450" y="24767"/>
-                </a:lnTo>
-                <a:lnTo>
-                  <a:pt x="1053720" y="26720"/>
-                </a:lnTo>
-                <a:lnTo>
-                  <a:pt x="1082990" y="28774"/>
-                </a:lnTo>
-                <a:lnTo>
-                  <a:pt x="1112260" y="30930"/>
-                </a:lnTo>
-                <a:lnTo>
-                  <a:pt x="1141530" y="33191"/>
-                </a:lnTo>
-                <a:lnTo>
-                  <a:pt x="1170800" y="35559"/>
-                </a:lnTo>
-                <a:lnTo>
-                  <a:pt x="1200070" y="38038"/>
-                </a:lnTo>
-                <a:lnTo>
-                  <a:pt x="1229340" y="40629"/>
-                </a:lnTo>
-                <a:lnTo>
-                  <a:pt x="1258610" y="43335"/>
-                </a:lnTo>
-                <a:lnTo>
-                  <a:pt x="1287880" y="46158"/>
-                </a:lnTo>
-                <a:lnTo>
-                  <a:pt x="1317150" y="49101"/>
-                </a:lnTo>
-                <a:lnTo>
-                  <a:pt x="1346420" y="52167"/>
-                </a:lnTo>
-                <a:lnTo>
-                  <a:pt x="1375690" y="55358"/>
-                </a:lnTo>
-                <a:lnTo>
-                  <a:pt x="1404960" y="58676"/>
-                </a:lnTo>
-                <a:lnTo>
-                  <a:pt x="1434230" y="62124"/>
-                </a:lnTo>
-                <a:lnTo>
-                  <a:pt x="1463500" y="65705"/>
-                </a:lnTo>
-                <a:lnTo>
-                  <a:pt x="1492770" y="69421"/>
-                </a:lnTo>
-                <a:lnTo>
-                  <a:pt x="1522040" y="73274"/>
-                </a:lnTo>
-                <a:lnTo>
-                  <a:pt x="1551310" y="77267"/>
-                </a:lnTo>
-                <a:lnTo>
-                  <a:pt x="1580580" y="81402"/>
-                </a:lnTo>
-                <a:lnTo>
-                  <a:pt x="1609850" y="85682"/>
-                </a:lnTo>
-                <a:lnTo>
-                  <a:pt x="1639120" y="90110"/>
-                </a:lnTo>
-                <a:lnTo>
-                  <a:pt x="1668390" y="94688"/>
-                </a:lnTo>
-                <a:lnTo>
-                  <a:pt x="1697660" y="99418"/>
-                </a:lnTo>
-                <a:lnTo>
-                  <a:pt x="1726930" y="104303"/>
-                </a:lnTo>
-                <a:lnTo>
-                  <a:pt x="1756200" y="109345"/>
-                </a:lnTo>
-                <a:lnTo>
-                  <a:pt x="1785470" y="114548"/>
-                </a:lnTo>
-                <a:lnTo>
-                  <a:pt x="1814740" y="119912"/>
-                </a:lnTo>
-                <a:lnTo>
-                  <a:pt x="1844010" y="125442"/>
-                </a:lnTo>
-                <a:lnTo>
-                  <a:pt x="1873280" y="131139"/>
-                </a:lnTo>
-                <a:lnTo>
-                  <a:pt x="1902550" y="137006"/>
-                </a:lnTo>
-                <a:lnTo>
-                  <a:pt x="1931820" y="143045"/>
-                </a:lnTo>
-                <a:lnTo>
-                  <a:pt x="1961090" y="149260"/>
-                </a:lnTo>
-                <a:lnTo>
-                  <a:pt x="1990360" y="155651"/>
-                </a:lnTo>
-                <a:lnTo>
-                  <a:pt x="2019630" y="162223"/>
-                </a:lnTo>
-                <a:lnTo>
-                  <a:pt x="2048900" y="168977"/>
-                </a:lnTo>
-                <a:lnTo>
-                  <a:pt x="2078170" y="175915"/>
-                </a:lnTo>
-                <a:lnTo>
-                  <a:pt x="2107440" y="183041"/>
-                </a:lnTo>
-                <a:lnTo>
-                  <a:pt x="2136710" y="190357"/>
-                </a:lnTo>
-                <a:lnTo>
-                  <a:pt x="2165980" y="197866"/>
-                </a:lnTo>
-                <a:lnTo>
-                  <a:pt x="2195250" y="205569"/>
-                </a:lnTo>
-                <a:lnTo>
-                  <a:pt x="2224520" y="213469"/>
-                </a:lnTo>
-                <a:lnTo>
-                  <a:pt x="2253790" y="221570"/>
-                </a:lnTo>
-                <a:lnTo>
-                  <a:pt x="2283060" y="229872"/>
-                </a:lnTo>
-                <a:lnTo>
-                  <a:pt x="2312330" y="238380"/>
-                </a:lnTo>
-                <a:lnTo>
-                  <a:pt x="2341600" y="247095"/>
-                </a:lnTo>
-                <a:lnTo>
-                  <a:pt x="2370870" y="256020"/>
-                </a:lnTo>
-                <a:lnTo>
-                  <a:pt x="2400140" y="265157"/>
-                </a:lnTo>
-                <a:lnTo>
-                  <a:pt x="2429410" y="274509"/>
-                </a:lnTo>
-                <a:lnTo>
-                  <a:pt x="2458680" y="284078"/>
-                </a:lnTo>
-                <a:lnTo>
-                  <a:pt x="2487950" y="293867"/>
-                </a:lnTo>
-                <a:lnTo>
-                  <a:pt x="2517220" y="303878"/>
-                </a:lnTo>
-                <a:lnTo>
-                  <a:pt x="2546490" y="314114"/>
-                </a:lnTo>
-                <a:lnTo>
-                  <a:pt x="2575760" y="324578"/>
-                </a:lnTo>
-                <a:lnTo>
-                  <a:pt x="2605030" y="335271"/>
-                </a:lnTo>
-                <a:lnTo>
-                  <a:pt x="2634300" y="346196"/>
-                </a:lnTo>
-                <a:lnTo>
-                  <a:pt x="2663570" y="357357"/>
-                </a:lnTo>
-                <a:lnTo>
-                  <a:pt x="2692840" y="368754"/>
-                </a:lnTo>
-                <a:lnTo>
-                  <a:pt x="2722110" y="380392"/>
-                </a:lnTo>
-                <a:lnTo>
-                  <a:pt x="2751380" y="392272"/>
-                </a:lnTo>
-                <a:lnTo>
-                  <a:pt x="2780650" y="404396"/>
-                </a:lnTo>
-                <a:lnTo>
-                  <a:pt x="2809920" y="416768"/>
-                </a:lnTo>
-                <a:lnTo>
-                  <a:pt x="2839190" y="429389"/>
-                </a:lnTo>
-                <a:lnTo>
-                  <a:pt x="2868460" y="442263"/>
-                </a:lnTo>
-                <a:lnTo>
-                  <a:pt x="2897730" y="455392"/>
-                </a:lnTo>
-                <a:lnTo>
-                  <a:pt x="2926999" y="468777"/>
-                </a:lnTo>
-                <a:lnTo>
-                  <a:pt x="2956269" y="482423"/>
-                </a:lnTo>
-                <a:lnTo>
-                  <a:pt x="2985539" y="496331"/>
-                </a:lnTo>
-                <a:lnTo>
-                  <a:pt x="3014809" y="510503"/>
-                </a:lnTo>
-                <a:lnTo>
-                  <a:pt x="3044079" y="524943"/>
-                </a:lnTo>
-                <a:lnTo>
-                  <a:pt x="3073349" y="539653"/>
-                </a:lnTo>
-                <a:lnTo>
-                  <a:pt x="3102619" y="554635"/>
-                </a:lnTo>
-                <a:lnTo>
-                  <a:pt x="3131889" y="569891"/>
-                </a:lnTo>
-                <a:lnTo>
-                  <a:pt x="3161159" y="585425"/>
-                </a:lnTo>
-                <a:lnTo>
-                  <a:pt x="3190429" y="601238"/>
-                </a:lnTo>
-                <a:lnTo>
-                  <a:pt x="3219699" y="617334"/>
-                </a:lnTo>
-                <a:lnTo>
-                  <a:pt x="3248969" y="633715"/>
-                </a:lnTo>
-                <a:lnTo>
-                  <a:pt x="3278239" y="650382"/>
-                </a:lnTo>
-                <a:lnTo>
-                  <a:pt x="3307509" y="667339"/>
-                </a:lnTo>
-                <a:lnTo>
-                  <a:pt x="3336779" y="684589"/>
-                </a:lnTo>
-                <a:lnTo>
-                  <a:pt x="3366049" y="702133"/>
-                </a:lnTo>
-                <a:lnTo>
-                  <a:pt x="3395319" y="719975"/>
-                </a:lnTo>
-                <a:lnTo>
-                  <a:pt x="3424589" y="738116"/>
-                </a:lnTo>
-                <a:lnTo>
-                  <a:pt x="3453859" y="756559"/>
-                </a:lnTo>
-                <a:lnTo>
-                  <a:pt x="3483129" y="775307"/>
-                </a:lnTo>
-                <a:lnTo>
-                  <a:pt x="3512399" y="794363"/>
-                </a:lnTo>
-                <a:lnTo>
-                  <a:pt x="3541669" y="813727"/>
-                </a:lnTo>
-                <a:lnTo>
-                  <a:pt x="3570939" y="833405"/>
-                </a:lnTo>
-                <a:lnTo>
-                  <a:pt x="3600209" y="853396"/>
-                </a:lnTo>
-                <a:lnTo>
-                  <a:pt x="3629479" y="873705"/>
-                </a:lnTo>
-                <a:lnTo>
-                  <a:pt x="3658749" y="894334"/>
-                </a:lnTo>
-                <a:lnTo>
-                  <a:pt x="3688019" y="915284"/>
-                </a:lnTo>
-                <a:lnTo>
-                  <a:pt x="3717289" y="936560"/>
-                </a:lnTo>
-                <a:lnTo>
-                  <a:pt x="3746559" y="958162"/>
-                </a:lnTo>
-                <a:lnTo>
-                  <a:pt x="3775829" y="980095"/>
-                </a:lnTo>
-                <a:lnTo>
-                  <a:pt x="3805099" y="1002359"/>
-                </a:lnTo>
-                <a:lnTo>
-                  <a:pt x="3834369" y="1024958"/>
-                </a:lnTo>
-                <a:lnTo>
-                  <a:pt x="3863639" y="1047894"/>
-                </a:lnTo>
-                <a:lnTo>
-                  <a:pt x="3892909" y="1071170"/>
-                </a:lnTo>
-                <a:lnTo>
-                  <a:pt x="3922179" y="1094788"/>
-                </a:lnTo>
-                <a:lnTo>
-                  <a:pt x="3951449" y="1118750"/>
-                </a:lnTo>
-                <a:lnTo>
-                  <a:pt x="3980719" y="1143060"/>
-                </a:lnTo>
-                <a:lnTo>
-                  <a:pt x="4009989" y="1167719"/>
-                </a:lnTo>
-                <a:lnTo>
-                  <a:pt x="4039259" y="1192731"/>
-                </a:lnTo>
-                <a:lnTo>
-                  <a:pt x="4068529" y="1218097"/>
-                </a:lnTo>
-                <a:lnTo>
-                  <a:pt x="4097799" y="1243820"/>
-                </a:lnTo>
-                <a:lnTo>
-                  <a:pt x="4127069" y="1269902"/>
-                </a:lnTo>
-                <a:lnTo>
-                  <a:pt x="4156339" y="1296347"/>
-                </a:lnTo>
-                <a:lnTo>
-                  <a:pt x="4185609" y="1323157"/>
-                </a:lnTo>
-                <a:lnTo>
-                  <a:pt x="4214879" y="1350333"/>
-                </a:lnTo>
-                <a:lnTo>
-                  <a:pt x="4244149" y="1377879"/>
-                </a:lnTo>
-                <a:lnTo>
-                  <a:pt x="4273419" y="1405797"/>
-                </a:lnTo>
-                <a:lnTo>
-                  <a:pt x="4302689" y="1434090"/>
-                </a:lnTo>
-                <a:lnTo>
-                  <a:pt x="4331959" y="1462760"/>
-                </a:lnTo>
-                <a:lnTo>
-                  <a:pt x="4361229" y="1491809"/>
-                </a:lnTo>
-                <a:lnTo>
-                  <a:pt x="4390499" y="1521241"/>
-                </a:lnTo>
-                <a:lnTo>
-                  <a:pt x="4419769" y="1551057"/>
-                </a:lnTo>
-                <a:lnTo>
-                  <a:pt x="4449039" y="1581260"/>
-                </a:lnTo>
-                <a:lnTo>
-                  <a:pt x="4478309" y="1611852"/>
-                </a:lnTo>
-                <a:lnTo>
-                  <a:pt x="4507579" y="1642837"/>
-                </a:lnTo>
-                <a:lnTo>
-                  <a:pt x="4536849" y="1674216"/>
-                </a:lnTo>
-                <a:lnTo>
-                  <a:pt x="4566119" y="1705993"/>
-                </a:lnTo>
-                <a:lnTo>
-                  <a:pt x="4595389" y="1738169"/>
-                </a:lnTo>
-                <a:lnTo>
-                  <a:pt x="4624659" y="1770746"/>
-                </a:lnTo>
-                <a:lnTo>
-                  <a:pt x="4653929" y="1803729"/>
-                </a:lnTo>
-                <a:lnTo>
-                  <a:pt x="4683199" y="1837118"/>
-                </a:lnTo>
-                <a:lnTo>
-                  <a:pt x="4712469" y="1870917"/>
-                </a:lnTo>
-                <a:lnTo>
-                  <a:pt x="4741739" y="1905128"/>
-                </a:lnTo>
-                <a:lnTo>
-                  <a:pt x="4771009" y="1939754"/>
-                </a:lnTo>
-                <a:lnTo>
-                  <a:pt x="4800279" y="1974796"/>
-                </a:lnTo>
-                <a:lnTo>
-                  <a:pt x="4829549" y="2010258"/>
-                </a:lnTo>
-                <a:lnTo>
-                  <a:pt x="4858819" y="2046142"/>
-                </a:lnTo>
-                <a:lnTo>
-                  <a:pt x="4888089" y="2082451"/>
-                </a:lnTo>
-                <a:lnTo>
-                  <a:pt x="4917359" y="2119187"/>
-                </a:lnTo>
-                <a:lnTo>
-                  <a:pt x="4946629" y="2156352"/>
-                </a:lnTo>
-                <a:lnTo>
-                  <a:pt x="4975899" y="2193949"/>
-                </a:lnTo>
-                <a:lnTo>
-                  <a:pt x="5005169" y="2231980"/>
-                </a:lnTo>
-                <a:lnTo>
-                  <a:pt x="5034439" y="2270449"/>
-                </a:lnTo>
-                <a:lnTo>
-                  <a:pt x="5063709" y="2309357"/>
-                </a:lnTo>
-                <a:lnTo>
-                  <a:pt x="5092979" y="2348707"/>
-                </a:lnTo>
-                <a:lnTo>
-                  <a:pt x="5122249" y="2388501"/>
-                </a:lnTo>
-                <a:lnTo>
-                  <a:pt x="5151519" y="2428743"/>
-                </a:lnTo>
-                <a:lnTo>
-                  <a:pt x="5180789" y="2469433"/>
-                </a:lnTo>
-                <a:lnTo>
-                  <a:pt x="5210059" y="2510576"/>
-                </a:lnTo>
-                <a:lnTo>
-                  <a:pt x="5239329" y="2552174"/>
-                </a:lnTo>
-                <a:lnTo>
-                  <a:pt x="5268599" y="2594228"/>
-                </a:lnTo>
-                <a:lnTo>
-                  <a:pt x="5297869" y="2636742"/>
-                </a:lnTo>
-                <a:lnTo>
-                  <a:pt x="5327139" y="2679717"/>
-                </a:lnTo>
-                <a:lnTo>
-                  <a:pt x="5356409" y="2723157"/>
-                </a:lnTo>
-                <a:lnTo>
-                  <a:pt x="5385679" y="2767064"/>
-                </a:lnTo>
-                <a:lnTo>
-                  <a:pt x="5414949" y="2811441"/>
-                </a:lnTo>
-                <a:lnTo>
-                  <a:pt x="5444219" y="2856289"/>
-                </a:lnTo>
-                <a:lnTo>
-                  <a:pt x="5473489" y="2901612"/>
-                </a:lnTo>
-                <a:lnTo>
-                  <a:pt x="5502759" y="2947412"/>
-                </a:lnTo>
-                <a:lnTo>
-                  <a:pt x="5532029" y="2993691"/>
-                </a:lnTo>
-                <a:lnTo>
-                  <a:pt x="5561299" y="3040452"/>
-                </a:lnTo>
-                <a:lnTo>
-                  <a:pt x="5590569" y="3087698"/>
-                </a:lnTo>
-                <a:lnTo>
-                  <a:pt x="5619839" y="3135430"/>
-                </a:lnTo>
-                <a:lnTo>
-                  <a:pt x="5649109" y="3183652"/>
-                </a:lnTo>
-                <a:lnTo>
-                  <a:pt x="5678379" y="3232366"/>
-                </a:lnTo>
-                <a:lnTo>
-                  <a:pt x="5707649" y="3281574"/>
-                </a:lnTo>
-                <a:lnTo>
-                  <a:pt x="5736919" y="3331279"/>
-                </a:lnTo>
-                <a:lnTo>
-                  <a:pt x="5766189" y="3381483"/>
-                </a:lnTo>
-                <a:lnTo>
-                  <a:pt x="5795459" y="3432190"/>
-                </a:lnTo>
-                <a:lnTo>
-                  <a:pt x="5824729" y="3483401"/>
+                  <a:pt x="54396" y="76"/>
+                </a:lnTo>
+                <a:lnTo>
+                  <a:pt x="108789" y="305"/>
+                </a:lnTo>
+                <a:lnTo>
+                  <a:pt x="163171" y="687"/>
+                </a:lnTo>
+                <a:lnTo>
+                  <a:pt x="217539" y="1223"/>
+                </a:lnTo>
+                <a:lnTo>
+                  <a:pt x="271887" y="1910"/>
+                </a:lnTo>
+                <a:lnTo>
+                  <a:pt x="326212" y="2751"/>
+                </a:lnTo>
+                <a:lnTo>
+                  <a:pt x="380507" y="3745"/>
+                </a:lnTo>
+                <a:lnTo>
+                  <a:pt x="434768" y="4892"/>
+                </a:lnTo>
+                <a:lnTo>
+                  <a:pt x="488990" y="6191"/>
+                </a:lnTo>
+                <a:lnTo>
+                  <a:pt x="543169" y="7643"/>
+                </a:lnTo>
+                <a:lnTo>
+                  <a:pt x="597299" y="9249"/>
+                </a:lnTo>
+                <a:lnTo>
+                  <a:pt x="651375" y="11007"/>
+                </a:lnTo>
+                <a:lnTo>
+                  <a:pt x="705393" y="12918"/>
+                </a:lnTo>
+                <a:lnTo>
+                  <a:pt x="759348" y="14982"/>
+                </a:lnTo>
+                <a:lnTo>
+                  <a:pt x="813235" y="17198"/>
+                </a:lnTo>
+                <a:lnTo>
+                  <a:pt x="867049" y="19568"/>
+                </a:lnTo>
+                <a:lnTo>
+                  <a:pt x="920785" y="22090"/>
+                </a:lnTo>
+                <a:lnTo>
+                  <a:pt x="974438" y="24766"/>
+                </a:lnTo>
+                <a:lnTo>
+                  <a:pt x="1028004" y="27594"/>
+                </a:lnTo>
+                <a:lnTo>
+                  <a:pt x="1081476" y="30575"/>
+                </a:lnTo>
+                <a:lnTo>
+                  <a:pt x="1134852" y="33709"/>
+                </a:lnTo>
+                <a:lnTo>
+                  <a:pt x="1188124" y="36996"/>
+                </a:lnTo>
+                <a:lnTo>
+                  <a:pt x="1241289" y="40436"/>
+                </a:lnTo>
+                <a:lnTo>
+                  <a:pt x="1294342" y="44029"/>
+                </a:lnTo>
+                <a:lnTo>
+                  <a:pt x="1347278" y="47774"/>
+                </a:lnTo>
+                <a:lnTo>
+                  <a:pt x="1400090" y="51672"/>
+                </a:lnTo>
+                <a:lnTo>
+                  <a:pt x="1452776" y="55724"/>
+                </a:lnTo>
+                <a:lnTo>
+                  <a:pt x="1505329" y="59928"/>
+                </a:lnTo>
+                <a:lnTo>
+                  <a:pt x="1557745" y="64285"/>
+                </a:lnTo>
+                <a:lnTo>
+                  <a:pt x="1610018" y="68795"/>
+                </a:lnTo>
+                <a:lnTo>
+                  <a:pt x="1662144" y="73458"/>
+                </a:lnTo>
+                <a:lnTo>
+                  <a:pt x="1714118" y="78273"/>
+                </a:lnTo>
+                <a:lnTo>
+                  <a:pt x="1765933" y="83242"/>
+                </a:lnTo>
+                <a:lnTo>
+                  <a:pt x="1817586" y="88363"/>
+                </a:lnTo>
+                <a:lnTo>
+                  <a:pt x="1869072" y="93638"/>
+                </a:lnTo>
+                <a:lnTo>
+                  <a:pt x="1920384" y="99065"/>
+                </a:lnTo>
+                <a:lnTo>
+                  <a:pt x="1971519" y="104645"/>
+                </a:lnTo>
+                <a:lnTo>
+                  <a:pt x="2022470" y="110378"/>
+                </a:lnTo>
+                <a:lnTo>
+                  <a:pt x="2073234" y="116264"/>
+                </a:lnTo>
+                <a:lnTo>
+                  <a:pt x="2123803" y="122302"/>
+                </a:lnTo>
+                <a:lnTo>
+                  <a:pt x="2174174" y="128494"/>
+                </a:lnTo>
+                <a:lnTo>
+                  <a:pt x="2224342" y="134839"/>
+                </a:lnTo>
+                <a:lnTo>
+                  <a:pt x="2274300" y="141336"/>
+                </a:lnTo>
+                <a:lnTo>
+                  <a:pt x="2324044" y="147986"/>
+                </a:lnTo>
+                <a:lnTo>
+                  <a:pt x="2373568" y="154789"/>
+                </a:lnTo>
+                <a:lnTo>
+                  <a:pt x="2422868" y="161745"/>
+                </a:lnTo>
+                <a:lnTo>
+                  <a:pt x="2471937" y="168854"/>
+                </a:lnTo>
+                <a:lnTo>
+                  <a:pt x="2520771" y="176116"/>
+                </a:lnTo>
+                <a:lnTo>
+                  <a:pt x="2569365" y="183530"/>
+                </a:lnTo>
+                <a:lnTo>
+                  <a:pt x="2617712" y="191098"/>
+                </a:lnTo>
+                <a:lnTo>
+                  <a:pt x="2665808" y="198818"/>
+                </a:lnTo>
+                <a:lnTo>
+                  <a:pt x="2713646" y="206691"/>
+                </a:lnTo>
+                <a:lnTo>
+                  <a:pt x="2761223" y="214718"/>
+                </a:lnTo>
+                <a:lnTo>
+                  <a:pt x="2808532" y="222897"/>
+                </a:lnTo>
+                <a:lnTo>
+                  <a:pt x="2855568" y="231229"/>
+                </a:lnTo>
+                <a:lnTo>
+                  <a:pt x="2902325" y="239713"/>
+                </a:lnTo>
+                <a:lnTo>
+                  <a:pt x="2948798" y="248351"/>
+                </a:lnTo>
+                <a:lnTo>
+                  <a:pt x="2994981" y="257141"/>
+                </a:lnTo>
+                <a:lnTo>
+                  <a:pt x="3040869" y="266085"/>
+                </a:lnTo>
+                <a:lnTo>
+                  <a:pt x="3086456" y="275181"/>
+                </a:lnTo>
+                <a:lnTo>
+                  <a:pt x="3131737" y="284430"/>
+                </a:lnTo>
+                <a:lnTo>
+                  <a:pt x="3176706" y="293832"/>
+                </a:lnTo>
+                <a:lnTo>
+                  <a:pt x="3221357" y="303387"/>
+                </a:lnTo>
+                <a:lnTo>
+                  <a:pt x="3265685" y="313095"/>
+                </a:lnTo>
+                <a:lnTo>
+                  <a:pt x="3309685" y="322956"/>
+                </a:lnTo>
+                <a:lnTo>
+                  <a:pt x="3353349" y="332969"/>
+                </a:lnTo>
+                <a:lnTo>
+                  <a:pt x="3396673" y="343136"/>
+                </a:lnTo>
+                <a:lnTo>
+                  <a:pt x="3439651" y="353455"/>
+                </a:lnTo>
+                <a:lnTo>
+                  <a:pt x="3482277" y="363927"/>
+                </a:lnTo>
+                <a:lnTo>
+                  <a:pt x="3524546" y="374552"/>
+                </a:lnTo>
+                <a:lnTo>
+                  <a:pt x="3566451" y="385330"/>
+                </a:lnTo>
+                <a:lnTo>
+                  <a:pt x="3607987" y="396261"/>
+                </a:lnTo>
+                <a:lnTo>
+                  <a:pt x="3649147" y="407345"/>
+                </a:lnTo>
+                <a:lnTo>
+                  <a:pt x="3689927" y="418581"/>
+                </a:lnTo>
+                <a:lnTo>
+                  <a:pt x="3730319" y="429971"/>
+                </a:lnTo>
+                <a:lnTo>
+                  <a:pt x="3770319" y="441513"/>
+                </a:lnTo>
+                <a:lnTo>
+                  <a:pt x="3809920" y="453208"/>
+                </a:lnTo>
+                <a:lnTo>
+                  <a:pt x="3849116" y="465056"/>
+                </a:lnTo>
+                <a:lnTo>
+                  <a:pt x="3887901" y="477057"/>
+                </a:lnTo>
+                <a:lnTo>
+                  <a:pt x="3926270" y="489211"/>
+                </a:lnTo>
+                <a:lnTo>
+                  <a:pt x="3964216" y="501518"/>
+                </a:lnTo>
+                <a:lnTo>
+                  <a:pt x="4001733" y="513978"/>
+                </a:lnTo>
+                <a:lnTo>
+                  <a:pt x="4038815" y="526590"/>
+                </a:lnTo>
+                <a:lnTo>
+                  <a:pt x="4075457" y="539356"/>
+                </a:lnTo>
+                <a:lnTo>
+                  <a:pt x="4111651" y="552274"/>
+                </a:lnTo>
+                <a:lnTo>
+                  <a:pt x="4147393" y="565345"/>
+                </a:lnTo>
+                <a:lnTo>
+                  <a:pt x="4182675" y="578569"/>
+                </a:lnTo>
+                <a:lnTo>
+                  <a:pt x="4217492" y="591946"/>
+                </a:lnTo>
+                <a:lnTo>
+                  <a:pt x="4251838" y="605476"/>
+                </a:lnTo>
+                <a:lnTo>
+                  <a:pt x="4285707" y="619158"/>
+                </a:lnTo>
+                <a:lnTo>
+                  <a:pt x="4319092" y="632994"/>
+                </a:lnTo>
+                <a:lnTo>
+                  <a:pt x="4351987" y="646982"/>
+                </a:lnTo>
+                <a:lnTo>
+                  <a:pt x="4384387" y="661123"/>
+                </a:lnTo>
+                <a:lnTo>
+                  <a:pt x="4416285" y="675418"/>
+                </a:lnTo>
+                <a:lnTo>
+                  <a:pt x="4447675" y="689865"/>
+                </a:lnTo>
+                <a:lnTo>
+                  <a:pt x="4478551" y="704465"/>
+                </a:lnTo>
+                <a:lnTo>
+                  <a:pt x="4508908" y="719217"/>
+                </a:lnTo>
+                <a:lnTo>
+                  <a:pt x="4538738" y="734123"/>
+                </a:lnTo>
+                <a:lnTo>
+                  <a:pt x="4568037" y="749182"/>
+                </a:lnTo>
+                <a:lnTo>
+                  <a:pt x="4596798" y="764393"/>
+                </a:lnTo>
+                <a:lnTo>
+                  <a:pt x="4625015" y="779757"/>
+                </a:lnTo>
+                <a:lnTo>
+                  <a:pt x="4652682" y="795274"/>
+                </a:lnTo>
+                <a:lnTo>
+                  <a:pt x="4679794" y="810945"/>
+                </a:lnTo>
+                <a:lnTo>
+                  <a:pt x="4706345" y="826767"/>
+                </a:lnTo>
+                <a:lnTo>
+                  <a:pt x="4732329" y="842743"/>
+                </a:lnTo>
+                <a:lnTo>
+                  <a:pt x="4757741" y="858872"/>
+                </a:lnTo>
+                <a:lnTo>
+                  <a:pt x="4782574" y="875154"/>
+                </a:lnTo>
+                <a:lnTo>
+                  <a:pt x="4806824" y="891588"/>
+                </a:lnTo>
+                <a:lnTo>
+                  <a:pt x="4830485" y="908175"/>
+                </a:lnTo>
+                <a:lnTo>
+                  <a:pt x="4853553" y="924916"/>
+                </a:lnTo>
+                <a:lnTo>
+                  <a:pt x="4876021" y="941809"/>
+                </a:lnTo>
+                <a:lnTo>
+                  <a:pt x="4897885" y="958855"/>
+                </a:lnTo>
+                <a:lnTo>
+                  <a:pt x="4919140" y="976054"/>
+                </a:lnTo>
+                <a:lnTo>
+                  <a:pt x="4939781" y="993405"/>
+                </a:lnTo>
+                <a:lnTo>
+                  <a:pt x="4959805" y="1010910"/>
+                </a:lnTo>
+                <a:lnTo>
+                  <a:pt x="4979206" y="1028567"/>
+                </a:lnTo>
+                <a:lnTo>
+                  <a:pt x="4997981" y="1046378"/>
+                </a:lnTo>
+                <a:lnTo>
+                  <a:pt x="5016125" y="1064341"/>
+                </a:lnTo>
+                <a:lnTo>
+                  <a:pt x="5033636" y="1082457"/>
+                </a:lnTo>
+                <a:lnTo>
+                  <a:pt x="5050510" y="1100726"/>
+                </a:lnTo>
+                <a:lnTo>
+                  <a:pt x="5066745" y="1119148"/>
+                </a:lnTo>
+                <a:lnTo>
+                  <a:pt x="5082336" y="1137723"/>
+                </a:lnTo>
+                <a:lnTo>
+                  <a:pt x="5097283" y="1156450"/>
+                </a:lnTo>
+                <a:lnTo>
+                  <a:pt x="5111583" y="1175331"/>
+                </a:lnTo>
+                <a:lnTo>
+                  <a:pt x="5125235" y="1194364"/>
+                </a:lnTo>
+                <a:lnTo>
+                  <a:pt x="5138239" y="1213551"/>
+                </a:lnTo>
+                <a:lnTo>
+                  <a:pt x="5150592" y="1232890"/>
+                </a:lnTo>
+                <a:lnTo>
+                  <a:pt x="5162297" y="1252382"/>
+                </a:lnTo>
+                <a:lnTo>
+                  <a:pt x="5173354" y="1272027"/>
+                </a:lnTo>
+                <a:lnTo>
+                  <a:pt x="5183763" y="1291824"/>
+                </a:lnTo>
+                <a:lnTo>
+                  <a:pt x="5193528" y="1311775"/>
+                </a:lnTo>
+                <a:lnTo>
+                  <a:pt x="5202652" y="1331879"/>
+                </a:lnTo>
+                <a:lnTo>
+                  <a:pt x="5211138" y="1352135"/>
+                </a:lnTo>
+                <a:lnTo>
+                  <a:pt x="5218991" y="1372544"/>
+                </a:lnTo>
+                <a:lnTo>
+                  <a:pt x="5226218" y="1393107"/>
+                </a:lnTo>
+                <a:lnTo>
+                  <a:pt x="5232826" y="1413822"/>
+                </a:lnTo>
+                <a:lnTo>
+                  <a:pt x="5238823" y="1434690"/>
+                </a:lnTo>
+                <a:lnTo>
+                  <a:pt x="5244219" y="1455710"/>
+                </a:lnTo>
+                <a:lnTo>
+                  <a:pt x="5249027" y="1476884"/>
+                </a:lnTo>
+                <a:lnTo>
+                  <a:pt x="5253260" y="1498211"/>
+                </a:lnTo>
+                <a:lnTo>
+                  <a:pt x="5256934" y="1519690"/>
+                </a:lnTo>
+                <a:lnTo>
+                  <a:pt x="5260067" y="1541322"/>
+                </a:lnTo>
+                <a:lnTo>
+                  <a:pt x="5262680" y="1563108"/>
+                </a:lnTo>
+                <a:lnTo>
+                  <a:pt x="5264799" y="1585046"/>
+                </a:lnTo>
+                <a:lnTo>
+                  <a:pt x="5266451" y="1607137"/>
+                </a:lnTo>
+                <a:lnTo>
+                  <a:pt x="5267671" y="1629381"/>
+                </a:lnTo>
+                <a:lnTo>
+                  <a:pt x="5268498" y="1651777"/>
+                </a:lnTo>
+                <a:lnTo>
+                  <a:pt x="5268984" y="1674327"/>
+                </a:lnTo>
+                <a:lnTo>
+                  <a:pt x="5269192" y="1697029"/>
+                </a:lnTo>
+                <a:lnTo>
+                  <a:pt x="5269223" y="1714157"/>
                 </a:lnTo>
               </a:path>
             </a:pathLst>
@@ -4678,14 +4323,14 @@
       </p:sp>
       <p:sp>
         <p:nvSpPr>
-          <p:cNvPr id="36" name="C1-E18 ellipse 34" descr="sci-ppt:o034"/>
+          <p:cNvPr id="29" name="C1-E18 ellipse 27" descr="sci-ppt:o027"/>
           <p:cNvSpPr/>
           <p:nvPr/>
         </p:nvSpPr>
         <p:spPr>
           <a:xfrm>
-            <a:off x="6803133" y="4974330"/>
-            <a:ext cx="109728" cy="109728"/>
+            <a:off x="5598989" y="2178558"/>
+            <a:ext cx="146304" cy="146304"/>
           </a:xfrm>
           <a:prstGeom prst="ellipse">
             <a:avLst/>
@@ -4708,16 +4353,1407 @@
           </a:p>
         </p:txBody>
       </p:sp>
-      <p:sp>
-        <p:nvSpPr>
-          <p:cNvPr id="37" name="C1-E18 ellipse 35" descr="sci-ppt:o035"/>
+      <p:cxnSp>
+        <p:nvCxnSpPr>
+          <p:cNvPr id="30" name="C1-E18 line 28" descr="sci-ppt:o028"/>
+          <p:cNvCxnSpPr/>
+          <p:nvPr/>
+        </p:nvCxnSpPr>
+        <p:spPr>
+          <a:xfrm>
+            <a:off x="6183623" y="1280160"/>
+            <a:ext cx="0" cy="1828800"/>
+          </a:xfrm>
+          <a:prstGeom prst="line">
+            <a:avLst/>
+          </a:prstGeom>
+          <a:ln w="16510">
+            <a:solidFill>
+              <a:srgbClr val="F28BA0"/>
+            </a:solidFill>
+            <a:prstDash val="dash"/>
+          </a:ln>
+          <a:effectLst/>
+        </p:spPr>
+      </p:cxnSp>
+      <p:sp>
+        <p:nvSpPr>
+          <p:cNvPr id="31" name="C1-E18 text 29" descr="sci-ppt:o029"/>
+          <p:cNvSpPr txBox="1"/>
+          <p:nvPr/>
+        </p:nvSpPr>
+        <p:spPr>
+          <a:xfrm>
+            <a:off x="3203261" y="2205990"/>
+            <a:ext cx="2377440" cy="223900"/>
+          </a:xfrm>
+          <a:prstGeom prst="rect">
+            <a:avLst/>
+          </a:prstGeom>
+          <a:noFill/>
+          <a:effectLst/>
+        </p:spPr>
+        <p:txBody>
+          <a:bodyPr wrap="none" lIns="18288" rIns="18288" tIns="18288" bIns="18288" anchor="t">
+            <a:spAutoFit/>
+          </a:bodyPr>
+          <a:lstStyle/>
+          <a:p>
+            <a:pPr algn="l">
+              <a:spcAft>
+                <a:spcPts val="0"/>
+              </a:spcAft>
+            </a:pPr>
+            <a:r>
+              <a:rPr sz="1150" b="0" i="0">
+                <a:solidFill>
+                  <a:srgbClr val="F2B880"/>
+                </a:solidFill>
+                <a:latin typeface="Arial"/>
+              </a:rPr>
+              <a:t>R = Rₘₐₓ/2 at 2.48 µs</a:t>
+            </a:r>
+          </a:p>
+        </p:txBody>
+      </p:sp>
+      <p:sp>
+        <p:nvSpPr>
+          <p:cNvPr id="32" name="C1-E18 text 30" descr="sci-ppt:o030"/>
+          <p:cNvSpPr txBox="1"/>
+          <p:nvPr/>
+        </p:nvSpPr>
+        <p:spPr>
+          <a:xfrm>
+            <a:off x="4446263" y="1451610"/>
+            <a:ext cx="1645920" cy="231648"/>
+          </a:xfrm>
+          <a:prstGeom prst="rect">
+            <a:avLst/>
+          </a:prstGeom>
+          <a:noFill/>
+          <a:effectLst/>
+        </p:spPr>
+        <p:txBody>
+          <a:bodyPr wrap="none" lIns="18288" rIns="18288" tIns="18288" bIns="18288" anchor="t">
+            <a:spAutoFit/>
+          </a:bodyPr>
+          <a:lstStyle/>
+          <a:p>
+            <a:pPr algn="l">
+              <a:spcAft>
+                <a:spcPts val="0"/>
+              </a:spcAft>
+            </a:pPr>
+            <a:r>
+              <a:rPr sz="1200" b="0" i="0">
+                <a:solidFill>
+                  <a:srgbClr val="F28BA0"/>
+                </a:solidFill>
+                <a:latin typeface="Arial"/>
+              </a:rPr>
+              <a:t>t_c = 2.744 µs</a:t>
+            </a:r>
+          </a:p>
+        </p:txBody>
+      </p:sp>
+      <p:cxnSp>
+        <p:nvCxnSpPr>
+          <p:cNvPr id="33" name="C1-E18 line 31" descr="sci-ppt:o031"/>
+          <p:cNvCxnSpPr/>
+          <p:nvPr/>
+        </p:nvCxnSpPr>
+        <p:spPr>
+          <a:xfrm>
+            <a:off x="914400" y="5577840"/>
+            <a:ext cx="5760720" cy="0"/>
+          </a:xfrm>
+          <a:prstGeom prst="line">
+            <a:avLst/>
+          </a:prstGeom>
+          <a:ln w="19050">
+            <a:solidFill>
+              <a:srgbClr val="B4C7D2"/>
+            </a:solidFill>
+          </a:ln>
+          <a:effectLst/>
+        </p:spPr>
+      </p:cxnSp>
+      <p:cxnSp>
+        <p:nvCxnSpPr>
+          <p:cNvPr id="34" name="C1-E18 line 32" descr="sci-ppt:o032"/>
+          <p:cNvCxnSpPr/>
+          <p:nvPr/>
+        </p:nvCxnSpPr>
+        <p:spPr>
+          <a:xfrm>
+            <a:off x="914400" y="3840480"/>
+            <a:ext cx="0" cy="1737360"/>
+          </a:xfrm>
+          <a:prstGeom prst="line">
+            <a:avLst/>
+          </a:prstGeom>
+          <a:ln w="19050">
+            <a:solidFill>
+              <a:srgbClr val="B4C7D2"/>
+            </a:solidFill>
+          </a:ln>
+          <a:effectLst/>
+        </p:spPr>
+      </p:cxnSp>
+      <p:cxnSp>
+        <p:nvCxnSpPr>
+          <p:cNvPr id="35" name="C1-E18 line 33" descr="sci-ppt:o033"/>
+          <p:cNvCxnSpPr/>
+          <p:nvPr/>
+        </p:nvCxnSpPr>
+        <p:spPr>
+          <a:xfrm>
+            <a:off x="914400" y="5577840"/>
+            <a:ext cx="0" cy="64008"/>
+          </a:xfrm>
+          <a:prstGeom prst="line">
+            <a:avLst/>
+          </a:prstGeom>
+          <a:ln w="12700">
+            <a:solidFill>
+              <a:srgbClr val="B4C7D2"/>
+            </a:solidFill>
+          </a:ln>
+          <a:effectLst/>
+        </p:spPr>
+      </p:cxnSp>
+      <p:cxnSp>
+        <p:nvCxnSpPr>
+          <p:cNvPr id="36" name="C1-E18 line 34" descr="sci-ppt:o034"/>
+          <p:cNvCxnSpPr/>
+          <p:nvPr/>
+        </p:nvCxnSpPr>
+        <p:spPr>
+          <a:xfrm>
+            <a:off x="914400" y="3840480"/>
+            <a:ext cx="0" cy="1737360"/>
+          </a:xfrm>
+          <a:prstGeom prst="line">
+            <a:avLst/>
+          </a:prstGeom>
+          <a:ln w="7620">
+            <a:solidFill>
+              <a:srgbClr val="2E4756"/>
+            </a:solidFill>
+          </a:ln>
+          <a:effectLst/>
+        </p:spPr>
+      </p:cxnSp>
+      <p:sp>
+        <p:nvSpPr>
+          <p:cNvPr id="37" name="C1-E18 text 35" descr="sci-ppt:o035"/>
+          <p:cNvSpPr txBox="1"/>
+          <p:nvPr/>
+        </p:nvSpPr>
+        <p:spPr>
+          <a:xfrm>
+            <a:off x="457200" y="5660136"/>
+            <a:ext cx="914400" cy="208407"/>
+          </a:xfrm>
+          <a:prstGeom prst="rect">
+            <a:avLst/>
+          </a:prstGeom>
+          <a:noFill/>
+          <a:effectLst/>
+        </p:spPr>
+        <p:txBody>
+          <a:bodyPr wrap="none" lIns="18288" rIns="18288" tIns="18288" bIns="18288" anchor="t">
+            <a:spAutoFit/>
+          </a:bodyPr>
+          <a:lstStyle/>
+          <a:p>
+            <a:pPr algn="ctr">
+              <a:spcAft>
+                <a:spcPts val="0"/>
+              </a:spcAft>
+            </a:pPr>
+            <a:r>
+              <a:rPr sz="1050" b="0" i="0">
+                <a:solidFill>
+                  <a:srgbClr val="B4C7D2"/>
+                </a:solidFill>
+                <a:latin typeface="Arial"/>
+              </a:rPr>
+              <a:t>0</a:t>
+            </a:r>
+          </a:p>
+        </p:txBody>
+      </p:sp>
+      <p:cxnSp>
+        <p:nvCxnSpPr>
+          <p:cNvPr id="38" name="C1-E18 line 36" descr="sci-ppt:o036"/>
+          <p:cNvCxnSpPr/>
+          <p:nvPr/>
+        </p:nvCxnSpPr>
+        <p:spPr>
+          <a:xfrm>
+            <a:off x="2834639" y="5577840"/>
+            <a:ext cx="0" cy="64008"/>
+          </a:xfrm>
+          <a:prstGeom prst="line">
+            <a:avLst/>
+          </a:prstGeom>
+          <a:ln w="12700">
+            <a:solidFill>
+              <a:srgbClr val="B4C7D2"/>
+            </a:solidFill>
+          </a:ln>
+          <a:effectLst/>
+        </p:spPr>
+      </p:cxnSp>
+      <p:cxnSp>
+        <p:nvCxnSpPr>
+          <p:cNvPr id="39" name="C1-E18 line 37" descr="sci-ppt:o037"/>
+          <p:cNvCxnSpPr/>
+          <p:nvPr/>
+        </p:nvCxnSpPr>
+        <p:spPr>
+          <a:xfrm>
+            <a:off x="2834639" y="3840480"/>
+            <a:ext cx="0" cy="1737360"/>
+          </a:xfrm>
+          <a:prstGeom prst="line">
+            <a:avLst/>
+          </a:prstGeom>
+          <a:ln w="7620">
+            <a:solidFill>
+              <a:srgbClr val="2E4756"/>
+            </a:solidFill>
+          </a:ln>
+          <a:effectLst/>
+        </p:spPr>
+      </p:cxnSp>
+      <p:sp>
+        <p:nvSpPr>
+          <p:cNvPr id="40" name="C1-E18 text 38" descr="sci-ppt:o038"/>
+          <p:cNvSpPr txBox="1"/>
+          <p:nvPr/>
+        </p:nvSpPr>
+        <p:spPr>
+          <a:xfrm>
+            <a:off x="2377439" y="5660136"/>
+            <a:ext cx="914400" cy="208407"/>
+          </a:xfrm>
+          <a:prstGeom prst="rect">
+            <a:avLst/>
+          </a:prstGeom>
+          <a:noFill/>
+          <a:effectLst/>
+        </p:spPr>
+        <p:txBody>
+          <a:bodyPr wrap="none" lIns="18288" rIns="18288" tIns="18288" bIns="18288" anchor="t">
+            <a:spAutoFit/>
+          </a:bodyPr>
+          <a:lstStyle/>
+          <a:p>
+            <a:pPr algn="ctr">
+              <a:spcAft>
+                <a:spcPts val="0"/>
+              </a:spcAft>
+            </a:pPr>
+            <a:r>
+              <a:rPr sz="1050" b="0" i="0">
+                <a:solidFill>
+                  <a:srgbClr val="B4C7D2"/>
+                </a:solidFill>
+                <a:latin typeface="Arial"/>
+              </a:rPr>
+              <a:t>1</a:t>
+            </a:r>
+          </a:p>
+        </p:txBody>
+      </p:sp>
+      <p:cxnSp>
+        <p:nvCxnSpPr>
+          <p:cNvPr id="41" name="C1-E18 line 39" descr="sci-ppt:o039"/>
+          <p:cNvCxnSpPr/>
+          <p:nvPr/>
+        </p:nvCxnSpPr>
+        <p:spPr>
+          <a:xfrm>
+            <a:off x="4754879" y="5577840"/>
+            <a:ext cx="0" cy="64008"/>
+          </a:xfrm>
+          <a:prstGeom prst="line">
+            <a:avLst/>
+          </a:prstGeom>
+          <a:ln w="12700">
+            <a:solidFill>
+              <a:srgbClr val="B4C7D2"/>
+            </a:solidFill>
+          </a:ln>
+          <a:effectLst/>
+        </p:spPr>
+      </p:cxnSp>
+      <p:cxnSp>
+        <p:nvCxnSpPr>
+          <p:cNvPr id="42" name="C1-E18 line 40" descr="sci-ppt:o040"/>
+          <p:cNvCxnSpPr/>
+          <p:nvPr/>
+        </p:nvCxnSpPr>
+        <p:spPr>
+          <a:xfrm>
+            <a:off x="4754879" y="3840480"/>
+            <a:ext cx="0" cy="1737360"/>
+          </a:xfrm>
+          <a:prstGeom prst="line">
+            <a:avLst/>
+          </a:prstGeom>
+          <a:ln w="7620">
+            <a:solidFill>
+              <a:srgbClr val="2E4756"/>
+            </a:solidFill>
+          </a:ln>
+          <a:effectLst/>
+        </p:spPr>
+      </p:cxnSp>
+      <p:sp>
+        <p:nvSpPr>
+          <p:cNvPr id="43" name="C1-E18 text 41" descr="sci-ppt:o041"/>
+          <p:cNvSpPr txBox="1"/>
+          <p:nvPr/>
+        </p:nvSpPr>
+        <p:spPr>
+          <a:xfrm>
+            <a:off x="4297679" y="5660136"/>
+            <a:ext cx="914400" cy="208407"/>
+          </a:xfrm>
+          <a:prstGeom prst="rect">
+            <a:avLst/>
+          </a:prstGeom>
+          <a:noFill/>
+          <a:effectLst/>
+        </p:spPr>
+        <p:txBody>
+          <a:bodyPr wrap="none" lIns="18288" rIns="18288" tIns="18288" bIns="18288" anchor="t">
+            <a:spAutoFit/>
+          </a:bodyPr>
+          <a:lstStyle/>
+          <a:p>
+            <a:pPr algn="ctr">
+              <a:spcAft>
+                <a:spcPts val="0"/>
+              </a:spcAft>
+            </a:pPr>
+            <a:r>
+              <a:rPr sz="1050" b="0" i="0">
+                <a:solidFill>
+                  <a:srgbClr val="B4C7D2"/>
+                </a:solidFill>
+                <a:latin typeface="Arial"/>
+              </a:rPr>
+              <a:t>2</a:t>
+            </a:r>
+          </a:p>
+        </p:txBody>
+      </p:sp>
+      <p:cxnSp>
+        <p:nvCxnSpPr>
+          <p:cNvPr id="44" name="C1-E18 line 42" descr="sci-ppt:o042"/>
+          <p:cNvCxnSpPr/>
+          <p:nvPr/>
+        </p:nvCxnSpPr>
+        <p:spPr>
+          <a:xfrm>
+            <a:off x="6675120" y="5577840"/>
+            <a:ext cx="0" cy="64008"/>
+          </a:xfrm>
+          <a:prstGeom prst="line">
+            <a:avLst/>
+          </a:prstGeom>
+          <a:ln w="12700">
+            <a:solidFill>
+              <a:srgbClr val="B4C7D2"/>
+            </a:solidFill>
+          </a:ln>
+          <a:effectLst/>
+        </p:spPr>
+      </p:cxnSp>
+      <p:cxnSp>
+        <p:nvCxnSpPr>
+          <p:cNvPr id="45" name="C1-E18 line 43" descr="sci-ppt:o043"/>
+          <p:cNvCxnSpPr/>
+          <p:nvPr/>
+        </p:nvCxnSpPr>
+        <p:spPr>
+          <a:xfrm>
+            <a:off x="6675120" y="3840480"/>
+            <a:ext cx="0" cy="1737360"/>
+          </a:xfrm>
+          <a:prstGeom prst="line">
+            <a:avLst/>
+          </a:prstGeom>
+          <a:ln w="7620">
+            <a:solidFill>
+              <a:srgbClr val="2E4756"/>
+            </a:solidFill>
+          </a:ln>
+          <a:effectLst/>
+        </p:spPr>
+      </p:cxnSp>
+      <p:sp>
+        <p:nvSpPr>
+          <p:cNvPr id="46" name="C1-E18 text 44" descr="sci-ppt:o044"/>
+          <p:cNvSpPr txBox="1"/>
+          <p:nvPr/>
+        </p:nvSpPr>
+        <p:spPr>
+          <a:xfrm>
+            <a:off x="6217920" y="5660136"/>
+            <a:ext cx="914400" cy="208407"/>
+          </a:xfrm>
+          <a:prstGeom prst="rect">
+            <a:avLst/>
+          </a:prstGeom>
+          <a:noFill/>
+          <a:effectLst/>
+        </p:spPr>
+        <p:txBody>
+          <a:bodyPr wrap="none" lIns="18288" rIns="18288" tIns="18288" bIns="18288" anchor="t">
+            <a:spAutoFit/>
+          </a:bodyPr>
+          <a:lstStyle/>
+          <a:p>
+            <a:pPr algn="ctr">
+              <a:spcAft>
+                <a:spcPts val="0"/>
+              </a:spcAft>
+            </a:pPr>
+            <a:r>
+              <a:rPr sz="1050" b="0" i="0">
+                <a:solidFill>
+                  <a:srgbClr val="B4C7D2"/>
+                </a:solidFill>
+                <a:latin typeface="Arial"/>
+              </a:rPr>
+              <a:t>3</a:t>
+            </a:r>
+          </a:p>
+        </p:txBody>
+      </p:sp>
+      <p:cxnSp>
+        <p:nvCxnSpPr>
+          <p:cNvPr id="47" name="C1-E18 line 45" descr="sci-ppt:o045"/>
+          <p:cNvCxnSpPr/>
+          <p:nvPr/>
+        </p:nvCxnSpPr>
+        <p:spPr>
+          <a:xfrm>
+            <a:off x="850392" y="5577840"/>
+            <a:ext cx="64008" cy="0"/>
+          </a:xfrm>
+          <a:prstGeom prst="line">
+            <a:avLst/>
+          </a:prstGeom>
+          <a:ln w="12700">
+            <a:solidFill>
+              <a:srgbClr val="B4C7D2"/>
+            </a:solidFill>
+          </a:ln>
+          <a:effectLst/>
+        </p:spPr>
+      </p:cxnSp>
+      <p:cxnSp>
+        <p:nvCxnSpPr>
+          <p:cNvPr id="48" name="C1-E18 line 46" descr="sci-ppt:o046"/>
+          <p:cNvCxnSpPr/>
+          <p:nvPr/>
+        </p:nvCxnSpPr>
+        <p:spPr>
+          <a:xfrm>
+            <a:off x="850392" y="5043267"/>
+            <a:ext cx="64008" cy="0"/>
+          </a:xfrm>
+          <a:prstGeom prst="line">
+            <a:avLst/>
+          </a:prstGeom>
+          <a:ln w="12700">
+            <a:solidFill>
+              <a:srgbClr val="B4C7D2"/>
+            </a:solidFill>
+          </a:ln>
+          <a:effectLst/>
+        </p:spPr>
+      </p:cxnSp>
+      <p:cxnSp>
+        <p:nvCxnSpPr>
+          <p:cNvPr id="49" name="C1-E18 line 47" descr="sci-ppt:o047"/>
+          <p:cNvCxnSpPr/>
+          <p:nvPr/>
+        </p:nvCxnSpPr>
+        <p:spPr>
+          <a:xfrm>
+            <a:off x="914400" y="5043267"/>
+            <a:ext cx="5760720" cy="0"/>
+          </a:xfrm>
+          <a:prstGeom prst="line">
+            <a:avLst/>
+          </a:prstGeom>
+          <a:ln w="7620">
+            <a:solidFill>
+              <a:srgbClr val="2E4756"/>
+            </a:solidFill>
+          </a:ln>
+          <a:effectLst/>
+        </p:spPr>
+      </p:cxnSp>
+      <p:sp>
+        <p:nvSpPr>
+          <p:cNvPr id="50" name="C1-E18 text 48" descr="sci-ppt:o048"/>
+          <p:cNvSpPr txBox="1"/>
+          <p:nvPr/>
+        </p:nvSpPr>
+        <p:spPr>
+          <a:xfrm>
+            <a:off x="45720" y="4960971"/>
+            <a:ext cx="777240" cy="208407"/>
+          </a:xfrm>
+          <a:prstGeom prst="rect">
+            <a:avLst/>
+          </a:prstGeom>
+          <a:noFill/>
+          <a:effectLst/>
+        </p:spPr>
+        <p:txBody>
+          <a:bodyPr wrap="none" lIns="18288" rIns="18288" tIns="18288" bIns="18288" anchor="t">
+            <a:spAutoFit/>
+          </a:bodyPr>
+          <a:lstStyle/>
+          <a:p>
+            <a:pPr algn="r">
+              <a:spcAft>
+                <a:spcPts val="0"/>
+              </a:spcAft>
+            </a:pPr>
+            <a:r>
+              <a:rPr sz="1050" b="0" i="0">
+                <a:solidFill>
+                  <a:srgbClr val="B4C7D2"/>
+                </a:solidFill>
+                <a:latin typeface="Arial"/>
+              </a:rPr>
+              <a:t>4</a:t>
+            </a:r>
+          </a:p>
+        </p:txBody>
+      </p:sp>
+      <p:cxnSp>
+        <p:nvCxnSpPr>
+          <p:cNvPr id="51" name="C1-E18 line 49" descr="sci-ppt:o049"/>
+          <p:cNvCxnSpPr/>
+          <p:nvPr/>
+        </p:nvCxnSpPr>
+        <p:spPr>
+          <a:xfrm>
+            <a:off x="850392" y="4508695"/>
+            <a:ext cx="64008" cy="0"/>
+          </a:xfrm>
+          <a:prstGeom prst="line">
+            <a:avLst/>
+          </a:prstGeom>
+          <a:ln w="12700">
+            <a:solidFill>
+              <a:srgbClr val="B4C7D2"/>
+            </a:solidFill>
+          </a:ln>
+          <a:effectLst/>
+        </p:spPr>
+      </p:cxnSp>
+      <p:cxnSp>
+        <p:nvCxnSpPr>
+          <p:cNvPr id="52" name="C1-E18 line 50" descr="sci-ppt:o050"/>
+          <p:cNvCxnSpPr/>
+          <p:nvPr/>
+        </p:nvCxnSpPr>
+        <p:spPr>
+          <a:xfrm>
+            <a:off x="914400" y="4508695"/>
+            <a:ext cx="5760720" cy="0"/>
+          </a:xfrm>
+          <a:prstGeom prst="line">
+            <a:avLst/>
+          </a:prstGeom>
+          <a:ln w="7620">
+            <a:solidFill>
+              <a:srgbClr val="2E4756"/>
+            </a:solidFill>
+          </a:ln>
+          <a:effectLst/>
+        </p:spPr>
+      </p:cxnSp>
+      <p:sp>
+        <p:nvSpPr>
+          <p:cNvPr id="53" name="C1-E18 text 51" descr="sci-ppt:o051"/>
+          <p:cNvSpPr txBox="1"/>
+          <p:nvPr/>
+        </p:nvSpPr>
+        <p:spPr>
+          <a:xfrm>
+            <a:off x="45720" y="4426399"/>
+            <a:ext cx="777240" cy="208407"/>
+          </a:xfrm>
+          <a:prstGeom prst="rect">
+            <a:avLst/>
+          </a:prstGeom>
+          <a:noFill/>
+          <a:effectLst/>
+        </p:spPr>
+        <p:txBody>
+          <a:bodyPr wrap="none" lIns="18288" rIns="18288" tIns="18288" bIns="18288" anchor="t">
+            <a:spAutoFit/>
+          </a:bodyPr>
+          <a:lstStyle/>
+          <a:p>
+            <a:pPr algn="r">
+              <a:spcAft>
+                <a:spcPts val="0"/>
+              </a:spcAft>
+            </a:pPr>
+            <a:r>
+              <a:rPr sz="1050" b="0" i="0">
+                <a:solidFill>
+                  <a:srgbClr val="B4C7D2"/>
+                </a:solidFill>
+                <a:latin typeface="Arial"/>
+              </a:rPr>
+              <a:t>8</a:t>
+            </a:r>
+          </a:p>
+        </p:txBody>
+      </p:sp>
+      <p:cxnSp>
+        <p:nvCxnSpPr>
+          <p:cNvPr id="54" name="C1-E18 line 52" descr="sci-ppt:o052"/>
+          <p:cNvCxnSpPr/>
+          <p:nvPr/>
+        </p:nvCxnSpPr>
+        <p:spPr>
+          <a:xfrm>
+            <a:off x="850392" y="3974123"/>
+            <a:ext cx="64008" cy="0"/>
+          </a:xfrm>
+          <a:prstGeom prst="line">
+            <a:avLst/>
+          </a:prstGeom>
+          <a:ln w="12700">
+            <a:solidFill>
+              <a:srgbClr val="B4C7D2"/>
+            </a:solidFill>
+          </a:ln>
+          <a:effectLst/>
+        </p:spPr>
+      </p:cxnSp>
+      <p:cxnSp>
+        <p:nvCxnSpPr>
+          <p:cNvPr id="55" name="C1-E18 line 53" descr="sci-ppt:o053"/>
+          <p:cNvCxnSpPr/>
+          <p:nvPr/>
+        </p:nvCxnSpPr>
+        <p:spPr>
+          <a:xfrm>
+            <a:off x="914400" y="3974123"/>
+            <a:ext cx="5760720" cy="0"/>
+          </a:xfrm>
+          <a:prstGeom prst="line">
+            <a:avLst/>
+          </a:prstGeom>
+          <a:ln w="7620">
+            <a:solidFill>
+              <a:srgbClr val="2E4756"/>
+            </a:solidFill>
+          </a:ln>
+          <a:effectLst/>
+        </p:spPr>
+      </p:cxnSp>
+      <p:sp>
+        <p:nvSpPr>
+          <p:cNvPr id="56" name="C1-E18 text 54" descr="sci-ppt:o054"/>
+          <p:cNvSpPr txBox="1"/>
+          <p:nvPr/>
+        </p:nvSpPr>
+        <p:spPr>
+          <a:xfrm>
+            <a:off x="45720" y="3891827"/>
+            <a:ext cx="777240" cy="208407"/>
+          </a:xfrm>
+          <a:prstGeom prst="rect">
+            <a:avLst/>
+          </a:prstGeom>
+          <a:noFill/>
+          <a:effectLst/>
+        </p:spPr>
+        <p:txBody>
+          <a:bodyPr wrap="none" lIns="18288" rIns="18288" tIns="18288" bIns="18288" anchor="t">
+            <a:spAutoFit/>
+          </a:bodyPr>
+          <a:lstStyle/>
+          <a:p>
+            <a:pPr algn="r">
+              <a:spcAft>
+                <a:spcPts val="0"/>
+              </a:spcAft>
+            </a:pPr>
+            <a:r>
+              <a:rPr sz="1050" b="0" i="0">
+                <a:solidFill>
+                  <a:srgbClr val="B4C7D2"/>
+                </a:solidFill>
+                <a:latin typeface="Arial"/>
+              </a:rPr>
+              <a:t>12</a:t>
+            </a:r>
+          </a:p>
+        </p:txBody>
+      </p:sp>
+      <p:sp>
+        <p:nvSpPr>
+          <p:cNvPr id="57" name="C1-E18 text 55" descr="sci-ppt:o055"/>
+          <p:cNvSpPr txBox="1"/>
+          <p:nvPr/>
+        </p:nvSpPr>
+        <p:spPr>
+          <a:xfrm>
+            <a:off x="914400" y="5861303"/>
+            <a:ext cx="5760720" cy="231648"/>
+          </a:xfrm>
+          <a:prstGeom prst="rect">
+            <a:avLst/>
+          </a:prstGeom>
+          <a:noFill/>
+          <a:effectLst/>
+        </p:spPr>
+        <p:txBody>
+          <a:bodyPr wrap="none" lIns="18288" rIns="18288" tIns="18288" bIns="18288" anchor="t">
+            <a:spAutoFit/>
+          </a:bodyPr>
+          <a:lstStyle/>
+          <a:p>
+            <a:pPr algn="ctr">
+              <a:spcAft>
+                <a:spcPts val="0"/>
+              </a:spcAft>
+            </a:pPr>
+            <a:r>
+              <a:rPr sz="1200" b="0" i="0">
+                <a:solidFill>
+                  <a:srgbClr val="E7F0F3"/>
+                </a:solidFill>
+                <a:latin typeface="Arial"/>
+              </a:rPr>
+              <a:t>t  (µs)</a:t>
+            </a:r>
+          </a:p>
+        </p:txBody>
+      </p:sp>
+      <p:sp>
+        <p:nvSpPr>
+          <p:cNvPr id="58" name="C1-E18 text 56" descr="sci-ppt:o056"/>
+          <p:cNvSpPr txBox="1"/>
+          <p:nvPr/>
+        </p:nvSpPr>
+        <p:spPr>
+          <a:xfrm>
+            <a:off x="365760" y="3493008"/>
+            <a:ext cx="5760720" cy="231648"/>
+          </a:xfrm>
+          <a:prstGeom prst="rect">
+            <a:avLst/>
+          </a:prstGeom>
+          <a:noFill/>
+          <a:effectLst/>
+        </p:spPr>
+        <p:txBody>
+          <a:bodyPr wrap="none" lIns="18288" rIns="18288" tIns="18288" bIns="18288" anchor="t">
+            <a:spAutoFit/>
+          </a:bodyPr>
+          <a:lstStyle/>
+          <a:p>
+            <a:pPr algn="l">
+              <a:spcAft>
+                <a:spcPts val="0"/>
+              </a:spcAft>
+            </a:pPr>
+            <a:r>
+              <a:rPr sz="1200" b="0" i="0">
+                <a:solidFill>
+                  <a:srgbClr val="E7F0F3"/>
+                </a:solidFill>
+                <a:latin typeface="Arial"/>
+              </a:rPr>
+              <a:t>Kₗ  (nJ)</a:t>
+            </a:r>
+          </a:p>
+        </p:txBody>
+      </p:sp>
+      <p:sp>
+        <p:nvSpPr>
+          <p:cNvPr id="59" name="C1-E18 polygon 57" descr="sci-ppt:o057"/>
           <p:cNvSpPr/>
           <p:nvPr/>
         </p:nvSpPr>
         <p:spPr>
           <a:xfrm>
-            <a:off x="6798253" y="4965759"/>
-            <a:ext cx="109728" cy="109728"/>
+            <a:off x="914400" y="4066372"/>
+            <a:ext cx="5269223" cy="1511014"/>
+          </a:xfrm>
+          <a:custGeom>
+            <a:avLst/>
+            <a:gdLst/>
+            <a:ahLst/>
+            <a:cxnLst/>
+            <a:rect l="l" t="t" r="r" b="b"/>
+            <a:pathLst>
+              <a:path w="5269223" h="1511014">
+                <a:moveTo>
+                  <a:pt x="0" y="1511014"/>
+                </a:moveTo>
+                <a:lnTo>
+                  <a:pt x="54396" y="1511014"/>
+                </a:lnTo>
+                <a:lnTo>
+                  <a:pt x="108789" y="1510659"/>
+                </a:lnTo>
+                <a:lnTo>
+                  <a:pt x="163171" y="1509649"/>
+                </a:lnTo>
+                <a:lnTo>
+                  <a:pt x="217539" y="1508235"/>
+                </a:lnTo>
+                <a:lnTo>
+                  <a:pt x="271887" y="1506419"/>
+                </a:lnTo>
+                <a:lnTo>
+                  <a:pt x="326212" y="1504201"/>
+                </a:lnTo>
+                <a:lnTo>
+                  <a:pt x="380507" y="1501583"/>
+                </a:lnTo>
+                <a:lnTo>
+                  <a:pt x="434768" y="1498566"/>
+                </a:lnTo>
+                <a:lnTo>
+                  <a:pt x="488990" y="1495151"/>
+                </a:lnTo>
+                <a:lnTo>
+                  <a:pt x="543169" y="1491341"/>
+                </a:lnTo>
+                <a:lnTo>
+                  <a:pt x="597299" y="1487138"/>
+                </a:lnTo>
+                <a:lnTo>
+                  <a:pt x="651375" y="1482543"/>
+                </a:lnTo>
+                <a:lnTo>
+                  <a:pt x="705393" y="1477559"/>
+                </a:lnTo>
+                <a:lnTo>
+                  <a:pt x="759348" y="1472189"/>
+                </a:lnTo>
+                <a:lnTo>
+                  <a:pt x="813235" y="1466436"/>
+                </a:lnTo>
+                <a:lnTo>
+                  <a:pt x="867049" y="1460302"/>
+                </a:lnTo>
+                <a:lnTo>
+                  <a:pt x="920785" y="1453792"/>
+                </a:lnTo>
+                <a:lnTo>
+                  <a:pt x="974438" y="1446909"/>
+                </a:lnTo>
+                <a:lnTo>
+                  <a:pt x="1028004" y="1439655"/>
+                </a:lnTo>
+                <a:lnTo>
+                  <a:pt x="1081476" y="1432036"/>
+                </a:lnTo>
+                <a:lnTo>
+                  <a:pt x="1134852" y="1424055"/>
+                </a:lnTo>
+                <a:lnTo>
+                  <a:pt x="1188124" y="1415717"/>
+                </a:lnTo>
+                <a:lnTo>
+                  <a:pt x="1241289" y="1407026"/>
+                </a:lnTo>
+                <a:lnTo>
+                  <a:pt x="1294342" y="1397987"/>
+                </a:lnTo>
+                <a:lnTo>
+                  <a:pt x="1347278" y="1388604"/>
+                </a:lnTo>
+                <a:lnTo>
+                  <a:pt x="1400090" y="1378883"/>
+                </a:lnTo>
+                <a:lnTo>
+                  <a:pt x="1452776" y="1368829"/>
+                </a:lnTo>
+                <a:lnTo>
+                  <a:pt x="1505329" y="1358448"/>
+                </a:lnTo>
+                <a:lnTo>
+                  <a:pt x="1557745" y="1347744"/>
+                </a:lnTo>
+                <a:lnTo>
+                  <a:pt x="1610018" y="1336725"/>
+                </a:lnTo>
+                <a:lnTo>
+                  <a:pt x="1662144" y="1325395"/>
+                </a:lnTo>
+                <a:lnTo>
+                  <a:pt x="1714118" y="1313761"/>
+                </a:lnTo>
+                <a:lnTo>
+                  <a:pt x="1765933" y="1301829"/>
+                </a:lnTo>
+                <a:lnTo>
+                  <a:pt x="1817586" y="1289606"/>
+                </a:lnTo>
+                <a:lnTo>
+                  <a:pt x="1869072" y="1277098"/>
+                </a:lnTo>
+                <a:lnTo>
+                  <a:pt x="1920384" y="1264313"/>
+                </a:lnTo>
+                <a:lnTo>
+                  <a:pt x="1971519" y="1251256"/>
+                </a:lnTo>
+                <a:lnTo>
+                  <a:pt x="2022470" y="1237936"/>
+                </a:lnTo>
+                <a:lnTo>
+                  <a:pt x="2073234" y="1224359"/>
+                </a:lnTo>
+                <a:lnTo>
+                  <a:pt x="2123803" y="1210533"/>
+                </a:lnTo>
+                <a:lnTo>
+                  <a:pt x="2174174" y="1196466"/>
+                </a:lnTo>
+                <a:lnTo>
+                  <a:pt x="2224342" y="1182165"/>
+                </a:lnTo>
+                <a:lnTo>
+                  <a:pt x="2274300" y="1167638"/>
+                </a:lnTo>
+                <a:lnTo>
+                  <a:pt x="2324044" y="1152892"/>
+                </a:lnTo>
+                <a:lnTo>
+                  <a:pt x="2373568" y="1137937"/>
+                </a:lnTo>
+                <a:lnTo>
+                  <a:pt x="2422868" y="1122780"/>
+                </a:lnTo>
+                <a:lnTo>
+                  <a:pt x="2471937" y="1107429"/>
+                </a:lnTo>
+                <a:lnTo>
+                  <a:pt x="2520771" y="1091894"/>
+                </a:lnTo>
+                <a:lnTo>
+                  <a:pt x="2569365" y="1076182"/>
+                </a:lnTo>
+                <a:lnTo>
+                  <a:pt x="2617712" y="1060302"/>
+                </a:lnTo>
+                <a:lnTo>
+                  <a:pt x="2665808" y="1044263"/>
+                </a:lnTo>
+                <a:lnTo>
+                  <a:pt x="2713646" y="1028074"/>
+                </a:lnTo>
+                <a:lnTo>
+                  <a:pt x="2761223" y="1011744"/>
+                </a:lnTo>
+                <a:lnTo>
+                  <a:pt x="2808532" y="995282"/>
+                </a:lnTo>
+                <a:lnTo>
+                  <a:pt x="2855568" y="978696"/>
+                </a:lnTo>
+                <a:lnTo>
+                  <a:pt x="2902325" y="961997"/>
+                </a:lnTo>
+                <a:lnTo>
+                  <a:pt x="2948798" y="945193"/>
+                </a:lnTo>
+                <a:lnTo>
+                  <a:pt x="2994981" y="928293"/>
+                </a:lnTo>
+                <a:lnTo>
+                  <a:pt x="3040869" y="911308"/>
+                </a:lnTo>
+                <a:lnTo>
+                  <a:pt x="3086456" y="894246"/>
+                </a:lnTo>
+                <a:lnTo>
+                  <a:pt x="3131737" y="877117"/>
+                </a:lnTo>
+                <a:lnTo>
+                  <a:pt x="3176706" y="859930"/>
+                </a:lnTo>
+                <a:lnTo>
+                  <a:pt x="3221357" y="842696"/>
+                </a:lnTo>
+                <a:lnTo>
+                  <a:pt x="3265685" y="825423"/>
+                </a:lnTo>
+                <a:lnTo>
+                  <a:pt x="3309685" y="808122"/>
+                </a:lnTo>
+                <a:lnTo>
+                  <a:pt x="3353349" y="790801"/>
+                </a:lnTo>
+                <a:lnTo>
+                  <a:pt x="3396673" y="773472"/>
+                </a:lnTo>
+                <a:lnTo>
+                  <a:pt x="3439651" y="756142"/>
+                </a:lnTo>
+                <a:lnTo>
+                  <a:pt x="3482277" y="738822"/>
+                </a:lnTo>
+                <a:lnTo>
+                  <a:pt x="3524546" y="721522"/>
+                </a:lnTo>
+                <a:lnTo>
+                  <a:pt x="3566451" y="704251"/>
+                </a:lnTo>
+                <a:lnTo>
+                  <a:pt x="3607987" y="687018"/>
+                </a:lnTo>
+                <a:lnTo>
+                  <a:pt x="3649147" y="669834"/>
+                </a:lnTo>
+                <a:lnTo>
+                  <a:pt x="3689927" y="652708"/>
+                </a:lnTo>
+                <a:lnTo>
+                  <a:pt x="3730319" y="635650"/>
+                </a:lnTo>
+                <a:lnTo>
+                  <a:pt x="3770319" y="618668"/>
+                </a:lnTo>
+                <a:lnTo>
+                  <a:pt x="3809920" y="601772"/>
+                </a:lnTo>
+                <a:lnTo>
+                  <a:pt x="3849116" y="584973"/>
+                </a:lnTo>
+                <a:lnTo>
+                  <a:pt x="3887901" y="568278"/>
+                </a:lnTo>
+                <a:lnTo>
+                  <a:pt x="3926270" y="551698"/>
+                </a:lnTo>
+                <a:lnTo>
+                  <a:pt x="3964216" y="535240"/>
+                </a:lnTo>
+                <a:lnTo>
+                  <a:pt x="4001733" y="518915"/>
+                </a:lnTo>
+                <a:lnTo>
+                  <a:pt x="4038815" y="502732"/>
+                </a:lnTo>
+                <a:lnTo>
+                  <a:pt x="4075457" y="486698"/>
+                </a:lnTo>
+                <a:lnTo>
+                  <a:pt x="4111651" y="470823"/>
+                </a:lnTo>
+                <a:lnTo>
+                  <a:pt x="4147393" y="455116"/>
+                </a:lnTo>
+                <a:lnTo>
+                  <a:pt x="4182675" y="439584"/>
+                </a:lnTo>
+                <a:lnTo>
+                  <a:pt x="4217492" y="424236"/>
+                </a:lnTo>
+                <a:lnTo>
+                  <a:pt x="4251838" y="409081"/>
+                </a:lnTo>
+                <a:lnTo>
+                  <a:pt x="4285707" y="394126"/>
+                </a:lnTo>
+                <a:lnTo>
+                  <a:pt x="4319092" y="379379"/>
+                </a:lnTo>
+                <a:lnTo>
+                  <a:pt x="4351987" y="364847"/>
+                </a:lnTo>
+                <a:lnTo>
+                  <a:pt x="4384387" y="350539"/>
+                </a:lnTo>
+                <a:lnTo>
+                  <a:pt x="4416285" y="336462"/>
+                </a:lnTo>
+                <a:lnTo>
+                  <a:pt x="4447675" y="322622"/>
+                </a:lnTo>
+                <a:lnTo>
+                  <a:pt x="4478551" y="309026"/>
+                </a:lnTo>
+                <a:lnTo>
+                  <a:pt x="4508908" y="295682"/>
+                </a:lnTo>
+                <a:lnTo>
+                  <a:pt x="4538738" y="282595"/>
+                </a:lnTo>
+                <a:lnTo>
+                  <a:pt x="4568037" y="269772"/>
+                </a:lnTo>
+                <a:lnTo>
+                  <a:pt x="4596798" y="257219"/>
+                </a:lnTo>
+                <a:lnTo>
+                  <a:pt x="4625015" y="244941"/>
+                </a:lnTo>
+                <a:lnTo>
+                  <a:pt x="4652682" y="232944"/>
+                </a:lnTo>
+                <a:lnTo>
+                  <a:pt x="4679794" y="221233"/>
+                </a:lnTo>
+                <a:lnTo>
+                  <a:pt x="4706345" y="209813"/>
+                </a:lnTo>
+                <a:lnTo>
+                  <a:pt x="4732329" y="198688"/>
+                </a:lnTo>
+                <a:lnTo>
+                  <a:pt x="4757741" y="187863"/>
+                </a:lnTo>
+                <a:lnTo>
+                  <a:pt x="4782574" y="177341"/>
+                </a:lnTo>
+                <a:lnTo>
+                  <a:pt x="4806824" y="167127"/>
+                </a:lnTo>
+                <a:lnTo>
+                  <a:pt x="4830485" y="157223"/>
+                </a:lnTo>
+                <a:lnTo>
+                  <a:pt x="4853553" y="147632"/>
+                </a:lnTo>
+                <a:lnTo>
+                  <a:pt x="4876021" y="138358"/>
+                </a:lnTo>
+                <a:lnTo>
+                  <a:pt x="4897885" y="129401"/>
+                </a:lnTo>
+                <a:lnTo>
+                  <a:pt x="4919140" y="120765"/>
+                </a:lnTo>
+                <a:lnTo>
+                  <a:pt x="4939781" y="112451"/>
+                </a:lnTo>
+                <a:lnTo>
+                  <a:pt x="4959805" y="104459"/>
+                </a:lnTo>
+                <a:lnTo>
+                  <a:pt x="4979206" y="96790"/>
+                </a:lnTo>
+                <a:lnTo>
+                  <a:pt x="4997981" y="89444"/>
+                </a:lnTo>
+                <a:lnTo>
+                  <a:pt x="5016125" y="82422"/>
+                </a:lnTo>
+                <a:lnTo>
+                  <a:pt x="5033636" y="75722"/>
+                </a:lnTo>
+                <a:lnTo>
+                  <a:pt x="5050510" y="69344"/>
+                </a:lnTo>
+                <a:lnTo>
+                  <a:pt x="5066745" y="63286"/>
+                </a:lnTo>
+                <a:lnTo>
+                  <a:pt x="5082336" y="57545"/>
+                </a:lnTo>
+                <a:lnTo>
+                  <a:pt x="5097283" y="52120"/>
+                </a:lnTo>
+                <a:lnTo>
+                  <a:pt x="5111583" y="47007"/>
+                </a:lnTo>
+                <a:lnTo>
+                  <a:pt x="5125235" y="42202"/>
+                </a:lnTo>
+                <a:lnTo>
+                  <a:pt x="5138239" y="37702"/>
+                </a:lnTo>
+                <a:lnTo>
+                  <a:pt x="5150592" y="33502"/>
+                </a:lnTo>
+                <a:lnTo>
+                  <a:pt x="5162297" y="29597"/>
+                </a:lnTo>
+                <a:lnTo>
+                  <a:pt x="5173354" y="25980"/>
+                </a:lnTo>
+                <a:lnTo>
+                  <a:pt x="5183763" y="22647"/>
+                </a:lnTo>
+                <a:lnTo>
+                  <a:pt x="5193528" y="19589"/>
+                </a:lnTo>
+                <a:lnTo>
+                  <a:pt x="5202652" y="16799"/>
+                </a:lnTo>
+                <a:lnTo>
+                  <a:pt x="5211138" y="14270"/>
+                </a:lnTo>
+                <a:lnTo>
+                  <a:pt x="5218991" y="11992"/>
+                </a:lnTo>
+                <a:lnTo>
+                  <a:pt x="5226218" y="9956"/>
+                </a:lnTo>
+                <a:lnTo>
+                  <a:pt x="5232826" y="8152"/>
+                </a:lnTo>
+                <a:lnTo>
+                  <a:pt x="5238823" y="6570"/>
+                </a:lnTo>
+                <a:lnTo>
+                  <a:pt x="5244219" y="5198"/>
+                </a:lnTo>
+                <a:lnTo>
+                  <a:pt x="5249027" y="4023"/>
+                </a:lnTo>
+                <a:lnTo>
+                  <a:pt x="5253260" y="3034"/>
+                </a:lnTo>
+                <a:lnTo>
+                  <a:pt x="5256934" y="2217"/>
+                </a:lnTo>
+                <a:lnTo>
+                  <a:pt x="5260067" y="1558"/>
+                </a:lnTo>
+                <a:lnTo>
+                  <a:pt x="5262680" y="1041"/>
+                </a:lnTo>
+                <a:lnTo>
+                  <a:pt x="5264799" y="651"/>
+                </a:lnTo>
+                <a:lnTo>
+                  <a:pt x="5266451" y="371"/>
+                </a:lnTo>
+                <a:lnTo>
+                  <a:pt x="5267671" y="185"/>
+                </a:lnTo>
+                <a:lnTo>
+                  <a:pt x="5268498" y="74"/>
+                </a:lnTo>
+                <a:lnTo>
+                  <a:pt x="5268984" y="19"/>
+                </a:lnTo>
+                <a:lnTo>
+                  <a:pt x="5269192" y="2"/>
+                </a:lnTo>
+                <a:lnTo>
+                  <a:pt x="5269223" y="0"/>
+                </a:lnTo>
+              </a:path>
+            </a:pathLst>
+          </a:custGeom>
+          <a:noFill/>
+          <a:ln w="38100">
+            <a:solidFill>
+              <a:srgbClr val="8EDBD4"/>
+            </a:solidFill>
+          </a:ln>
+          <a:effectLst/>
+        </p:spPr>
+        <p:txBody>
+          <a:bodyPr rtlCol="0" anchor="ctr"/>
+          <a:lstStyle/>
+          <a:p>
+            <a:pPr algn="ctr"/>
+          </a:p>
+        </p:txBody>
+      </p:sp>
+      <p:cxnSp>
+        <p:nvCxnSpPr>
+          <p:cNvPr id="60" name="C1-E18 line 58" descr="sci-ppt:o058"/>
+          <p:cNvCxnSpPr/>
+          <p:nvPr/>
+        </p:nvCxnSpPr>
+        <p:spPr>
+          <a:xfrm>
+            <a:off x="914400" y="4066372"/>
+            <a:ext cx="5760720" cy="0"/>
+          </a:xfrm>
+          <a:prstGeom prst="line">
+            <a:avLst/>
+          </a:prstGeom>
+          <a:ln w="16510">
+            <a:solidFill>
+              <a:srgbClr val="F2B880"/>
+            </a:solidFill>
+            <a:prstDash val="dash"/>
+          </a:ln>
+          <a:effectLst/>
+        </p:spPr>
+      </p:cxnSp>
+      <p:sp>
+        <p:nvSpPr>
+          <p:cNvPr id="61" name="C1-E18 text 59" descr="sci-ppt:o059"/>
+          <p:cNvSpPr txBox="1"/>
+          <p:nvPr/>
+        </p:nvSpPr>
+        <p:spPr>
+          <a:xfrm>
+            <a:off x="1179576" y="3773764"/>
+            <a:ext cx="2194560" cy="231648"/>
+          </a:xfrm>
+          <a:prstGeom prst="rect">
+            <a:avLst/>
+          </a:prstGeom>
+          <a:noFill/>
+          <a:effectLst/>
+        </p:spPr>
+        <p:txBody>
+          <a:bodyPr wrap="none" lIns="18288" rIns="18288" tIns="18288" bIns="18288" anchor="t">
+            <a:spAutoFit/>
+          </a:bodyPr>
+          <a:lstStyle/>
+          <a:p>
+            <a:pPr algn="l">
+              <a:spcAft>
+                <a:spcPts val="0"/>
+              </a:spcAft>
+            </a:pPr>
+            <a:r>
+              <a:rPr sz="1200" b="0" i="0">
+                <a:solidFill>
+                  <a:srgbClr val="F2B880"/>
+                </a:solidFill>
+                <a:latin typeface="Arial"/>
+              </a:rPr>
+              <a:t>E_B = 11.3097 nJ</a:t>
+            </a:r>
+          </a:p>
+        </p:txBody>
+      </p:sp>
+      <p:sp>
+        <p:nvSpPr>
+          <p:cNvPr id="62" name="C1-E18 ellipse 60" descr="sci-ppt:o060"/>
+          <p:cNvSpPr/>
+          <p:nvPr/>
+        </p:nvSpPr>
+        <p:spPr>
+          <a:xfrm>
+            <a:off x="5598989" y="4182153"/>
+            <a:ext cx="146304" cy="146304"/>
           </a:xfrm>
           <a:prstGeom prst="ellipse">
             <a:avLst/>
@@ -4742,718 +5778,14 @@
       </p:sp>
       <p:sp>
         <p:nvSpPr>
-          <p:cNvPr id="38" name="C1-E18 ellipse 36" descr="sci-ppt:o036"/>
-          <p:cNvSpPr/>
-          <p:nvPr/>
-        </p:nvSpPr>
-        <p:spPr>
-          <a:xfrm>
-            <a:off x="6784056" y="4940897"/>
-            <a:ext cx="109728" cy="109728"/>
-          </a:xfrm>
-          <a:prstGeom prst="ellipse">
-            <a:avLst/>
-          </a:prstGeom>
-          <a:solidFill>
-            <a:srgbClr val="F2B880"/>
-          </a:solidFill>
-          <a:ln w="12700">
-            <a:solidFill>
-              <a:srgbClr val="F2B880"/>
-            </a:solidFill>
-          </a:ln>
-          <a:effectLst/>
-        </p:spPr>
-        <p:txBody>
-          <a:bodyPr rtlCol="0" anchor="ctr"/>
-          <a:lstStyle/>
-          <a:p>
-            <a:pPr algn="ctr"/>
-          </a:p>
-        </p:txBody>
-      </p:sp>
-      <p:sp>
-        <p:nvSpPr>
-          <p:cNvPr id="39" name="C1-E18 ellipse 37" descr="sci-ppt:o037"/>
-          <p:cNvSpPr/>
-          <p:nvPr/>
-        </p:nvSpPr>
-        <p:spPr>
-          <a:xfrm>
-            <a:off x="6760451" y="4899823"/>
-            <a:ext cx="109728" cy="109728"/>
-          </a:xfrm>
-          <a:prstGeom prst="ellipse">
-            <a:avLst/>
-          </a:prstGeom>
-          <a:solidFill>
-            <a:srgbClr val="F2B880"/>
-          </a:solidFill>
-          <a:ln w="12700">
-            <a:solidFill>
-              <a:srgbClr val="F2B880"/>
-            </a:solidFill>
-          </a:ln>
-          <a:effectLst/>
-        </p:spPr>
-        <p:txBody>
-          <a:bodyPr rtlCol="0" anchor="ctr"/>
-          <a:lstStyle/>
-          <a:p>
-            <a:pPr algn="ctr"/>
-          </a:p>
-        </p:txBody>
-      </p:sp>
-      <p:sp>
-        <p:nvSpPr>
-          <p:cNvPr id="40" name="C1-E18 ellipse 38" descr="sci-ppt:o038"/>
-          <p:cNvSpPr/>
-          <p:nvPr/>
-        </p:nvSpPr>
-        <p:spPr>
-          <a:xfrm>
-            <a:off x="6726804" y="4841842"/>
-            <a:ext cx="109728" cy="109728"/>
-          </a:xfrm>
-          <a:prstGeom prst="ellipse">
-            <a:avLst/>
-          </a:prstGeom>
-          <a:solidFill>
-            <a:srgbClr val="F2B880"/>
-          </a:solidFill>
-          <a:ln w="12700">
-            <a:solidFill>
-              <a:srgbClr val="F2B880"/>
-            </a:solidFill>
-          </a:ln>
-          <a:effectLst/>
-        </p:spPr>
-        <p:txBody>
-          <a:bodyPr rtlCol="0" anchor="ctr"/>
-          <a:lstStyle/>
-          <a:p>
-            <a:pPr algn="ctr"/>
-          </a:p>
-        </p:txBody>
-      </p:sp>
-      <p:sp>
-        <p:nvSpPr>
-          <p:cNvPr id="41" name="C1-E18 ellipse 39" descr="sci-ppt:o039"/>
-          <p:cNvSpPr/>
-          <p:nvPr/>
-        </p:nvSpPr>
-        <p:spPr>
-          <a:xfrm>
-            <a:off x="6683735" y="4768589"/>
-            <a:ext cx="109728" cy="109728"/>
-          </a:xfrm>
-          <a:prstGeom prst="ellipse">
-            <a:avLst/>
-          </a:prstGeom>
-          <a:solidFill>
-            <a:srgbClr val="F2B880"/>
-          </a:solidFill>
-          <a:ln w="12700">
-            <a:solidFill>
-              <a:srgbClr val="F2B880"/>
-            </a:solidFill>
-          </a:ln>
-          <a:effectLst/>
-        </p:spPr>
-        <p:txBody>
-          <a:bodyPr rtlCol="0" anchor="ctr"/>
-          <a:lstStyle/>
-          <a:p>
-            <a:pPr algn="ctr"/>
-          </a:p>
-        </p:txBody>
-      </p:sp>
-      <p:sp>
-        <p:nvSpPr>
-          <p:cNvPr id="42" name="C1-E18 ellipse 40" descr="sci-ppt:o040"/>
-          <p:cNvSpPr/>
-          <p:nvPr/>
-        </p:nvSpPr>
-        <p:spPr>
-          <a:xfrm>
-            <a:off x="6630591" y="4679682"/>
-            <a:ext cx="109728" cy="109728"/>
-          </a:xfrm>
-          <a:prstGeom prst="ellipse">
-            <a:avLst/>
-          </a:prstGeom>
-          <a:solidFill>
-            <a:srgbClr val="F2B880"/>
-          </a:solidFill>
-          <a:ln w="12700">
-            <a:solidFill>
-              <a:srgbClr val="F2B880"/>
-            </a:solidFill>
-          </a:ln>
-          <a:effectLst/>
-        </p:spPr>
-        <p:txBody>
-          <a:bodyPr rtlCol="0" anchor="ctr"/>
-          <a:lstStyle/>
-          <a:p>
-            <a:pPr algn="ctr"/>
-          </a:p>
-        </p:txBody>
-      </p:sp>
-      <p:sp>
-        <p:nvSpPr>
-          <p:cNvPr id="43" name="C1-E18 ellipse 41" descr="sci-ppt:o041"/>
-          <p:cNvSpPr/>
-          <p:nvPr/>
-        </p:nvSpPr>
-        <p:spPr>
-          <a:xfrm>
-            <a:off x="6566121" y="4574005"/>
-            <a:ext cx="109728" cy="109728"/>
-          </a:xfrm>
-          <a:prstGeom prst="ellipse">
-            <a:avLst/>
-          </a:prstGeom>
-          <a:solidFill>
-            <a:srgbClr val="F2B880"/>
-          </a:solidFill>
-          <a:ln w="12700">
-            <a:solidFill>
-              <a:srgbClr val="F2B880"/>
-            </a:solidFill>
-          </a:ln>
-          <a:effectLst/>
-        </p:spPr>
-        <p:txBody>
-          <a:bodyPr rtlCol="0" anchor="ctr"/>
-          <a:lstStyle/>
-          <a:p>
-            <a:pPr algn="ctr"/>
-          </a:p>
-        </p:txBody>
-      </p:sp>
-      <p:sp>
-        <p:nvSpPr>
-          <p:cNvPr id="44" name="C1-E18 ellipse 42" descr="sci-ppt:o042"/>
-          <p:cNvSpPr/>
-          <p:nvPr/>
-        </p:nvSpPr>
-        <p:spPr>
-          <a:xfrm>
-            <a:off x="6491457" y="4454565"/>
-            <a:ext cx="109728" cy="109728"/>
-          </a:xfrm>
-          <a:prstGeom prst="ellipse">
-            <a:avLst/>
-          </a:prstGeom>
-          <a:solidFill>
-            <a:srgbClr val="F2B880"/>
-          </a:solidFill>
-          <a:ln w="12700">
-            <a:solidFill>
-              <a:srgbClr val="F2B880"/>
-            </a:solidFill>
-          </a:ln>
-          <a:effectLst/>
-        </p:spPr>
-        <p:txBody>
-          <a:bodyPr rtlCol="0" anchor="ctr"/>
-          <a:lstStyle/>
-          <a:p>
-            <a:pPr algn="ctr"/>
-          </a:p>
-        </p:txBody>
-      </p:sp>
-      <p:sp>
-        <p:nvSpPr>
-          <p:cNvPr id="45" name="C1-E18 ellipse 43" descr="sci-ppt:o043"/>
-          <p:cNvSpPr/>
-          <p:nvPr/>
-        </p:nvSpPr>
-        <p:spPr>
-          <a:xfrm>
-            <a:off x="6405267" y="4320570"/>
-            <a:ext cx="109728" cy="109728"/>
-          </a:xfrm>
-          <a:prstGeom prst="ellipse">
-            <a:avLst/>
-          </a:prstGeom>
-          <a:solidFill>
-            <a:srgbClr val="F2B880"/>
-          </a:solidFill>
-          <a:ln w="12700">
-            <a:solidFill>
-              <a:srgbClr val="F2B880"/>
-            </a:solidFill>
-          </a:ln>
-          <a:effectLst/>
-        </p:spPr>
-        <p:txBody>
-          <a:bodyPr rtlCol="0" anchor="ctr"/>
-          <a:lstStyle/>
-          <a:p>
-            <a:pPr algn="ctr"/>
-          </a:p>
-        </p:txBody>
-      </p:sp>
-      <p:sp>
-        <p:nvSpPr>
-          <p:cNvPr id="46" name="C1-E18 ellipse 44" descr="sci-ppt:o044"/>
-          <p:cNvSpPr/>
-          <p:nvPr/>
-        </p:nvSpPr>
-        <p:spPr>
-          <a:xfrm>
-            <a:off x="6305486" y="4170564"/>
-            <a:ext cx="109728" cy="109728"/>
-          </a:xfrm>
-          <a:prstGeom prst="ellipse">
-            <a:avLst/>
-          </a:prstGeom>
-          <a:solidFill>
-            <a:srgbClr val="F2B880"/>
-          </a:solidFill>
-          <a:ln w="12700">
-            <a:solidFill>
-              <a:srgbClr val="F2B880"/>
-            </a:solidFill>
-          </a:ln>
-          <a:effectLst/>
-        </p:spPr>
-        <p:txBody>
-          <a:bodyPr rtlCol="0" anchor="ctr"/>
-          <a:lstStyle/>
-          <a:p>
-            <a:pPr algn="ctr"/>
-          </a:p>
-        </p:txBody>
-      </p:sp>
-      <p:sp>
-        <p:nvSpPr>
-          <p:cNvPr id="47" name="C1-E18 ellipse 45" descr="sci-ppt:o045"/>
-          <p:cNvSpPr/>
-          <p:nvPr/>
-        </p:nvSpPr>
-        <p:spPr>
-          <a:xfrm>
-            <a:off x="6193684" y="4008894"/>
-            <a:ext cx="109728" cy="109728"/>
-          </a:xfrm>
-          <a:prstGeom prst="ellipse">
-            <a:avLst/>
-          </a:prstGeom>
-          <a:solidFill>
-            <a:srgbClr val="F2B880"/>
-          </a:solidFill>
-          <a:ln w="12700">
-            <a:solidFill>
-              <a:srgbClr val="F2B880"/>
-            </a:solidFill>
-          </a:ln>
-          <a:effectLst/>
-        </p:spPr>
-        <p:txBody>
-          <a:bodyPr rtlCol="0" anchor="ctr"/>
-          <a:lstStyle/>
-          <a:p>
-            <a:pPr algn="ctr"/>
-          </a:p>
-        </p:txBody>
-      </p:sp>
-      <p:sp>
-        <p:nvSpPr>
-          <p:cNvPr id="48" name="C1-E18 ellipse 46" descr="sci-ppt:o046"/>
-          <p:cNvSpPr/>
-          <p:nvPr/>
-        </p:nvSpPr>
-        <p:spPr>
-          <a:xfrm>
-            <a:off x="6067549" y="3834458"/>
-            <a:ext cx="109728" cy="109728"/>
-          </a:xfrm>
-          <a:prstGeom prst="ellipse">
-            <a:avLst/>
-          </a:prstGeom>
-          <a:solidFill>
-            <a:srgbClr val="F2B880"/>
-          </a:solidFill>
-          <a:ln w="12700">
-            <a:solidFill>
-              <a:srgbClr val="F2B880"/>
-            </a:solidFill>
-          </a:ln>
-          <a:effectLst/>
-        </p:spPr>
-        <p:txBody>
-          <a:bodyPr rtlCol="0" anchor="ctr"/>
-          <a:lstStyle/>
-          <a:p>
-            <a:pPr algn="ctr"/>
-          </a:p>
-        </p:txBody>
-      </p:sp>
-      <p:sp>
-        <p:nvSpPr>
-          <p:cNvPr id="49" name="C1-E18 ellipse 47" descr="sci-ppt:o047"/>
-          <p:cNvSpPr/>
-          <p:nvPr/>
-        </p:nvSpPr>
-        <p:spPr>
-          <a:xfrm>
-            <a:off x="5925633" y="3648049"/>
-            <a:ext cx="109728" cy="109728"/>
-          </a:xfrm>
-          <a:prstGeom prst="ellipse">
-            <a:avLst/>
-          </a:prstGeom>
-          <a:solidFill>
-            <a:srgbClr val="F2B880"/>
-          </a:solidFill>
-          <a:ln w="12700">
-            <a:solidFill>
-              <a:srgbClr val="F2B880"/>
-            </a:solidFill>
-          </a:ln>
-          <a:effectLst/>
-        </p:spPr>
-        <p:txBody>
-          <a:bodyPr rtlCol="0" anchor="ctr"/>
-          <a:lstStyle/>
-          <a:p>
-            <a:pPr algn="ctr"/>
-          </a:p>
-        </p:txBody>
-      </p:sp>
-      <p:sp>
-        <p:nvSpPr>
-          <p:cNvPr id="50" name="C1-E18 ellipse 48" descr="sci-ppt:o048"/>
-          <p:cNvSpPr/>
-          <p:nvPr/>
-        </p:nvSpPr>
-        <p:spPr>
-          <a:xfrm>
-            <a:off x="5763942" y="3448027"/>
-            <a:ext cx="109728" cy="109728"/>
-          </a:xfrm>
-          <a:prstGeom prst="ellipse">
-            <a:avLst/>
-          </a:prstGeom>
-          <a:solidFill>
-            <a:srgbClr val="F2B880"/>
-          </a:solidFill>
-          <a:ln w="12700">
-            <a:solidFill>
-              <a:srgbClr val="F2B880"/>
-            </a:solidFill>
-          </a:ln>
-          <a:effectLst/>
-        </p:spPr>
-        <p:txBody>
-          <a:bodyPr rtlCol="0" anchor="ctr"/>
-          <a:lstStyle/>
-          <a:p>
-            <a:pPr algn="ctr"/>
-          </a:p>
-        </p:txBody>
-      </p:sp>
-      <p:sp>
-        <p:nvSpPr>
-          <p:cNvPr id="51" name="C1-E18 ellipse 49" descr="sci-ppt:o049"/>
-          <p:cNvSpPr/>
-          <p:nvPr/>
-        </p:nvSpPr>
-        <p:spPr>
-          <a:xfrm>
-            <a:off x="5584065" y="3240488"/>
-            <a:ext cx="109728" cy="109728"/>
-          </a:xfrm>
-          <a:prstGeom prst="ellipse">
-            <a:avLst/>
-          </a:prstGeom>
-          <a:solidFill>
-            <a:srgbClr val="F2B880"/>
-          </a:solidFill>
-          <a:ln w="12700">
-            <a:solidFill>
-              <a:srgbClr val="F2B880"/>
-            </a:solidFill>
-          </a:ln>
-          <a:effectLst/>
-        </p:spPr>
-        <p:txBody>
-          <a:bodyPr rtlCol="0" anchor="ctr"/>
-          <a:lstStyle/>
-          <a:p>
-            <a:pPr algn="ctr"/>
-          </a:p>
-        </p:txBody>
-      </p:sp>
-      <p:sp>
-        <p:nvSpPr>
-          <p:cNvPr id="52" name="C1-E18 ellipse 50" descr="sci-ppt:o050"/>
-          <p:cNvSpPr/>
-          <p:nvPr/>
-        </p:nvSpPr>
-        <p:spPr>
-          <a:xfrm>
-            <a:off x="5380835" y="3024281"/>
-            <a:ext cx="109728" cy="109728"/>
-          </a:xfrm>
-          <a:prstGeom prst="ellipse">
-            <a:avLst/>
-          </a:prstGeom>
-          <a:solidFill>
-            <a:srgbClr val="F2B880"/>
-          </a:solidFill>
-          <a:ln w="12700">
-            <a:solidFill>
-              <a:srgbClr val="F2B880"/>
-            </a:solidFill>
-          </a:ln>
-          <a:effectLst/>
-        </p:spPr>
-        <p:txBody>
-          <a:bodyPr rtlCol="0" anchor="ctr"/>
-          <a:lstStyle/>
-          <a:p>
-            <a:pPr algn="ctr"/>
-          </a:p>
-        </p:txBody>
-      </p:sp>
-      <p:sp>
-        <p:nvSpPr>
-          <p:cNvPr id="53" name="C1-E18 ellipse 51" descr="sci-ppt:o051"/>
-          <p:cNvSpPr/>
-          <p:nvPr/>
-        </p:nvSpPr>
-        <p:spPr>
-          <a:xfrm>
-            <a:off x="5146590" y="2798086"/>
-            <a:ext cx="109728" cy="109728"/>
-          </a:xfrm>
-          <a:prstGeom prst="ellipse">
-            <a:avLst/>
-          </a:prstGeom>
-          <a:solidFill>
-            <a:srgbClr val="F2B880"/>
-          </a:solidFill>
-          <a:ln w="12700">
-            <a:solidFill>
-              <a:srgbClr val="F2B880"/>
-            </a:solidFill>
-          </a:ln>
-          <a:effectLst/>
-        </p:spPr>
-        <p:txBody>
-          <a:bodyPr rtlCol="0" anchor="ctr"/>
-          <a:lstStyle/>
-          <a:p>
-            <a:pPr algn="ctr"/>
-          </a:p>
-        </p:txBody>
-      </p:sp>
-      <p:sp>
-        <p:nvSpPr>
-          <p:cNvPr id="54" name="C1-E18 ellipse 52" descr="sci-ppt:o052"/>
-          <p:cNvSpPr/>
-          <p:nvPr/>
-        </p:nvSpPr>
-        <p:spPr>
-          <a:xfrm>
-            <a:off x="4880502" y="2569480"/>
-            <a:ext cx="109728" cy="109728"/>
-          </a:xfrm>
-          <a:prstGeom prst="ellipse">
-            <a:avLst/>
-          </a:prstGeom>
-          <a:solidFill>
-            <a:srgbClr val="F2B880"/>
-          </a:solidFill>
-          <a:ln w="12700">
-            <a:solidFill>
-              <a:srgbClr val="F2B880"/>
-            </a:solidFill>
-          </a:ln>
-          <a:effectLst/>
-        </p:spPr>
-        <p:txBody>
-          <a:bodyPr rtlCol="0" anchor="ctr"/>
-          <a:lstStyle/>
-          <a:p>
-            <a:pPr algn="ctr"/>
-          </a:p>
-        </p:txBody>
-      </p:sp>
-      <p:sp>
-        <p:nvSpPr>
-          <p:cNvPr id="55" name="C1-E18 ellipse 53" descr="sci-ppt:o053"/>
-          <p:cNvSpPr/>
-          <p:nvPr/>
-        </p:nvSpPr>
-        <p:spPr>
-          <a:xfrm>
-            <a:off x="4569550" y="2338105"/>
-            <a:ext cx="109728" cy="109728"/>
-          </a:xfrm>
-          <a:prstGeom prst="ellipse">
-            <a:avLst/>
-          </a:prstGeom>
-          <a:solidFill>
-            <a:srgbClr val="F2B880"/>
-          </a:solidFill>
-          <a:ln w="12700">
-            <a:solidFill>
-              <a:srgbClr val="F2B880"/>
-            </a:solidFill>
-          </a:ln>
-          <a:effectLst/>
-        </p:spPr>
-        <p:txBody>
-          <a:bodyPr rtlCol="0" anchor="ctr"/>
-          <a:lstStyle/>
-          <a:p>
-            <a:pPr algn="ctr"/>
-          </a:p>
-        </p:txBody>
-      </p:sp>
-      <p:sp>
-        <p:nvSpPr>
-          <p:cNvPr id="56" name="C1-E18 ellipse 54" descr="sci-ppt:o054"/>
-          <p:cNvSpPr/>
-          <p:nvPr/>
-        </p:nvSpPr>
-        <p:spPr>
-          <a:xfrm>
-            <a:off x="4190983" y="2104326"/>
-            <a:ext cx="109728" cy="109728"/>
-          </a:xfrm>
-          <a:prstGeom prst="ellipse">
-            <a:avLst/>
-          </a:prstGeom>
-          <a:solidFill>
-            <a:srgbClr val="F2B880"/>
-          </a:solidFill>
-          <a:ln w="12700">
-            <a:solidFill>
-              <a:srgbClr val="F2B880"/>
-            </a:solidFill>
-          </a:ln>
-          <a:effectLst/>
-        </p:spPr>
-        <p:txBody>
-          <a:bodyPr rtlCol="0" anchor="ctr"/>
-          <a:lstStyle/>
-          <a:p>
-            <a:pPr algn="ctr"/>
-          </a:p>
-        </p:txBody>
-      </p:sp>
-      <p:sp>
-        <p:nvSpPr>
-          <p:cNvPr id="57" name="C1-E18 ellipse 55" descr="sci-ppt:o055"/>
-          <p:cNvSpPr/>
-          <p:nvPr/>
-        </p:nvSpPr>
-        <p:spPr>
-          <a:xfrm>
-            <a:off x="3719128" y="1878853"/>
-            <a:ext cx="109728" cy="109728"/>
-          </a:xfrm>
-          <a:prstGeom prst="ellipse">
-            <a:avLst/>
-          </a:prstGeom>
-          <a:solidFill>
-            <a:srgbClr val="F2B880"/>
-          </a:solidFill>
-          <a:ln w="12700">
-            <a:solidFill>
-              <a:srgbClr val="F2B880"/>
-            </a:solidFill>
-          </a:ln>
-          <a:effectLst/>
-        </p:spPr>
-        <p:txBody>
-          <a:bodyPr rtlCol="0" anchor="ctr"/>
-          <a:lstStyle/>
-          <a:p>
-            <a:pPr algn="ctr"/>
-          </a:p>
-        </p:txBody>
-      </p:sp>
-      <p:sp>
-        <p:nvSpPr>
-          <p:cNvPr id="58" name="C1-E18 ellipse 56" descr="sci-ppt:o056"/>
-          <p:cNvSpPr/>
-          <p:nvPr/>
-        </p:nvSpPr>
-        <p:spPr>
-          <a:xfrm>
-            <a:off x="3057991" y="1667190"/>
-            <a:ext cx="109728" cy="109728"/>
-          </a:xfrm>
-          <a:prstGeom prst="ellipse">
-            <a:avLst/>
-          </a:prstGeom>
-          <a:solidFill>
-            <a:srgbClr val="F2B880"/>
-          </a:solidFill>
-          <a:ln w="12700">
-            <a:solidFill>
-              <a:srgbClr val="F2B880"/>
-            </a:solidFill>
-          </a:ln>
-          <a:effectLst/>
-        </p:spPr>
-        <p:txBody>
-          <a:bodyPr rtlCol="0" anchor="ctr"/>
-          <a:lstStyle/>
-          <a:p>
-            <a:pPr algn="ctr"/>
-          </a:p>
-        </p:txBody>
-      </p:sp>
-      <p:sp>
-        <p:nvSpPr>
-          <p:cNvPr id="59" name="C1-E18 ellipse 57" descr="sci-ppt:o057"/>
-          <p:cNvSpPr/>
-          <p:nvPr/>
-        </p:nvSpPr>
-        <p:spPr>
-          <a:xfrm>
-            <a:off x="1400513" y="1493534"/>
-            <a:ext cx="109728" cy="109728"/>
-          </a:xfrm>
-          <a:prstGeom prst="ellipse">
-            <a:avLst/>
-          </a:prstGeom>
-          <a:solidFill>
-            <a:srgbClr val="F2B880"/>
-          </a:solidFill>
-          <a:ln w="12700">
-            <a:solidFill>
-              <a:srgbClr val="F2B880"/>
-            </a:solidFill>
-          </a:ln>
-          <a:effectLst/>
-        </p:spPr>
-        <p:txBody>
-          <a:bodyPr rtlCol="0" anchor="ctr"/>
-          <a:lstStyle/>
-          <a:p>
-            <a:pPr algn="ctr"/>
-          </a:p>
-        </p:txBody>
-      </p:sp>
-      <p:sp>
-        <p:nvSpPr>
-          <p:cNvPr id="60" name="C1-E18 text 58" descr="sci-ppt:o058"/>
+          <p:cNvPr id="63" name="C1-E18 text 61" descr="sci-ppt:o061"/>
           <p:cNvSpPr txBox="1"/>
           <p:nvPr/>
         </p:nvSpPr>
         <p:spPr>
           <a:xfrm>
-            <a:off x="1225296" y="3566160"/>
-            <a:ext cx="3108960" cy="231648"/>
+            <a:off x="3386141" y="4365033"/>
+            <a:ext cx="2194560" cy="223900"/>
           </a:xfrm>
           <a:prstGeom prst="rect">
             <a:avLst/>
@@ -5473,83 +5805,27 @@
               </a:spcAft>
             </a:pPr>
             <a:r>
-              <a:rPr sz="1200" b="0" i="0">
-                <a:solidFill>
-                  <a:srgbClr val="8EDBD4"/>
-                </a:solidFill>
-                <a:latin typeface="Arial"/>
-              </a:rPr>
-              <a:t>line: 1 − (R/Rₘₐₓ)³ from Eq. C1-E18</a:t>
-            </a:r>
-          </a:p>
-        </p:txBody>
-      </p:sp>
-      <p:sp>
-        <p:nvSpPr>
-          <p:cNvPr id="61" name="C1-E18 text 59" descr="sci-ppt:o059"/>
-          <p:cNvSpPr txBox="1"/>
-          <p:nvPr/>
-        </p:nvSpPr>
-        <p:spPr>
-          <a:xfrm>
-            <a:off x="1225296" y="4053840"/>
-            <a:ext cx="3108960" cy="417576"/>
-          </a:xfrm>
-          <a:prstGeom prst="rect">
-            <a:avLst/>
-          </a:prstGeom>
-          <a:noFill/>
-          <a:effectLst/>
-        </p:spPr>
-        <p:txBody>
-          <a:bodyPr wrap="none" lIns="18288" rIns="18288" tIns="18288" bIns="18288" anchor="t">
-            <a:spAutoFit/>
-          </a:bodyPr>
-          <a:lstStyle/>
-          <a:p>
-            <a:pPr algn="l">
-              <a:spcAft>
-                <a:spcPts val="0"/>
-              </a:spcAft>
-            </a:pPr>
-            <a:r>
-              <a:rPr sz="1200" b="0" i="0">
+              <a:rPr sz="1150" b="0" i="0">
                 <a:solidFill>
                   <a:srgbClr val="F2B880"/>
                 </a:solidFill>
                 <a:latin typeface="Arial"/>
               </a:rPr>
-              <a:t>dots: direct ODE solution; largest</a:t>
-            </a:r>
-          </a:p>
-          <a:p>
-            <a:pPr algn="l">
-              <a:spcAft>
-                <a:spcPts val="0"/>
-              </a:spcAft>
-            </a:pPr>
-            <a:r>
-              <a:rPr sz="1200" b="0" i="0">
-                <a:solidFill>
-                  <a:srgbClr val="F2B880"/>
-                </a:solidFill>
-                <a:latin typeface="Arial"/>
-              </a:rPr>
-              <a:t>difference 9e-11</a:t>
-            </a:r>
-          </a:p>
-        </p:txBody>
-      </p:sp>
-      <p:sp>
-        <p:nvSpPr>
-          <p:cNvPr id="62" name="C1-E18 round_rect 60" descr="sci-ppt:o060"/>
+              <a:t>Kₗ = 7/8 E_B = 9.896 nJ</a:t>
+            </a:r>
+          </a:p>
+        </p:txBody>
+      </p:sp>
+      <p:sp>
+        <p:nvSpPr>
+          <p:cNvPr id="64" name="C1-E18 round_rect 62" descr="sci-ppt:o062"/>
           <p:cNvSpPr/>
           <p:nvPr/>
         </p:nvSpPr>
         <p:spPr>
           <a:xfrm>
-            <a:off x="7315200" y="1371600"/>
-            <a:ext cx="4526280" cy="3657600"/>
+            <a:off x="7040880" y="1280160"/>
+            <a:ext cx="4800600" cy="4526280"/>
           </a:xfrm>
           <a:prstGeom prst="roundRect">
             <a:avLst/>
@@ -5574,14 +5850,14 @@
       </p:sp>
       <p:sp>
         <p:nvSpPr>
-          <p:cNvPr id="63" name="C1-E18 text 61" descr="sci-ppt:o061"/>
+          <p:cNvPr id="65" name="C1-E18 text 63" descr="sci-ppt:o063"/>
           <p:cNvSpPr txBox="1"/>
           <p:nvPr/>
         </p:nvSpPr>
         <p:spPr>
           <a:xfrm>
-            <a:off x="7424927" y="1426464"/>
-            <a:ext cx="4306824" cy="254889"/>
+            <a:off x="7150608" y="1335024"/>
+            <a:ext cx="4581144" cy="254889"/>
           </a:xfrm>
           <a:prstGeom prst="rect">
             <a:avLst/>
@@ -5607,21 +5883,21 @@
                 </a:solidFill>
                 <a:latin typeface="Arial"/>
               </a:rPr>
-              <a:t>Two independent routes</a:t>
-            </a:r>
-          </a:p>
-        </p:txBody>
-      </p:sp>
-      <p:sp>
-        <p:nvSpPr>
-          <p:cNvPr id="64" name="C1-E18 text 62" descr="sci-ppt:o062"/>
+              <a:t>The declared numbers</a:t>
+            </a:r>
+          </a:p>
+        </p:txBody>
+      </p:sp>
+      <p:sp>
+        <p:nvSpPr>
+          <p:cNvPr id="66" name="C1-E18 text 64" descr="sci-ppt:o064"/>
           <p:cNvSpPr txBox="1"/>
           <p:nvPr/>
         </p:nvSpPr>
         <p:spPr>
           <a:xfrm>
-            <a:off x="7452360" y="1828800"/>
-            <a:ext cx="4297680" cy="433070"/>
+            <a:off x="7223760" y="1783080"/>
+            <a:ext cx="4480560" cy="247142"/>
           </a:xfrm>
           <a:prstGeom prst="rect">
             <a:avLst/>
@@ -5641,15 +5917,79 @@
               </a:spcAft>
             </a:pPr>
             <a:r>
-              <a:rPr sz="1250" b="0" i="0">
+              <a:rPr sz="1300" b="1" i="0">
+                <a:solidFill>
+                  <a:srgbClr val="F2B880"/>
+                </a:solidFill>
+                <a:latin typeface="Arial"/>
+              </a:rPr>
+              <a:t>Collapse time</a:t>
+            </a:r>
+          </a:p>
+        </p:txBody>
+      </p:sp>
+      <p:sp>
+        <p:nvSpPr>
+          <p:cNvPr id="67" name="C1-E18 text 65" descr="sci-ppt:o065"/>
+          <p:cNvSpPr txBox="1"/>
+          <p:nvPr/>
+        </p:nvSpPr>
+        <p:spPr>
+          <a:xfrm>
+            <a:off x="7315200" y="2030221"/>
+            <a:ext cx="4389120" cy="231648"/>
+          </a:xfrm>
+          <a:prstGeom prst="rect">
+            <a:avLst/>
+          </a:prstGeom>
+          <a:noFill/>
+          <a:effectLst/>
+        </p:spPr>
+        <p:txBody>
+          <a:bodyPr wrap="none" lIns="18288" rIns="18288" tIns="18288" bIns="18288" anchor="t">
+            <a:spAutoFit/>
+          </a:bodyPr>
+          <a:lstStyle/>
+          <a:p>
+            <a:pPr algn="l">
+              <a:spcAft>
+                <a:spcPts val="0"/>
+              </a:spcAft>
+            </a:pPr>
+            <a:r>
+              <a:rPr sz="1200" b="0" i="0">
                 <a:solidFill>
                   <a:srgbClr val="E7F0F3"/>
                 </a:solidFill>
                 <a:latin typeface="Arial"/>
               </a:rPr>
-              <a:t>Route 1: speed solution</a:t>
-            </a:r>
-          </a:p>
+              <a:t>t_c = 0.9147 × 30 µm × √(1000/10⁵) = 2.7440 µs</a:t>
+            </a:r>
+          </a:p>
+        </p:txBody>
+      </p:sp>
+      <p:sp>
+        <p:nvSpPr>
+          <p:cNvPr id="68" name="C1-E18 text 66" descr="sci-ppt:o066"/>
+          <p:cNvSpPr txBox="1"/>
+          <p:nvPr/>
+        </p:nvSpPr>
+        <p:spPr>
+          <a:xfrm>
+            <a:off x="7223760" y="2426462"/>
+            <a:ext cx="4480560" cy="247142"/>
+          </a:xfrm>
+          <a:prstGeom prst="rect">
+            <a:avLst/>
+          </a:prstGeom>
+          <a:noFill/>
+          <a:effectLst/>
+        </p:spPr>
+        <p:txBody>
+          <a:bodyPr wrap="none" lIns="18288" rIns="18288" tIns="18288" bIns="18288" anchor="t">
+            <a:spAutoFit/>
+          </a:bodyPr>
+          <a:lstStyle/>
           <a:p>
             <a:pPr algn="l">
               <a:spcAft>
@@ -5657,27 +5997,67 @@
               </a:spcAft>
             </a:pPr>
             <a:r>
-              <a:rPr sz="1250" b="0" i="0">
+              <a:rPr sz="1300" b="1" i="0">
+                <a:solidFill>
+                  <a:srgbClr val="F2B880"/>
+                </a:solidFill>
+                <a:latin typeface="Arial"/>
+              </a:rPr>
+              <a:t>Work scale</a:t>
+            </a:r>
+          </a:p>
+        </p:txBody>
+      </p:sp>
+      <p:sp>
+        <p:nvSpPr>
+          <p:cNvPr id="69" name="C1-E18 text 67" descr="sci-ppt:o067"/>
+          <p:cNvSpPr txBox="1"/>
+          <p:nvPr/>
+        </p:nvSpPr>
+        <p:spPr>
+          <a:xfrm>
+            <a:off x="7315200" y="2673604"/>
+            <a:ext cx="4389120" cy="231648"/>
+          </a:xfrm>
+          <a:prstGeom prst="rect">
+            <a:avLst/>
+          </a:prstGeom>
+          <a:noFill/>
+          <a:effectLst/>
+        </p:spPr>
+        <p:txBody>
+          <a:bodyPr wrap="none" lIns="18288" rIns="18288" tIns="18288" bIns="18288" anchor="t">
+            <a:spAutoFit/>
+          </a:bodyPr>
+          <a:lstStyle/>
+          <a:p>
+            <a:pPr algn="l">
+              <a:spcAft>
+                <a:spcPts val="0"/>
+              </a:spcAft>
+            </a:pPr>
+            <a:r>
+              <a:rPr sz="1200" b="0" i="0">
                 <a:solidFill>
                   <a:srgbClr val="E7F0F3"/>
                 </a:solidFill>
                 <a:latin typeface="Arial"/>
               </a:rPr>
-              <a:t>Kₗ = 2πρR³Ṙ² with Ṙ from Eq. C1-E15</a:t>
-            </a:r>
-          </a:p>
-        </p:txBody>
-      </p:sp>
-      <p:sp>
-        <p:nvSpPr>
-          <p:cNvPr id="65" name="C1-E18 text 63" descr="sci-ppt:o063"/>
+              <a:t>E_B = (4π/3)(10⁵)(30 µm)³ = 11.3097 nJ</a:t>
+            </a:r>
+          </a:p>
+        </p:txBody>
+      </p:sp>
+      <p:sp>
+        <p:nvSpPr>
+          <p:cNvPr id="70" name="C1-E18 text 68" descr="sci-ppt:o068"/>
           <p:cNvSpPr txBox="1"/>
           <p:nvPr/>
         </p:nvSpPr>
         <p:spPr>
           <a:xfrm>
-            <a:off x="7452360" y="2743200"/>
-            <a:ext cx="4297680" cy="433070"/>
+            <a:off x="7223760" y="3069844"/>
+            <a:ext cx="4480560" cy="247142"/>
           </a:xfrm>
           <a:prstGeom prst="rect">
             <a:avLst/>
@@ -5697,15 +6077,79 @@
               </a:spcAft>
             </a:pPr>
             <a:r>
-              <a:rPr sz="1250" b="0" i="0">
+              <a:rPr sz="1300" b="1" i="0">
+                <a:solidFill>
+                  <a:srgbClr val="F2B880"/>
+                </a:solidFill>
+                <a:latin typeface="Arial"/>
+              </a:rPr>
+              <a:t>Half-radius speed</a:t>
+            </a:r>
+          </a:p>
+        </p:txBody>
+      </p:sp>
+      <p:sp>
+        <p:nvSpPr>
+          <p:cNvPr id="71" name="C1-E18 text 69" descr="sci-ppt:o069"/>
+          <p:cNvSpPr txBox="1"/>
+          <p:nvPr/>
+        </p:nvSpPr>
+        <p:spPr>
+          <a:xfrm>
+            <a:off x="7315200" y="3316986"/>
+            <a:ext cx="4389120" cy="231648"/>
+          </a:xfrm>
+          <a:prstGeom prst="rect">
+            <a:avLst/>
+          </a:prstGeom>
+          <a:noFill/>
+          <a:effectLst/>
+        </p:spPr>
+        <p:txBody>
+          <a:bodyPr wrap="none" lIns="18288" rIns="18288" tIns="18288" bIns="18288" anchor="t">
+            <a:spAutoFit/>
+          </a:bodyPr>
+          <a:lstStyle/>
+          <a:p>
+            <a:pPr algn="l">
+              <a:spcAft>
+                <a:spcPts val="0"/>
+              </a:spcAft>
+            </a:pPr>
+            <a:r>
+              <a:rPr sz="1200" b="0" i="0">
                 <a:solidFill>
                   <a:srgbClr val="E7F0F3"/>
                 </a:solidFill>
                 <a:latin typeface="Arial"/>
               </a:rPr>
-              <a:t>Route 2: pressure work</a:t>
-            </a:r>
-          </a:p>
+              <a:t>Ṙ = −√[(2×10⁵/(3×1000))(8 − 1)] = −21.6025 m/s</a:t>
+            </a:r>
+          </a:p>
+        </p:txBody>
+      </p:sp>
+      <p:sp>
+        <p:nvSpPr>
+          <p:cNvPr id="72" name="C1-E18 text 70" descr="sci-ppt:o070"/>
+          <p:cNvSpPr txBox="1"/>
+          <p:nvPr/>
+        </p:nvSpPr>
+        <p:spPr>
+          <a:xfrm>
+            <a:off x="7223760" y="3713226"/>
+            <a:ext cx="4480560" cy="247142"/>
+          </a:xfrm>
+          <a:prstGeom prst="rect">
+            <a:avLst/>
+          </a:prstGeom>
+          <a:noFill/>
+          <a:effectLst/>
+        </p:spPr>
+        <p:txBody>
+          <a:bodyPr wrap="none" lIns="18288" rIns="18288" tIns="18288" bIns="18288" anchor="t">
+            <a:spAutoFit/>
+          </a:bodyPr>
+          <a:lstStyle/>
           <a:p>
             <a:pPr algn="l">
               <a:spcAft>
@@ -5713,27 +6157,67 @@
               </a:spcAft>
             </a:pPr>
             <a:r>
-              <a:rPr sz="1250" b="0" i="0">
+              <a:rPr sz="1300" b="1" i="0">
+                <a:solidFill>
+                  <a:srgbClr val="F2B880"/>
+                </a:solidFill>
+                <a:latin typeface="Arial"/>
+              </a:rPr>
+              <a:t>Half-radius energy</a:t>
+            </a:r>
+          </a:p>
+        </p:txBody>
+      </p:sp>
+      <p:sp>
+        <p:nvSpPr>
+          <p:cNvPr id="73" name="C1-E18 text 71" descr="sci-ppt:o071"/>
+          <p:cNvSpPr txBox="1"/>
+          <p:nvPr/>
+        </p:nvSpPr>
+        <p:spPr>
+          <a:xfrm>
+            <a:off x="7315200" y="3960368"/>
+            <a:ext cx="4389120" cy="231648"/>
+          </a:xfrm>
+          <a:prstGeom prst="rect">
+            <a:avLst/>
+          </a:prstGeom>
+          <a:noFill/>
+          <a:effectLst/>
+        </p:spPr>
+        <p:txBody>
+          <a:bodyPr wrap="none" lIns="18288" rIns="18288" tIns="18288" bIns="18288" anchor="t">
+            <a:spAutoFit/>
+          </a:bodyPr>
+          <a:lstStyle/>
+          <a:p>
+            <a:pPr algn="l">
+              <a:spcAft>
+                <a:spcPts val="0"/>
+              </a:spcAft>
+            </a:pPr>
+            <a:r>
+              <a:rPr sz="1200" b="0" i="0">
                 <a:solidFill>
                   <a:srgbClr val="E7F0F3"/>
                 </a:solidFill>
                 <a:latin typeface="Arial"/>
               </a:rPr>
-              <a:t>E_B = Δp_c Vₘₐₓ = (4π/3) Δp_c Rₘₐₓ³</a:t>
-            </a:r>
-          </a:p>
-        </p:txBody>
-      </p:sp>
-      <p:sp>
-        <p:nvSpPr>
-          <p:cNvPr id="66" name="C1-E18 text 64" descr="sci-ppt:o064"/>
+              <a:t>Kₗ = (7/8) E_B = 9.8960 nJ</a:t>
+            </a:r>
+          </a:p>
+        </p:txBody>
+      </p:sp>
+      <p:sp>
+        <p:nvSpPr>
+          <p:cNvPr id="74" name="C1-E18 text 72" descr="sci-ppt:o072"/>
           <p:cNvSpPr txBox="1"/>
           <p:nvPr/>
         </p:nvSpPr>
         <p:spPr>
           <a:xfrm>
-            <a:off x="7452360" y="3657600"/>
-            <a:ext cx="4297680" cy="433070"/>
+            <a:off x="7223760" y="4402327"/>
+            <a:ext cx="4480560" cy="402081"/>
           </a:xfrm>
           <a:prstGeom prst="rect">
             <a:avLst/>
@@ -5753,13 +6237,13 @@
               </a:spcAft>
             </a:pPr>
             <a:r>
-              <a:rPr sz="1250" b="1" i="0">
+              <a:rPr sz="1150" b="0" i="0">
                 <a:solidFill>
-                  <a:srgbClr val="F2B880"/>
+                  <a:srgbClr val="B4C7D2"/>
                 </a:solidFill>
                 <a:latin typeface="Arial"/>
               </a:rPr>
-              <a:t>Kₗ/E_B = 1 − (R/Rₘₐₓ)³  holds at every radius, so</a:t>
+              <a:t>Inputs: ρ = 1000 kg/m³, Δp_c = 100 kPa, Rₘₐₓ = 30 µm. A</a:t>
             </a:r>
           </a:p>
           <a:p>
@@ -5769,60 +6253,20 @@
               </a:spcAft>
             </a:pPr>
             <a:r>
-              <a:rPr sz="1250" b="1" i="0">
+              <a:rPr sz="1150" b="0" i="0">
                 <a:solidFill>
-                  <a:srgbClr val="F2B880"/>
+                  <a:srgbClr val="B4C7D2"/>
                 </a:solidFill>
                 <a:latin typeface="Arial"/>
               </a:rPr>
-              <a:t>no energy is created or lost.</a:t>
-            </a:r>
-          </a:p>
-        </p:txBody>
-      </p:sp>
-      <p:sp>
-        <p:nvSpPr>
-          <p:cNvPr id="67" name="C1-E18 text 65" descr="sci-ppt:o065"/>
-          <p:cNvSpPr txBox="1"/>
-          <p:nvPr/>
-        </p:nvSpPr>
-        <p:spPr>
-          <a:xfrm>
-            <a:off x="914400" y="5733288"/>
-            <a:ext cx="10972800" cy="254889"/>
-          </a:xfrm>
-          <a:prstGeom prst="rect">
-            <a:avLst/>
-          </a:prstGeom>
-          <a:noFill/>
-          <a:effectLst/>
-        </p:spPr>
-        <p:txBody>
-          <a:bodyPr wrap="none" lIns="18288" rIns="18288" tIns="18288" bIns="18288" anchor="t">
-            <a:spAutoFit/>
-          </a:bodyPr>
-          <a:lstStyle/>
-          <a:p>
-            <a:pPr algn="l">
-              <a:spcAft>
-                <a:spcPts val="0"/>
-              </a:spcAft>
-            </a:pPr>
-            <a:r>
-              <a:rPr sz="1350" b="0" i="0">
-                <a:solidFill>
-                  <a:srgbClr val="E7F0F3"/>
-                </a:solidFill>
-                <a:latin typeface="Arial"/>
-              </a:rPr>
-              <a:t>Half the radius has released 7/8 of the stored pressure work as kinetic energy.</a:t>
-            </a:r>
-          </a:p>
-        </p:txBody>
-      </p:sp>
-      <p:sp>
-        <p:nvSpPr>
-          <p:cNvPr id="68" name="C1-E18 text 66" descr="sci-ppt:o066"/>
+              <a:t>teaching case, not a measurement.</a:t>
+            </a:r>
+          </a:p>
+        </p:txBody>
+      </p:sp>
+      <p:sp>
+        <p:nvSpPr>
+          <p:cNvPr id="75" name="C1-E18 text 73" descr="sci-ppt:o073"/>
           <p:cNvSpPr txBox="1"/>
           <p:nvPr/>
         </p:nvSpPr>
@@ -5855,7 +6299,7 @@
                 </a:solidFill>
                 <a:latin typeface="Arial"/>
               </a:rPr>
-              <a:t>Dots: numerical integration of R R̈ + 3Ṙ²/2 = −Δp_c/ρ (Eq. C1-E13); no viscosity, tension or gas.</a:t>
+              <a:t>All values from Eq. C1-E18 and the Rayleigh curve of Eq. C1-E15.</a:t>
             </a:r>
           </a:p>
         </p:txBody>
